--- a/presentation.pptx
+++ b/presentation.pptx
@@ -3113,8 +3113,8 @@
         </p:nvSpPr>
         <p:spPr>
           <a:xfrm>
-            <a:off x="2743200" y="2011680"/>
-            <a:ext cx="6675120" cy="457200"/>
+            <a:off x="0" y="1828800"/>
+            <a:ext cx="12191695" cy="457200"/>
           </a:xfrm>
           <a:prstGeom prst="rect">
             <a:avLst/>
@@ -3122,18 +3122,20 @@
           <a:noFill/>
         </p:spPr>
         <p:txBody>
-          <a:bodyPr wrap="square"/>
-          <a:lstStyle/>
-          <a:p>
-            <a:pPr algn="ctr"/>
+          <a:bodyPr wrap="square">
+            <a:spAutoFit/>
+          </a:bodyPr>
+          <a:lstStyle/>
+          <a:p>
+            <a:pPr algn="ctr" rtl="0"/>
             <a:r>
               <a:rPr sz="1400" b="1">
                 <a:solidFill>
                   <a:srgbClr val="22C55E"/>
                 </a:solidFill>
-                <a:latin typeface="Arial"/>
+                <a:latin typeface="Heebo"/>
               </a:rPr>
-              <a:t>From Code to Video</a:t>
+              <a:t>FROM CODE TO VIDEO</a:t>
             </a:r>
           </a:p>
         </p:txBody>
@@ -3146,8 +3148,8 @@
         </p:nvSpPr>
         <p:spPr>
           <a:xfrm>
-            <a:off x="1371600" y="2560320"/>
-            <a:ext cx="9418320" cy="1371600"/>
+            <a:off x="1371600" y="2468880"/>
+            <a:ext cx="9418320" cy="1097280"/>
           </a:xfrm>
           <a:prstGeom prst="rect">
             <a:avLst/>
@@ -3155,16 +3157,18 @@
           <a:noFill/>
         </p:spPr>
         <p:txBody>
-          <a:bodyPr wrap="square"/>
-          <a:lstStyle/>
-          <a:p>
-            <a:pPr algn="ctr"/>
-            <a:r>
-              <a:rPr sz="4000" b="1">
+          <a:bodyPr wrap="square">
+            <a:spAutoFit/>
+          </a:bodyPr>
+          <a:lstStyle/>
+          <a:p>
+            <a:pPr algn="ctr" rtl="1"/>
+            <a:r>
+              <a:rPr sz="3600" b="1">
                 <a:solidFill>
                   <a:srgbClr val="DCDAD5"/>
                 </a:solidFill>
-                <a:latin typeface="Arial"/>
+                <a:latin typeface="Heebo"/>
               </a:rPr>
               <a:t>מהפכת יצירת הווידאו עם Remotion ו-Claude Code</a:t>
             </a:r>
@@ -3179,8 +3183,8 @@
         </p:nvSpPr>
         <p:spPr>
           <a:xfrm>
-            <a:off x="2286000" y="4114800"/>
-            <a:ext cx="7589520" cy="914400"/>
+            <a:off x="1828800" y="3840480"/>
+            <a:ext cx="8503920" cy="914400"/>
           </a:xfrm>
           <a:prstGeom prst="rect">
             <a:avLst/>
@@ -3188,19 +3192,40 @@
           <a:noFill/>
         </p:spPr>
         <p:txBody>
-          <a:bodyPr wrap="square"/>
-          <a:lstStyle/>
-          <a:p>
-            <a:pPr algn="ctr"/>
+          <a:bodyPr wrap="square">
+            <a:spAutoFit/>
+          </a:bodyPr>
+          <a:lstStyle/>
+          <a:p>
+            <a:pPr algn="ctr" rtl="1">
+              <a:lnSpc>
+                <a:spcPts val="3200"/>
+              </a:lnSpc>
+            </a:pPr>
             <a:r>
               <a:rPr sz="2000" b="0">
                 <a:solidFill>
                   <a:srgbClr val="A09D96"/>
                 </a:solidFill>
-                <a:latin typeface="Arial"/>
+                <a:latin typeface="Heebo"/>
               </a:rPr>
-              <a:t>אנימציה. גרפיקה. סאונד. קריינות.
-הכל נבנה בקוד.</a:t>
+              <a:t>אנימציה. גרפיקה. סאונד. קריינות.</a:t>
+            </a:r>
+          </a:p>
+          <a:p>
+            <a:pPr algn="ctr" rtl="1">
+              <a:lnSpc>
+                <a:spcPts val="3200"/>
+              </a:lnSpc>
+            </a:pPr>
+            <a:r>
+              <a:rPr sz="2000" b="0">
+                <a:solidFill>
+                  <a:srgbClr val="A09D96"/>
+                </a:solidFill>
+                <a:latin typeface="Heebo"/>
+              </a:rPr>
+              <a:t>הכל נבנה בקוד.</a:t>
             </a:r>
           </a:p>
         </p:txBody>
@@ -3239,8 +3264,8 @@
         </p:nvSpPr>
         <p:spPr>
           <a:xfrm>
-            <a:off x="2743200" y="1097280"/>
-            <a:ext cx="6675120" cy="457200"/>
+            <a:off x="0" y="914400"/>
+            <a:ext cx="12191695" cy="457200"/>
           </a:xfrm>
           <a:prstGeom prst="rect">
             <a:avLst/>
@@ -3248,16 +3273,18 @@
           <a:noFill/>
         </p:spPr>
         <p:txBody>
-          <a:bodyPr wrap="square"/>
-          <a:lstStyle/>
-          <a:p>
-            <a:pPr algn="ctr"/>
-            <a:r>
-              <a:rPr sz="1400" b="1">
+          <a:bodyPr wrap="square">
+            <a:spAutoFit/>
+          </a:bodyPr>
+          <a:lstStyle/>
+          <a:p>
+            <a:pPr algn="ctr" rtl="0"/>
+            <a:r>
+              <a:rPr sz="1600" b="1">
                 <a:solidFill>
                   <a:srgbClr val="22C55E"/>
                 </a:solidFill>
-                <a:latin typeface="Arial"/>
+                <a:latin typeface="Heebo"/>
               </a:rPr>
               <a:t>LIVE DEMO</a:t>
             </a:r>
@@ -3276,14 +3303,16 @@
             <a:ext cx="1371600" cy="1371600"/>
           </a:xfrm>
           <a:prstGeom prst="roundRect">
-            <a:avLst/>
+            <a:avLst>
+              <a:gd name="adj" fmla="val 5000"/>
+            </a:avLst>
           </a:prstGeom>
           <a:solidFill>
-            <a:srgbClr val="14171F"/>
+            <a:srgbClr val="252525"/>
           </a:solidFill>
           <a:ln w="12700">
             <a:solidFill>
-              <a:srgbClr val="1A803E"/>
+              <a:srgbClr val="22C55E"/>
             </a:solidFill>
           </a:ln>
         </p:spPr>
@@ -3317,8 +3346,8 @@
         </p:nvSpPr>
         <p:spPr>
           <a:xfrm>
-            <a:off x="3657600" y="2011680"/>
-            <a:ext cx="1371600" cy="914400"/>
+            <a:off x="3657600" y="2103120"/>
+            <a:ext cx="1371600" cy="731520"/>
           </a:xfrm>
           <a:prstGeom prst="rect">
             <a:avLst/>
@@ -3326,16 +3355,18 @@
           <a:noFill/>
         </p:spPr>
         <p:txBody>
-          <a:bodyPr wrap="square"/>
-          <a:lstStyle/>
-          <a:p>
-            <a:pPr algn="ctr"/>
-            <a:r>
-              <a:rPr sz="3600" b="1">
-                <a:solidFill>
-                  <a:srgbClr val="DCDAD5"/>
-                </a:solidFill>
-                <a:latin typeface="Arial"/>
+          <a:bodyPr wrap="square">
+            <a:spAutoFit/>
+          </a:bodyPr>
+          <a:lstStyle/>
+          <a:p>
+            <a:pPr algn="ctr" rtl="0"/>
+            <a:r>
+              <a:rPr sz="4000" b="1">
+                <a:solidFill>
+                  <a:srgbClr val="FFFFFF"/>
+                </a:solidFill>
+                <a:latin typeface="Heebo"/>
               </a:rPr>
               <a:t>R</a:t>
             </a:r>
@@ -3350,7 +3381,7 @@
         </p:nvSpPr>
         <p:spPr>
           <a:xfrm>
-            <a:off x="3200400" y="3200400"/>
+            <a:off x="3200400" y="3291840"/>
             <a:ext cx="2286000" cy="365760"/>
           </a:xfrm>
           <a:prstGeom prst="rect">
@@ -3359,16 +3390,18 @@
           <a:noFill/>
         </p:spPr>
         <p:txBody>
-          <a:bodyPr wrap="square"/>
-          <a:lstStyle/>
-          <a:p>
-            <a:pPr algn="ctr"/>
-            <a:r>
-              <a:rPr sz="1400" b="0">
-                <a:solidFill>
-                  <a:srgbClr val="A09D96"/>
-                </a:solidFill>
-                <a:latin typeface="Arial"/>
+          <a:bodyPr wrap="square">
+            <a:spAutoFit/>
+          </a:bodyPr>
+          <a:lstStyle/>
+          <a:p>
+            <a:pPr algn="ctr" rtl="0"/>
+            <a:r>
+              <a:rPr sz="1600" b="0">
+                <a:solidFill>
+                  <a:srgbClr val="C5C1B9"/>
+                </a:solidFill>
+                <a:latin typeface="Heebo"/>
               </a:rPr>
               <a:t>Remotion</a:t>
             </a:r>
@@ -3383,8 +3416,8 @@
         </p:nvSpPr>
         <p:spPr>
           <a:xfrm>
-            <a:off x="5486400" y="2103120"/>
-            <a:ext cx="1188720" cy="731520"/>
+            <a:off x="5394960" y="2103120"/>
+            <a:ext cx="1371600" cy="731520"/>
           </a:xfrm>
           <a:prstGeom prst="rect">
             <a:avLst/>
@@ -3392,16 +3425,18 @@
           <a:noFill/>
         </p:spPr>
         <p:txBody>
-          <a:bodyPr wrap="square"/>
-          <a:lstStyle/>
-          <a:p>
-            <a:pPr algn="ctr"/>
-            <a:r>
-              <a:rPr sz="2800" b="0">
+          <a:bodyPr wrap="square">
+            <a:spAutoFit/>
+          </a:bodyPr>
+          <a:lstStyle/>
+          <a:p>
+            <a:pPr algn="ctr" rtl="0"/>
+            <a:r>
+              <a:rPr sz="3600" b="0">
                 <a:solidFill>
                   <a:srgbClr val="A09D96"/>
                 </a:solidFill>
-                <a:latin typeface="Arial"/>
+                <a:latin typeface="Heebo"/>
               </a:rPr>
               <a:t>×</a:t>
             </a:r>
@@ -3420,14 +3455,16 @@
             <a:ext cx="1371600" cy="1371600"/>
           </a:xfrm>
           <a:prstGeom prst="roundRect">
-            <a:avLst/>
+            <a:avLst>
+              <a:gd name="adj" fmla="val 5000"/>
+            </a:avLst>
           </a:prstGeom>
           <a:solidFill>
-            <a:srgbClr val="14171F"/>
+            <a:srgbClr val="252525"/>
           </a:solidFill>
           <a:ln w="12700">
             <a:solidFill>
-              <a:srgbClr val="1A803E"/>
+              <a:srgbClr val="22C55E"/>
             </a:solidFill>
           </a:ln>
         </p:spPr>
@@ -3461,8 +3498,8 @@
         </p:nvSpPr>
         <p:spPr>
           <a:xfrm>
-            <a:off x="7132320" y="2011680"/>
-            <a:ext cx="1371600" cy="914400"/>
+            <a:off x="7132320" y="2103120"/>
+            <a:ext cx="1371600" cy="731520"/>
           </a:xfrm>
           <a:prstGeom prst="rect">
             <a:avLst/>
@@ -3470,16 +3507,18 @@
           <a:noFill/>
         </p:spPr>
         <p:txBody>
-          <a:bodyPr wrap="square"/>
-          <a:lstStyle/>
-          <a:p>
-            <a:pPr algn="ctr"/>
-            <a:r>
-              <a:rPr sz="3600" b="1">
-                <a:solidFill>
-                  <a:srgbClr val="DCDAD5"/>
-                </a:solidFill>
-                <a:latin typeface="Arial"/>
+          <a:bodyPr wrap="square">
+            <a:spAutoFit/>
+          </a:bodyPr>
+          <a:lstStyle/>
+          <a:p>
+            <a:pPr algn="ctr" rtl="0"/>
+            <a:r>
+              <a:rPr sz="4000" b="1">
+                <a:solidFill>
+                  <a:srgbClr val="FFFFFF"/>
+                </a:solidFill>
+                <a:latin typeface="Heebo"/>
               </a:rPr>
               <a:t>A</a:t>
             </a:r>
@@ -3494,7 +3533,7 @@
         </p:nvSpPr>
         <p:spPr>
           <a:xfrm>
-            <a:off x="6675120" y="3200400"/>
+            <a:off x="6675120" y="3291840"/>
             <a:ext cx="2286000" cy="365760"/>
           </a:xfrm>
           <a:prstGeom prst="rect">
@@ -3503,16 +3542,18 @@
           <a:noFill/>
         </p:spPr>
         <p:txBody>
-          <a:bodyPr wrap="square"/>
-          <a:lstStyle/>
-          <a:p>
-            <a:pPr algn="ctr"/>
-            <a:r>
-              <a:rPr sz="1400" b="0">
-                <a:solidFill>
-                  <a:srgbClr val="A09D96"/>
-                </a:solidFill>
-                <a:latin typeface="Arial"/>
+          <a:bodyPr wrap="square">
+            <a:spAutoFit/>
+          </a:bodyPr>
+          <a:lstStyle/>
+          <a:p>
+            <a:pPr algn="ctr" rtl="0"/>
+            <a:r>
+              <a:rPr sz="1600" b="0">
+                <a:solidFill>
+                  <a:srgbClr val="C5C1B9"/>
+                </a:solidFill>
+                <a:latin typeface="Heebo"/>
               </a:rPr>
               <a:t>Claude Code</a:t>
             </a:r>
@@ -3527,8 +3568,8 @@
         </p:nvSpPr>
         <p:spPr>
           <a:xfrm>
-            <a:off x="1371600" y="3931920"/>
-            <a:ext cx="9418320" cy="731520"/>
+            <a:off x="0" y="4114800"/>
+            <a:ext cx="12191695" cy="731520"/>
           </a:xfrm>
           <a:prstGeom prst="rect">
             <a:avLst/>
@@ -3536,16 +3577,18 @@
           <a:noFill/>
         </p:spPr>
         <p:txBody>
-          <a:bodyPr wrap="square"/>
-          <a:lstStyle/>
-          <a:p>
-            <a:pPr algn="ctr"/>
-            <a:r>
-              <a:rPr sz="3600" b="1">
+          <a:bodyPr wrap="square">
+            <a:spAutoFit/>
+          </a:bodyPr>
+          <a:lstStyle/>
+          <a:p>
+            <a:pPr algn="ctr" rtl="1"/>
+            <a:r>
+              <a:rPr sz="3200" b="1">
                 <a:solidFill>
                   <a:srgbClr val="DCDAD5"/>
                 </a:solidFill>
-                <a:latin typeface="Arial"/>
+                <a:latin typeface="Heebo"/>
               </a:rPr>
               <a:t>עכשיו בונים את זה ביחד</a:t>
             </a:r>
@@ -3560,8 +3603,8 @@
         </p:nvSpPr>
         <p:spPr>
           <a:xfrm>
-            <a:off x="1828800" y="4754880"/>
-            <a:ext cx="8503920" cy="548640"/>
+            <a:off x="1371600" y="4846320"/>
+            <a:ext cx="9418320" cy="457200"/>
           </a:xfrm>
           <a:prstGeom prst="rect">
             <a:avLst/>
@@ -3569,16 +3612,18 @@
           <a:noFill/>
         </p:spPr>
         <p:txBody>
-          <a:bodyPr wrap="square"/>
-          <a:lstStyle/>
-          <a:p>
-            <a:pPr algn="ctr"/>
+          <a:bodyPr wrap="square">
+            <a:spAutoFit/>
+          </a:bodyPr>
+          <a:lstStyle/>
+          <a:p>
+            <a:pPr algn="ctr" rtl="1"/>
             <a:r>
               <a:rPr sz="1800" b="0">
                 <a:solidFill>
                   <a:srgbClr val="A09D96"/>
                 </a:solidFill>
-                <a:latin typeface="Arial"/>
+                <a:latin typeface="Heebo"/>
               </a:rPr>
               <a:t>מפתחים את הסרטון הראשון שלכם — מפרומפט עד MP4</a:t>
             </a:r>
@@ -3587,34 +3632,44 @@
       </p:sp>
       <p:sp>
         <p:nvSpPr>
-          <p:cNvPr id="12" name="TextBox 11"/>
-          <p:cNvSpPr txBox="1"/>
-          <p:nvPr/>
-        </p:nvSpPr>
-        <p:spPr>
-          <a:xfrm>
-            <a:off x="5486400" y="5486400"/>
-            <a:ext cx="1188720" cy="548640"/>
-          </a:xfrm>
-          <a:prstGeom prst="rect">
-            <a:avLst/>
-          </a:prstGeom>
-          <a:noFill/>
-        </p:spPr>
-        <p:txBody>
-          <a:bodyPr wrap="square"/>
+          <p:cNvPr id="12" name="Down Arrow 11"/>
+          <p:cNvSpPr/>
+          <p:nvPr/>
+        </p:nvSpPr>
+        <p:spPr>
+          <a:xfrm>
+            <a:off x="5669280" y="5577840"/>
+            <a:ext cx="731520" cy="731520"/>
+          </a:xfrm>
+          <a:prstGeom prst="downArrow">
+            <a:avLst/>
+          </a:prstGeom>
+          <a:solidFill>
+            <a:srgbClr val="22C55E"/>
+          </a:solidFill>
+          <a:ln>
+            <a:noFill/>
+          </a:ln>
+        </p:spPr>
+        <p:style>
+          <a:lnRef idx="1">
+            <a:schemeClr val="accent1"/>
+          </a:lnRef>
+          <a:fillRef idx="3">
+            <a:schemeClr val="accent1"/>
+          </a:fillRef>
+          <a:effectRef idx="2">
+            <a:schemeClr val="accent1"/>
+          </a:effectRef>
+          <a:fontRef idx="minor">
+            <a:schemeClr val="lt1"/>
+          </a:fontRef>
+        </p:style>
+        <p:txBody>
+          <a:bodyPr rtlCol="0" anchor="ctr"/>
           <a:lstStyle/>
           <a:p>
             <a:pPr algn="ctr"/>
-            <a:r>
-              <a:rPr sz="3200" b="1">
-                <a:solidFill>
-                  <a:srgbClr val="22C55E"/>
-                </a:solidFill>
-                <a:latin typeface="Arial"/>
-              </a:rPr>
-              <a:t>↓</a:t>
-            </a:r>
           </a:p>
         </p:txBody>
       </p:sp>
@@ -3646,24 +3701,26 @@
       <p:grpSpPr/>
       <p:sp>
         <p:nvSpPr>
-          <p:cNvPr id="2" name="Rectangle 1"/>
+          <p:cNvPr id="2" name="Rounded Rectangle 1"/>
           <p:cNvSpPr/>
           <p:nvPr/>
         </p:nvSpPr>
         <p:spPr>
           <a:xfrm>
-            <a:off x="731520" y="548640"/>
-            <a:ext cx="5029200" cy="5760720"/>
-          </a:xfrm>
-          <a:prstGeom prst="rect">
-            <a:avLst/>
+            <a:off x="731520" y="914400"/>
+            <a:ext cx="4754880" cy="5029200"/>
+          </a:xfrm>
+          <a:prstGeom prst="roundRect">
+            <a:avLst>
+              <a:gd name="adj" fmla="val 5000"/>
+            </a:avLst>
           </a:prstGeom>
           <a:solidFill>
-            <a:srgbClr val="0A0E14"/>
+            <a:srgbClr val="1E1E1E"/>
           </a:solidFill>
           <a:ln w="12700">
             <a:solidFill>
-              <a:srgbClr val="303030"/>
+              <a:srgbClr val="333333"/>
             </a:solidFill>
           </a:ln>
         </p:spPr>
@@ -3697,7 +3754,7 @@
         </p:nvSpPr>
         <p:spPr>
           <a:xfrm>
-            <a:off x="914400" y="685800"/>
+            <a:off x="868680" y="1005840"/>
             <a:ext cx="137160" cy="137160"/>
           </a:xfrm>
           <a:prstGeom prst="ellipse">
@@ -3740,7 +3797,7 @@
         </p:nvSpPr>
         <p:spPr>
           <a:xfrm>
-            <a:off x="1143000" y="685800"/>
+            <a:off x="1124712" y="1005840"/>
             <a:ext cx="137160" cy="137160"/>
           </a:xfrm>
           <a:prstGeom prst="ellipse">
@@ -3783,7 +3840,7 @@
         </p:nvSpPr>
         <p:spPr>
           <a:xfrm>
-            <a:off x="1371600" y="685800"/>
+            <a:off x="1380744" y="1005840"/>
             <a:ext cx="137160" cy="137160"/>
           </a:xfrm>
           <a:prstGeom prst="ellipse">
@@ -3826,8 +3883,8 @@
         </p:nvSpPr>
         <p:spPr>
           <a:xfrm>
-            <a:off x="1005840" y="1097280"/>
-            <a:ext cx="4572000" cy="5029200"/>
+            <a:off x="1828800" y="960120"/>
+            <a:ext cx="3383280" cy="274320"/>
           </a:xfrm>
           <a:prstGeom prst="rect">
             <a:avLst/>
@@ -3835,240 +3892,87 @@
           <a:noFill/>
         </p:spPr>
         <p:txBody>
-          <a:bodyPr wrap="square"/>
-          <a:lstStyle/>
-          <a:p>
-            <a:pPr algn="l">
-              <a:spcAft>
-                <a:spcPts val="200"/>
-              </a:spcAft>
-            </a:pPr>
-            <a:r>
-              <a:rPr sz="1100">
-                <a:solidFill>
-                  <a:srgbClr val="C5C1B9"/>
+          <a:bodyPr wrap="square">
+            <a:spAutoFit/>
+          </a:bodyPr>
+          <a:lstStyle/>
+          <a:p>
+            <a:pPr algn="l" rtl="0"/>
+            <a:r>
+              <a:rPr sz="900" b="0">
+                <a:solidFill>
+                  <a:srgbClr val="666666"/>
                 </a:solidFill>
                 <a:latin typeface="Consolas"/>
               </a:rPr>
-              <a:t>import { Composition } from 'remotion'</a:t>
-            </a:r>
-          </a:p>
-          <a:p>
-            <a:pPr algn="l">
-              <a:spcAft>
-                <a:spcPts val="200"/>
-              </a:spcAft>
-            </a:pPr>
-            <a:r>
-              <a:rPr sz="1100">
+              <a:t>MyVideo.tsx</a:t>
+            </a:r>
+          </a:p>
+        </p:txBody>
+      </p:sp>
+      <p:sp>
+        <p:nvSpPr>
+          <p:cNvPr id="7" name="TextBox 6"/>
+          <p:cNvSpPr txBox="1"/>
+          <p:nvPr/>
+        </p:nvSpPr>
+        <p:spPr>
+          <a:xfrm>
+            <a:off x="914400" y="1234440"/>
+            <a:ext cx="4389120" cy="4617720"/>
+          </a:xfrm>
+          <a:prstGeom prst="rect">
+            <a:avLst/>
+          </a:prstGeom>
+          <a:noFill/>
+        </p:spPr>
+        <p:txBody>
+          <a:bodyPr wrap="square">
+            <a:spAutoFit/>
+          </a:bodyPr>
+          <a:lstStyle/>
+          <a:p>
+            <a:pPr algn="l" rtl="0"/>
+            <a:r>
+              <a:rPr sz="1200" b="0">
                 <a:solidFill>
                   <a:srgbClr val="C5C1B9"/>
                 </a:solidFill>
                 <a:latin typeface="Consolas"/>
               </a:rPr>
-              <a:t>import { useCurrentFrame } from 'remotion'</a:t>
-            </a:r>
-          </a:p>
-          <a:p>
-            <a:pPr algn="l">
-              <a:spcAft>
-                <a:spcPts val="200"/>
-              </a:spcAft>
-            </a:pPr>
-            <a:r>
-              <a:rPr sz="1100">
-                <a:solidFill>
-                  <a:srgbClr val="C5C1B9"/>
-                </a:solidFill>
-                <a:latin typeface="Consolas"/>
-              </a:rPr>
-              <a:t>import { interpolate } from 'remotion'</a:t>
-            </a:r>
-          </a:p>
-          <a:p>
-            <a:pPr algn="l">
-              <a:spcAft>
-                <a:spcPts val="200"/>
-              </a:spcAft>
-            </a:pPr>
-            <a:r>
-              <a:rPr sz="1100">
-                <a:solidFill>
-                  <a:srgbClr val="C5C1B9"/>
-                </a:solidFill>
-                <a:latin typeface="Consolas"/>
-              </a:rPr>
-              <a:t/>
-            </a:r>
-          </a:p>
-          <a:p>
-            <a:pPr algn="l">
-              <a:spcAft>
-                <a:spcPts val="200"/>
-              </a:spcAft>
-            </a:pPr>
-            <a:r>
-              <a:rPr sz="1100">
-                <a:solidFill>
-                  <a:srgbClr val="C5C1B9"/>
-                </a:solidFill>
-                <a:latin typeface="Consolas"/>
-              </a:rPr>
-              <a:t>export const MyVideo = () =&gt; {</a:t>
-            </a:r>
-          </a:p>
-          <a:p>
-            <a:pPr algn="l">
-              <a:spcAft>
-                <a:spcPts val="200"/>
-              </a:spcAft>
-            </a:pPr>
-            <a:r>
-              <a:rPr sz="1100">
-                <a:solidFill>
-                  <a:srgbClr val="C5C1B9"/>
-                </a:solidFill>
-                <a:latin typeface="Consolas"/>
-              </a:rPr>
-              <a:t>  const frame = useCurrentFrame()</a:t>
-            </a:r>
-          </a:p>
-          <a:p>
-            <a:pPr algn="l">
-              <a:spcAft>
-                <a:spcPts val="200"/>
-              </a:spcAft>
-            </a:pPr>
-            <a:r>
-              <a:rPr sz="1100">
-                <a:solidFill>
-                  <a:srgbClr val="C5C1B9"/>
-                </a:solidFill>
-                <a:latin typeface="Consolas"/>
-              </a:rPr>
-              <a:t>  const opacity = interpolate(</a:t>
-            </a:r>
-          </a:p>
-          <a:p>
-            <a:pPr algn="l">
-              <a:spcAft>
-                <a:spcPts val="200"/>
-              </a:spcAft>
-            </a:pPr>
-            <a:r>
-              <a:rPr sz="1100">
-                <a:solidFill>
-                  <a:srgbClr val="C5C1B9"/>
-                </a:solidFill>
-                <a:latin typeface="Consolas"/>
-              </a:rPr>
-              <a:t>    frame, [0, 30], [0, 1]</a:t>
-            </a:r>
-          </a:p>
-          <a:p>
-            <a:pPr algn="l">
-              <a:spcAft>
-                <a:spcPts val="200"/>
-              </a:spcAft>
-            </a:pPr>
-            <a:r>
-              <a:rPr sz="1100">
-                <a:solidFill>
-                  <a:srgbClr val="C5C1B9"/>
-                </a:solidFill>
-                <a:latin typeface="Consolas"/>
-              </a:rPr>
-              <a:t>  )</a:t>
-            </a:r>
-          </a:p>
-          <a:p>
-            <a:pPr algn="l">
-              <a:spcAft>
-                <a:spcPts val="200"/>
-              </a:spcAft>
-            </a:pPr>
-            <a:r>
-              <a:rPr sz="1100">
-                <a:solidFill>
-                  <a:srgbClr val="C5C1B9"/>
-                </a:solidFill>
-                <a:latin typeface="Consolas"/>
-              </a:rPr>
-              <a:t>  return &lt;AbsoluteFill style={{opacity}} /&gt;</a:t>
-            </a:r>
-          </a:p>
-          <a:p>
-            <a:pPr algn="l">
-              <a:spcAft>
-                <a:spcPts val="200"/>
-              </a:spcAft>
-            </a:pPr>
-            <a:r>
-              <a:rPr sz="1100">
-                <a:solidFill>
-                  <a:srgbClr val="C5C1B9"/>
-                </a:solidFill>
-                <a:latin typeface="Consolas"/>
-              </a:rPr>
-              <a:t>}</a:t>
-            </a:r>
-          </a:p>
-        </p:txBody>
-      </p:sp>
-      <p:sp>
-        <p:nvSpPr>
-          <p:cNvPr id="7" name="TextBox 6"/>
-          <p:cNvSpPr txBox="1"/>
-          <p:nvPr/>
-        </p:nvSpPr>
-        <p:spPr>
-          <a:xfrm>
-            <a:off x="5577840" y="2926080"/>
-            <a:ext cx="1097280" cy="548640"/>
-          </a:xfrm>
-          <a:prstGeom prst="rect">
-            <a:avLst/>
-          </a:prstGeom>
-          <a:noFill/>
-        </p:spPr>
-        <p:txBody>
-          <a:bodyPr wrap="square"/>
-          <a:lstStyle/>
-          <a:p>
-            <a:pPr algn="ctr"/>
-            <a:r>
-              <a:rPr sz="3200" b="1">
-                <a:solidFill>
-                  <a:srgbClr val="22C55E"/>
-                </a:solidFill>
-                <a:latin typeface="Arial"/>
-              </a:rPr>
-              <a:t>→</a:t>
-            </a:r>
-          </a:p>
-        </p:txBody>
-      </p:sp>
-      <p:sp>
-        <p:nvSpPr>
-          <p:cNvPr id="8" name="Rectangle 7"/>
+              <a:t>import { Composition } from 'remotion'
+import { useCurrentFrame } from 'remotion'
+import { interpolate } from 'remotion'
+export const MyVideo = () =&gt; {
+  const frame = useCurrentFrame()
+  const opacity = interpolate(
+    frame, [0, 30], [0, 1]
+  )
+  return &lt;AbsoluteFill style={{opacity}} /&gt;
+}</a:t>
+            </a:r>
+          </a:p>
+        </p:txBody>
+      </p:sp>
+      <p:sp>
+        <p:nvSpPr>
+          <p:cNvPr id="8" name="Right Arrow 7"/>
           <p:cNvSpPr/>
           <p:nvPr/>
         </p:nvSpPr>
         <p:spPr>
           <a:xfrm>
-            <a:off x="6400800" y="548640"/>
-            <a:ext cx="5029200" cy="5760720"/>
-          </a:xfrm>
-          <a:prstGeom prst="rect">
+            <a:off x="5760720" y="2926080"/>
+            <a:ext cx="731520" cy="548640"/>
+          </a:xfrm>
+          <a:prstGeom prst="rightArrow">
             <a:avLst/>
           </a:prstGeom>
           <a:solidFill>
-            <a:srgbClr val="0D1117"/>
+            <a:srgbClr val="22C55E"/>
           </a:solidFill>
-          <a:ln w="12700">
-            <a:solidFill>
-              <a:srgbClr val="303030"/>
-            </a:solidFill>
+          <a:ln>
+            <a:noFill/>
           </a:ln>
         </p:spPr>
         <p:style>
@@ -4095,50 +3999,195 @@
       </p:sp>
       <p:sp>
         <p:nvSpPr>
-          <p:cNvPr id="9" name="TextBox 8"/>
-          <p:cNvSpPr txBox="1"/>
-          <p:nvPr/>
-        </p:nvSpPr>
-        <p:spPr>
-          <a:xfrm>
-            <a:off x="6583680" y="640080"/>
-            <a:ext cx="1828800" cy="365760"/>
-          </a:xfrm>
-          <a:prstGeom prst="rect">
-            <a:avLst/>
-          </a:prstGeom>
-          <a:noFill/>
-        </p:spPr>
-        <p:txBody>
-          <a:bodyPr wrap="square"/>
-          <a:lstStyle/>
-          <a:p>
-            <a:pPr algn="l"/>
-            <a:r>
-              <a:rPr sz="1000" b="0">
-                <a:solidFill>
-                  <a:srgbClr val="22C55E"/>
-                </a:solidFill>
-                <a:latin typeface="Consolas"/>
-              </a:rPr>
-              <a:t>Preview</a:t>
-            </a:r>
-          </a:p>
-        </p:txBody>
-      </p:sp>
-      <p:sp>
-        <p:nvSpPr>
-          <p:cNvPr id="10" name="Rounded Rectangle 9"/>
+          <p:cNvPr id="9" name="Rounded Rectangle 8"/>
           <p:cNvSpPr/>
           <p:nvPr/>
         </p:nvSpPr>
         <p:spPr>
           <a:xfrm>
-            <a:off x="6675120" y="1188720"/>
-            <a:ext cx="1371600" cy="1371600"/>
+            <a:off x="6766560" y="914400"/>
+            <a:ext cx="4754880" cy="5029200"/>
           </a:xfrm>
           <a:prstGeom prst="roundRect">
-            <a:avLst/>
+            <a:avLst>
+              <a:gd name="adj" fmla="val 5000"/>
+            </a:avLst>
+          </a:prstGeom>
+          <a:solidFill>
+            <a:srgbClr val="1E1E1E"/>
+          </a:solidFill>
+          <a:ln w="12700">
+            <a:solidFill>
+              <a:srgbClr val="333333"/>
+            </a:solidFill>
+          </a:ln>
+        </p:spPr>
+        <p:style>
+          <a:lnRef idx="1">
+            <a:schemeClr val="accent1"/>
+          </a:lnRef>
+          <a:fillRef idx="3">
+            <a:schemeClr val="accent1"/>
+          </a:fillRef>
+          <a:effectRef idx="2">
+            <a:schemeClr val="accent1"/>
+          </a:effectRef>
+          <a:fontRef idx="minor">
+            <a:schemeClr val="lt1"/>
+          </a:fontRef>
+        </p:style>
+        <p:txBody>
+          <a:bodyPr rtlCol="0" anchor="ctr"/>
+          <a:lstStyle/>
+          <a:p>
+            <a:pPr algn="ctr"/>
+          </a:p>
+        </p:txBody>
+      </p:sp>
+      <p:sp>
+        <p:nvSpPr>
+          <p:cNvPr id="10" name="Oval 9"/>
+          <p:cNvSpPr/>
+          <p:nvPr/>
+        </p:nvSpPr>
+        <p:spPr>
+          <a:xfrm>
+            <a:off x="6903720" y="1005840"/>
+            <a:ext cx="137160" cy="137160"/>
+          </a:xfrm>
+          <a:prstGeom prst="ellipse">
+            <a:avLst/>
+          </a:prstGeom>
+          <a:solidFill>
+            <a:srgbClr val="FF5F57"/>
+          </a:solidFill>
+          <a:ln>
+            <a:noFill/>
+          </a:ln>
+        </p:spPr>
+        <p:style>
+          <a:lnRef idx="1">
+            <a:schemeClr val="accent1"/>
+          </a:lnRef>
+          <a:fillRef idx="3">
+            <a:schemeClr val="accent1"/>
+          </a:fillRef>
+          <a:effectRef idx="2">
+            <a:schemeClr val="accent1"/>
+          </a:effectRef>
+          <a:fontRef idx="minor">
+            <a:schemeClr val="lt1"/>
+          </a:fontRef>
+        </p:style>
+        <p:txBody>
+          <a:bodyPr rtlCol="0" anchor="ctr"/>
+          <a:lstStyle/>
+          <a:p>
+            <a:pPr algn="ctr"/>
+          </a:p>
+        </p:txBody>
+      </p:sp>
+      <p:sp>
+        <p:nvSpPr>
+          <p:cNvPr id="11" name="Oval 10"/>
+          <p:cNvSpPr/>
+          <p:nvPr/>
+        </p:nvSpPr>
+        <p:spPr>
+          <a:xfrm>
+            <a:off x="7159752" y="1005840"/>
+            <a:ext cx="137160" cy="137160"/>
+          </a:xfrm>
+          <a:prstGeom prst="ellipse">
+            <a:avLst/>
+          </a:prstGeom>
+          <a:solidFill>
+            <a:srgbClr val="FEBC2E"/>
+          </a:solidFill>
+          <a:ln>
+            <a:noFill/>
+          </a:ln>
+        </p:spPr>
+        <p:style>
+          <a:lnRef idx="1">
+            <a:schemeClr val="accent1"/>
+          </a:lnRef>
+          <a:fillRef idx="3">
+            <a:schemeClr val="accent1"/>
+          </a:fillRef>
+          <a:effectRef idx="2">
+            <a:schemeClr val="accent1"/>
+          </a:effectRef>
+          <a:fontRef idx="minor">
+            <a:schemeClr val="lt1"/>
+          </a:fontRef>
+        </p:style>
+        <p:txBody>
+          <a:bodyPr rtlCol="0" anchor="ctr"/>
+          <a:lstStyle/>
+          <a:p>
+            <a:pPr algn="ctr"/>
+          </a:p>
+        </p:txBody>
+      </p:sp>
+      <p:sp>
+        <p:nvSpPr>
+          <p:cNvPr id="12" name="Oval 11"/>
+          <p:cNvSpPr/>
+          <p:nvPr/>
+        </p:nvSpPr>
+        <p:spPr>
+          <a:xfrm>
+            <a:off x="7415784" y="1005840"/>
+            <a:ext cx="137160" cy="137160"/>
+          </a:xfrm>
+          <a:prstGeom prst="ellipse">
+            <a:avLst/>
+          </a:prstGeom>
+          <a:solidFill>
+            <a:srgbClr val="28C840"/>
+          </a:solidFill>
+          <a:ln>
+            <a:noFill/>
+          </a:ln>
+        </p:spPr>
+        <p:style>
+          <a:lnRef idx="1">
+            <a:schemeClr val="accent1"/>
+          </a:lnRef>
+          <a:fillRef idx="3">
+            <a:schemeClr val="accent1"/>
+          </a:fillRef>
+          <a:effectRef idx="2">
+            <a:schemeClr val="accent1"/>
+          </a:effectRef>
+          <a:fontRef idx="minor">
+            <a:schemeClr val="lt1"/>
+          </a:fontRef>
+        </p:style>
+        <p:txBody>
+          <a:bodyPr rtlCol="0" anchor="ctr"/>
+          <a:lstStyle/>
+          <a:p>
+            <a:pPr algn="ctr"/>
+          </a:p>
+        </p:txBody>
+      </p:sp>
+      <p:sp>
+        <p:nvSpPr>
+          <p:cNvPr id="13" name="Rounded Rectangle 12"/>
+          <p:cNvSpPr/>
+          <p:nvPr/>
+        </p:nvSpPr>
+        <p:spPr>
+          <a:xfrm>
+            <a:off x="7132320" y="1463040"/>
+            <a:ext cx="1280160" cy="1188720"/>
+          </a:xfrm>
+          <a:prstGeom prst="roundRect">
+            <a:avLst>
+              <a:gd name="adj" fmla="val 8000"/>
+            </a:avLst>
           </a:prstGeom>
           <a:solidFill>
             <a:srgbClr val="6366F1"/>
@@ -4171,17 +4220,19 @@
       </p:sp>
       <p:sp>
         <p:nvSpPr>
-          <p:cNvPr id="11" name="Rounded Rectangle 10"/>
+          <p:cNvPr id="14" name="Rounded Rectangle 13"/>
           <p:cNvSpPr/>
           <p:nvPr/>
         </p:nvSpPr>
         <p:spPr>
           <a:xfrm>
-            <a:off x="8229600" y="1188720"/>
-            <a:ext cx="1371600" cy="1371600"/>
+            <a:off x="8503920" y="1463040"/>
+            <a:ext cx="1280160" cy="1188720"/>
           </a:xfrm>
           <a:prstGeom prst="roundRect">
-            <a:avLst/>
+            <a:avLst>
+              <a:gd name="adj" fmla="val 8000"/>
+            </a:avLst>
           </a:prstGeom>
           <a:solidFill>
             <a:srgbClr val="22C55E"/>
@@ -4214,17 +4265,19 @@
       </p:sp>
       <p:sp>
         <p:nvSpPr>
-          <p:cNvPr id="12" name="Rounded Rectangle 11"/>
+          <p:cNvPr id="15" name="Rounded Rectangle 14"/>
           <p:cNvSpPr/>
           <p:nvPr/>
         </p:nvSpPr>
         <p:spPr>
           <a:xfrm>
-            <a:off x="9784080" y="1188720"/>
-            <a:ext cx="1371600" cy="1371600"/>
+            <a:off x="9875520" y="1463040"/>
+            <a:ext cx="1280160" cy="1188720"/>
           </a:xfrm>
           <a:prstGeom prst="roundRect">
-            <a:avLst/>
+            <a:avLst>
+              <a:gd name="adj" fmla="val 8000"/>
+            </a:avLst>
           </a:prstGeom>
           <a:solidFill>
             <a:srgbClr val="F59E0B"/>
@@ -4257,17 +4310,19 @@
       </p:sp>
       <p:sp>
         <p:nvSpPr>
-          <p:cNvPr id="13" name="Rounded Rectangle 12"/>
+          <p:cNvPr id="16" name="Rounded Rectangle 15"/>
           <p:cNvSpPr/>
           <p:nvPr/>
         </p:nvSpPr>
         <p:spPr>
           <a:xfrm>
-            <a:off x="6675120" y="2743200"/>
-            <a:ext cx="2743200" cy="1371600"/>
+            <a:off x="7132320" y="2834640"/>
+            <a:ext cx="1280160" cy="1188720"/>
           </a:xfrm>
           <a:prstGeom prst="roundRect">
-            <a:avLst/>
+            <a:avLst>
+              <a:gd name="adj" fmla="val 8000"/>
+            </a:avLst>
           </a:prstGeom>
           <a:solidFill>
             <a:srgbClr val="0EA5E9"/>
@@ -4300,17 +4355,19 @@
       </p:sp>
       <p:sp>
         <p:nvSpPr>
-          <p:cNvPr id="14" name="Rounded Rectangle 13"/>
+          <p:cNvPr id="17" name="Rounded Rectangle 16"/>
           <p:cNvSpPr/>
           <p:nvPr/>
         </p:nvSpPr>
         <p:spPr>
           <a:xfrm>
-            <a:off x="9601200" y="2743200"/>
-            <a:ext cx="1371600" cy="1371600"/>
+            <a:off x="8503920" y="2834640"/>
+            <a:ext cx="1280160" cy="1188720"/>
           </a:xfrm>
           <a:prstGeom prst="roundRect">
-            <a:avLst/>
+            <a:avLst>
+              <a:gd name="adj" fmla="val 8000"/>
+            </a:avLst>
           </a:prstGeom>
           <a:solidFill>
             <a:srgbClr val="EC4899"/>
@@ -4343,17 +4400,19 @@
       </p:sp>
       <p:sp>
         <p:nvSpPr>
-          <p:cNvPr id="15" name="Rounded Rectangle 14"/>
+          <p:cNvPr id="18" name="Rounded Rectangle 17"/>
           <p:cNvSpPr/>
           <p:nvPr/>
         </p:nvSpPr>
         <p:spPr>
           <a:xfrm>
-            <a:off x="6675120" y="4297680"/>
-            <a:ext cx="1371600" cy="1371600"/>
+            <a:off x="9875520" y="2834640"/>
+            <a:ext cx="1280160" cy="1188720"/>
           </a:xfrm>
           <a:prstGeom prst="roundRect">
-            <a:avLst/>
+            <a:avLst>
+              <a:gd name="adj" fmla="val 8000"/>
+            </a:avLst>
           </a:prstGeom>
           <a:solidFill>
             <a:srgbClr val="F97316"/>
@@ -4386,17 +4445,64 @@
       </p:sp>
       <p:sp>
         <p:nvSpPr>
-          <p:cNvPr id="16" name="Rounded Rectangle 15"/>
+          <p:cNvPr id="19" name="Rounded Rectangle 18"/>
           <p:cNvSpPr/>
           <p:nvPr/>
         </p:nvSpPr>
         <p:spPr>
           <a:xfrm>
-            <a:off x="8229600" y="4297680"/>
-            <a:ext cx="2743200" cy="1371600"/>
+            <a:off x="7040880" y="5303520"/>
+            <a:ext cx="4206240" cy="137160"/>
           </a:xfrm>
           <a:prstGeom prst="roundRect">
-            <a:avLst/>
+            <a:avLst>
+              <a:gd name="adj" fmla="val 5000"/>
+            </a:avLst>
+          </a:prstGeom>
+          <a:solidFill>
+            <a:srgbClr val="333333"/>
+          </a:solidFill>
+          <a:ln>
+            <a:noFill/>
+          </a:ln>
+        </p:spPr>
+        <p:style>
+          <a:lnRef idx="1">
+            <a:schemeClr val="accent1"/>
+          </a:lnRef>
+          <a:fillRef idx="3">
+            <a:schemeClr val="accent1"/>
+          </a:fillRef>
+          <a:effectRef idx="2">
+            <a:schemeClr val="accent1"/>
+          </a:effectRef>
+          <a:fontRef idx="minor">
+            <a:schemeClr val="lt1"/>
+          </a:fontRef>
+        </p:style>
+        <p:txBody>
+          <a:bodyPr rtlCol="0" anchor="ctr"/>
+          <a:lstStyle/>
+          <a:p>
+            <a:pPr algn="ctr"/>
+          </a:p>
+        </p:txBody>
+      </p:sp>
+      <p:sp>
+        <p:nvSpPr>
+          <p:cNvPr id="20" name="Rounded Rectangle 19"/>
+          <p:cNvSpPr/>
+          <p:nvPr/>
+        </p:nvSpPr>
+        <p:spPr>
+          <a:xfrm>
+            <a:off x="8412480" y="5257800"/>
+            <a:ext cx="73152" cy="228600"/>
+          </a:xfrm>
+          <a:prstGeom prst="roundRect">
+            <a:avLst>
+              <a:gd name="adj" fmla="val 5000"/>
+            </a:avLst>
           </a:prstGeom>
           <a:solidFill>
             <a:srgbClr val="22C55E"/>
@@ -4461,8 +4567,8 @@
         </p:nvSpPr>
         <p:spPr>
           <a:xfrm>
-            <a:off x="457200" y="914400"/>
-            <a:ext cx="11247120" cy="457200"/>
+            <a:off x="6858000" y="1371600"/>
+            <a:ext cx="4846320" cy="365760"/>
           </a:xfrm>
           <a:prstGeom prst="rect">
             <a:avLst/>
@@ -4470,16 +4576,18 @@
           <a:noFill/>
         </p:spPr>
         <p:txBody>
-          <a:bodyPr wrap="square"/>
-          <a:lstStyle/>
-          <a:p>
-            <a:pPr algn="ctr"/>
-            <a:r>
-              <a:rPr sz="1200" b="1">
+          <a:bodyPr wrap="square">
+            <a:spAutoFit/>
+          </a:bodyPr>
+          <a:lstStyle/>
+          <a:p>
+            <a:pPr algn="r" rtl="0"/>
+            <a:r>
+              <a:rPr sz="1400" b="1">
                 <a:solidFill>
                   <a:srgbClr val="22C55E"/>
                 </a:solidFill>
-                <a:latin typeface="Arial"/>
+                <a:latin typeface="Heebo"/>
               </a:rPr>
               <a:t>THE PROBLEM</a:t>
             </a:r>
@@ -4494,8 +4602,8 @@
         </p:nvSpPr>
         <p:spPr>
           <a:xfrm>
-            <a:off x="5943600" y="1371600"/>
-            <a:ext cx="5486400" cy="914400"/>
+            <a:off x="6858000" y="1920240"/>
+            <a:ext cx="4846320" cy="731520"/>
           </a:xfrm>
           <a:prstGeom prst="rect">
             <a:avLst/>
@@ -4503,16 +4611,18 @@
           <a:noFill/>
         </p:spPr>
         <p:txBody>
-          <a:bodyPr wrap="square"/>
-          <a:lstStyle/>
-          <a:p>
-            <a:pPr algn="r"/>
-            <a:r>
-              <a:rPr sz="3600" b="1">
+          <a:bodyPr wrap="square">
+            <a:spAutoFit/>
+          </a:bodyPr>
+          <a:lstStyle/>
+          <a:p>
+            <a:pPr algn="r" rtl="1"/>
+            <a:r>
+              <a:rPr sz="3400" b="1">
                 <a:solidFill>
                   <a:srgbClr val="DCDAD5"/>
                 </a:solidFill>
-                <a:latin typeface="Arial"/>
+                <a:latin typeface="Heebo"/>
               </a:rPr>
               <a:t>לערוך וידאו זה... קשה</a:t>
             </a:r>
@@ -4527,8 +4637,8 @@
         </p:nvSpPr>
         <p:spPr>
           <a:xfrm>
-            <a:off x="5943600" y="2286000"/>
-            <a:ext cx="5486400" cy="548640"/>
+            <a:off x="6858000" y="2834640"/>
+            <a:ext cx="4846320" cy="457200"/>
           </a:xfrm>
           <a:prstGeom prst="rect">
             <a:avLst/>
@@ -4536,16 +4646,18 @@
           <a:noFill/>
         </p:spPr>
         <p:txBody>
-          <a:bodyPr wrap="square"/>
-          <a:lstStyle/>
-          <a:p>
-            <a:pPr algn="r"/>
+          <a:bodyPr wrap="square">
+            <a:spAutoFit/>
+          </a:bodyPr>
+          <a:lstStyle/>
+          <a:p>
+            <a:pPr algn="r" rtl="1"/>
             <a:r>
               <a:rPr sz="1800" b="0">
                 <a:solidFill>
                   <a:srgbClr val="22C55E"/>
                 </a:solidFill>
-                <a:latin typeface="Arial"/>
+                <a:latin typeface="Heebo"/>
               </a:rPr>
               <a:t>טיימליין. ליירים. אפקטים. אינסוף קליקים.</a:t>
             </a:r>
@@ -4560,8 +4672,8 @@
         </p:nvSpPr>
         <p:spPr>
           <a:xfrm>
-            <a:off x="5943600" y="2926080"/>
-            <a:ext cx="5486400" cy="731520"/>
+            <a:off x="6858000" y="3474720"/>
+            <a:ext cx="4846320" cy="731520"/>
           </a:xfrm>
           <a:prstGeom prst="rect">
             <a:avLst/>
@@ -4569,16 +4681,18 @@
           <a:noFill/>
         </p:spPr>
         <p:txBody>
-          <a:bodyPr wrap="square"/>
-          <a:lstStyle/>
-          <a:p>
-            <a:pPr algn="r"/>
+          <a:bodyPr wrap="square">
+            <a:spAutoFit/>
+          </a:bodyPr>
+          <a:lstStyle/>
+          <a:p>
+            <a:pPr algn="r" rtl="1"/>
             <a:r>
               <a:rPr sz="1600" b="0">
                 <a:solidFill>
                   <a:srgbClr val="A09D96"/>
                 </a:solidFill>
-                <a:latin typeface="Arial"/>
+                <a:latin typeface="Heebo"/>
               </a:rPr>
               <a:t>עריכת וידאו קלאסית היא ידנית. חוזרת על עצמה. ולא סקיילבילית.</a:t>
             </a:r>
@@ -4593,8 +4707,8 @@
         </p:nvSpPr>
         <p:spPr>
           <a:xfrm>
-            <a:off x="640080" y="1097280"/>
-            <a:ext cx="731520" cy="548640"/>
+            <a:off x="457200" y="1097280"/>
+            <a:ext cx="640080" cy="274320"/>
           </a:xfrm>
           <a:prstGeom prst="rect">
             <a:avLst/>
@@ -4602,14 +4716,261 @@
           <a:noFill/>
         </p:spPr>
         <p:txBody>
-          <a:bodyPr wrap="square"/>
-          <a:lstStyle/>
-          <a:p>
-            <a:pPr algn="l"/>
+          <a:bodyPr wrap="square">
+            <a:spAutoFit/>
+          </a:bodyPr>
+          <a:lstStyle/>
+          <a:p>
+            <a:pPr algn="ctr" rtl="0"/>
             <a:r>
               <a:rPr sz="800" b="0">
                 <a:solidFill>
-                  <a:srgbClr val="A09D96"/>
+                  <a:srgbClr val="555555"/>
+                </a:solidFill>
+                <a:latin typeface="Consolas"/>
+              </a:rPr>
+              <a:t>00:00</a:t>
+            </a:r>
+          </a:p>
+        </p:txBody>
+      </p:sp>
+      <p:sp>
+        <p:nvSpPr>
+          <p:cNvPr id="7" name="TextBox 6"/>
+          <p:cNvSpPr txBox="1"/>
+          <p:nvPr/>
+        </p:nvSpPr>
+        <p:spPr>
+          <a:xfrm>
+            <a:off x="1280160" y="1097280"/>
+            <a:ext cx="640080" cy="274320"/>
+          </a:xfrm>
+          <a:prstGeom prst="rect">
+            <a:avLst/>
+          </a:prstGeom>
+          <a:noFill/>
+        </p:spPr>
+        <p:txBody>
+          <a:bodyPr wrap="square">
+            <a:spAutoFit/>
+          </a:bodyPr>
+          <a:lstStyle/>
+          <a:p>
+            <a:pPr algn="ctr" rtl="0"/>
+            <a:r>
+              <a:rPr sz="800" b="0">
+                <a:solidFill>
+                  <a:srgbClr val="555555"/>
+                </a:solidFill>
+                <a:latin typeface="Consolas"/>
+              </a:rPr>
+              <a:t>00:05</a:t>
+            </a:r>
+          </a:p>
+        </p:txBody>
+      </p:sp>
+      <p:sp>
+        <p:nvSpPr>
+          <p:cNvPr id="8" name="TextBox 7"/>
+          <p:cNvSpPr txBox="1"/>
+          <p:nvPr/>
+        </p:nvSpPr>
+        <p:spPr>
+          <a:xfrm>
+            <a:off x="2103120" y="1097280"/>
+            <a:ext cx="640080" cy="274320"/>
+          </a:xfrm>
+          <a:prstGeom prst="rect">
+            <a:avLst/>
+          </a:prstGeom>
+          <a:noFill/>
+        </p:spPr>
+        <p:txBody>
+          <a:bodyPr wrap="square">
+            <a:spAutoFit/>
+          </a:bodyPr>
+          <a:lstStyle/>
+          <a:p>
+            <a:pPr algn="ctr" rtl="0"/>
+            <a:r>
+              <a:rPr sz="800" b="0">
+                <a:solidFill>
+                  <a:srgbClr val="555555"/>
+                </a:solidFill>
+                <a:latin typeface="Consolas"/>
+              </a:rPr>
+              <a:t>00:10</a:t>
+            </a:r>
+          </a:p>
+        </p:txBody>
+      </p:sp>
+      <p:sp>
+        <p:nvSpPr>
+          <p:cNvPr id="9" name="TextBox 8"/>
+          <p:cNvSpPr txBox="1"/>
+          <p:nvPr/>
+        </p:nvSpPr>
+        <p:spPr>
+          <a:xfrm>
+            <a:off x="2926080" y="1097280"/>
+            <a:ext cx="640080" cy="274320"/>
+          </a:xfrm>
+          <a:prstGeom prst="rect">
+            <a:avLst/>
+          </a:prstGeom>
+          <a:noFill/>
+        </p:spPr>
+        <p:txBody>
+          <a:bodyPr wrap="square">
+            <a:spAutoFit/>
+          </a:bodyPr>
+          <a:lstStyle/>
+          <a:p>
+            <a:pPr algn="ctr" rtl="0"/>
+            <a:r>
+              <a:rPr sz="800" b="0">
+                <a:solidFill>
+                  <a:srgbClr val="555555"/>
+                </a:solidFill>
+                <a:latin typeface="Consolas"/>
+              </a:rPr>
+              <a:t>00:15</a:t>
+            </a:r>
+          </a:p>
+        </p:txBody>
+      </p:sp>
+      <p:sp>
+        <p:nvSpPr>
+          <p:cNvPr id="10" name="TextBox 9"/>
+          <p:cNvSpPr txBox="1"/>
+          <p:nvPr/>
+        </p:nvSpPr>
+        <p:spPr>
+          <a:xfrm>
+            <a:off x="3749040" y="1097280"/>
+            <a:ext cx="640080" cy="274320"/>
+          </a:xfrm>
+          <a:prstGeom prst="rect">
+            <a:avLst/>
+          </a:prstGeom>
+          <a:noFill/>
+        </p:spPr>
+        <p:txBody>
+          <a:bodyPr wrap="square">
+            <a:spAutoFit/>
+          </a:bodyPr>
+          <a:lstStyle/>
+          <a:p>
+            <a:pPr algn="ctr" rtl="0"/>
+            <a:r>
+              <a:rPr sz="800" b="0">
+                <a:solidFill>
+                  <a:srgbClr val="555555"/>
+                </a:solidFill>
+                <a:latin typeface="Consolas"/>
+              </a:rPr>
+              <a:t>00:20</a:t>
+            </a:r>
+          </a:p>
+        </p:txBody>
+      </p:sp>
+      <p:sp>
+        <p:nvSpPr>
+          <p:cNvPr id="11" name="TextBox 10"/>
+          <p:cNvSpPr txBox="1"/>
+          <p:nvPr/>
+        </p:nvSpPr>
+        <p:spPr>
+          <a:xfrm>
+            <a:off x="4572000" y="1097280"/>
+            <a:ext cx="640080" cy="274320"/>
+          </a:xfrm>
+          <a:prstGeom prst="rect">
+            <a:avLst/>
+          </a:prstGeom>
+          <a:noFill/>
+        </p:spPr>
+        <p:txBody>
+          <a:bodyPr wrap="square">
+            <a:spAutoFit/>
+          </a:bodyPr>
+          <a:lstStyle/>
+          <a:p>
+            <a:pPr algn="ctr" rtl="0"/>
+            <a:r>
+              <a:rPr sz="800" b="0">
+                <a:solidFill>
+                  <a:srgbClr val="555555"/>
+                </a:solidFill>
+                <a:latin typeface="Consolas"/>
+              </a:rPr>
+              <a:t>00:25</a:t>
+            </a:r>
+          </a:p>
+        </p:txBody>
+      </p:sp>
+      <p:sp>
+        <p:nvSpPr>
+          <p:cNvPr id="12" name="TextBox 11"/>
+          <p:cNvSpPr txBox="1"/>
+          <p:nvPr/>
+        </p:nvSpPr>
+        <p:spPr>
+          <a:xfrm>
+            <a:off x="5394960" y="1097280"/>
+            <a:ext cx="640080" cy="274320"/>
+          </a:xfrm>
+          <a:prstGeom prst="rect">
+            <a:avLst/>
+          </a:prstGeom>
+          <a:noFill/>
+        </p:spPr>
+        <p:txBody>
+          <a:bodyPr wrap="square">
+            <a:spAutoFit/>
+          </a:bodyPr>
+          <a:lstStyle/>
+          <a:p>
+            <a:pPr algn="ctr" rtl="0"/>
+            <a:r>
+              <a:rPr sz="800" b="0">
+                <a:solidFill>
+                  <a:srgbClr val="555555"/>
+                </a:solidFill>
+                <a:latin typeface="Consolas"/>
+              </a:rPr>
+              <a:t>00:30</a:t>
+            </a:r>
+          </a:p>
+        </p:txBody>
+      </p:sp>
+      <p:sp>
+        <p:nvSpPr>
+          <p:cNvPr id="13" name="TextBox 12"/>
+          <p:cNvSpPr txBox="1"/>
+          <p:nvPr/>
+        </p:nvSpPr>
+        <p:spPr>
+          <a:xfrm>
+            <a:off x="457200" y="1508760"/>
+            <a:ext cx="777240" cy="320040"/>
+          </a:xfrm>
+          <a:prstGeom prst="rect">
+            <a:avLst/>
+          </a:prstGeom>
+          <a:noFill/>
+        </p:spPr>
+        <p:txBody>
+          <a:bodyPr wrap="square">
+            <a:spAutoFit/>
+          </a:bodyPr>
+          <a:lstStyle/>
+          <a:p>
+            <a:pPr algn="l" rtl="0"/>
+            <a:r>
+              <a:rPr sz="800" b="1">
+                <a:solidFill>
+                  <a:srgbClr val="777777"/>
                 </a:solidFill>
                 <a:latin typeface="Consolas"/>
               </a:rPr>
@@ -4620,20 +4981,24 @@
       </p:sp>
       <p:sp>
         <p:nvSpPr>
-          <p:cNvPr id="7" name="Rectangle 6"/>
+          <p:cNvPr id="14" name="Rounded Rectangle 13"/>
           <p:cNvSpPr/>
           <p:nvPr/>
         </p:nvSpPr>
         <p:spPr>
           <a:xfrm>
-            <a:off x="1508760" y="1143000"/>
-            <a:ext cx="925372" cy="457200"/>
-          </a:xfrm>
-          <a:prstGeom prst="rect">
-            <a:avLst/>
+            <a:off x="1280160" y="1463040"/>
+            <a:ext cx="1106424" cy="411480"/>
+          </a:xfrm>
+          <a:prstGeom prst="roundRect">
+            <a:avLst>
+              <a:gd name="adj" fmla="val 15000"/>
+            </a:avLst>
           </a:prstGeom>
           <a:solidFill>
-            <a:srgbClr val="6366F1"/>
+            <a:srgbClr val="3B82F6">
+              <a:alpha val="60000"/>
+            </a:srgbClr>
           </a:solidFill>
           <a:ln>
             <a:noFill/>
@@ -4663,20 +5028,24 @@
       </p:sp>
       <p:sp>
         <p:nvSpPr>
-          <p:cNvPr id="8" name="Rectangle 7"/>
+          <p:cNvPr id="15" name="Rounded Rectangle 14"/>
           <p:cNvSpPr/>
           <p:nvPr/>
         </p:nvSpPr>
         <p:spPr>
           <a:xfrm>
-            <a:off x="2560319" y="1143000"/>
-            <a:ext cx="1135684" cy="457200"/>
-          </a:xfrm>
-          <a:prstGeom prst="rect">
-            <a:avLst/>
+            <a:off x="2537460" y="1463040"/>
+            <a:ext cx="1357884" cy="411480"/>
+          </a:xfrm>
+          <a:prstGeom prst="roundRect">
+            <a:avLst>
+              <a:gd name="adj" fmla="val 15000"/>
+            </a:avLst>
           </a:prstGeom>
           <a:solidFill>
-            <a:srgbClr val="6366F1"/>
+            <a:srgbClr val="3B82F6">
+              <a:alpha val="60000"/>
+            </a:srgbClr>
           </a:solidFill>
           <a:ln>
             <a:noFill/>
@@ -4706,20 +5075,24 @@
       </p:sp>
       <p:sp>
         <p:nvSpPr>
-          <p:cNvPr id="9" name="Rectangle 8"/>
+          <p:cNvPr id="16" name="Rounded Rectangle 15"/>
           <p:cNvSpPr/>
           <p:nvPr/>
         </p:nvSpPr>
         <p:spPr>
           <a:xfrm>
-            <a:off x="3780127" y="1143000"/>
-            <a:ext cx="757123" cy="457200"/>
-          </a:xfrm>
-          <a:prstGeom prst="rect">
-            <a:avLst/>
+            <a:off x="3995928" y="1463040"/>
+            <a:ext cx="905256" cy="411480"/>
+          </a:xfrm>
+          <a:prstGeom prst="roundRect">
+            <a:avLst>
+              <a:gd name="adj" fmla="val 15000"/>
+            </a:avLst>
           </a:prstGeom>
           <a:solidFill>
-            <a:srgbClr val="6366F1"/>
+            <a:srgbClr val="3B82F6">
+              <a:alpha val="60000"/>
+            </a:srgbClr>
           </a:solidFill>
           <a:ln>
             <a:noFill/>
@@ -4749,20 +5122,24 @@
       </p:sp>
       <p:sp>
         <p:nvSpPr>
-          <p:cNvPr id="10" name="Rectangle 9"/>
+          <p:cNvPr id="17" name="Rounded Rectangle 16"/>
           <p:cNvSpPr/>
           <p:nvPr/>
         </p:nvSpPr>
         <p:spPr>
           <a:xfrm>
-            <a:off x="4705499" y="1143000"/>
-            <a:ext cx="841248" cy="457200"/>
-          </a:xfrm>
-          <a:prstGeom prst="rect">
-            <a:avLst/>
+            <a:off x="5102352" y="1463040"/>
+            <a:ext cx="1005840" cy="411480"/>
+          </a:xfrm>
+          <a:prstGeom prst="roundRect">
+            <a:avLst>
+              <a:gd name="adj" fmla="val 15000"/>
+            </a:avLst>
           </a:prstGeom>
           <a:solidFill>
-            <a:srgbClr val="6366F1"/>
+            <a:srgbClr val="3B82F6">
+              <a:alpha val="60000"/>
+            </a:srgbClr>
           </a:solidFill>
           <a:ln>
             <a:noFill/>
@@ -4792,14 +5169,14 @@
       </p:sp>
       <p:sp>
         <p:nvSpPr>
-          <p:cNvPr id="11" name="TextBox 10"/>
+          <p:cNvPr id="18" name="TextBox 17"/>
           <p:cNvSpPr txBox="1"/>
           <p:nvPr/>
         </p:nvSpPr>
         <p:spPr>
           <a:xfrm>
-            <a:off x="640080" y="1783080"/>
-            <a:ext cx="731520" cy="548640"/>
+            <a:off x="457200" y="2011680"/>
+            <a:ext cx="777240" cy="320040"/>
           </a:xfrm>
           <a:prstGeom prst="rect">
             <a:avLst/>
@@ -4807,14 +5184,16 @@
           <a:noFill/>
         </p:spPr>
         <p:txBody>
-          <a:bodyPr wrap="square"/>
-          <a:lstStyle/>
-          <a:p>
-            <a:pPr algn="l"/>
-            <a:r>
-              <a:rPr sz="800" b="0">
-                <a:solidFill>
-                  <a:srgbClr val="A09D96"/>
+          <a:bodyPr wrap="square">
+            <a:spAutoFit/>
+          </a:bodyPr>
+          <a:lstStyle/>
+          <a:p>
+            <a:pPr algn="l" rtl="0"/>
+            <a:r>
+              <a:rPr sz="800" b="1">
+                <a:solidFill>
+                  <a:srgbClr val="777777"/>
                 </a:solidFill>
                 <a:latin typeface="Consolas"/>
               </a:rPr>
@@ -4825,20 +5204,24 @@
       </p:sp>
       <p:sp>
         <p:nvSpPr>
-          <p:cNvPr id="12" name="Rectangle 11"/>
+          <p:cNvPr id="19" name="Rounded Rectangle 18"/>
           <p:cNvSpPr/>
           <p:nvPr/>
         </p:nvSpPr>
         <p:spPr>
           <a:xfrm>
-            <a:off x="1508760" y="1828800"/>
-            <a:ext cx="4206240" cy="457200"/>
-          </a:xfrm>
-          <a:prstGeom prst="rect">
-            <a:avLst/>
+            <a:off x="1280160" y="1965960"/>
+            <a:ext cx="5029200" cy="411480"/>
+          </a:xfrm>
+          <a:prstGeom prst="roundRect">
+            <a:avLst>
+              <a:gd name="adj" fmla="val 15000"/>
+            </a:avLst>
           </a:prstGeom>
           <a:solidFill>
-            <a:srgbClr val="0EA5E9"/>
+            <a:srgbClr val="22C55E">
+              <a:alpha val="60000"/>
+            </a:srgbClr>
           </a:solidFill>
           <a:ln>
             <a:noFill/>
@@ -4868,14 +5251,14 @@
       </p:sp>
       <p:sp>
         <p:nvSpPr>
-          <p:cNvPr id="13" name="TextBox 12"/>
+          <p:cNvPr id="20" name="TextBox 19"/>
           <p:cNvSpPr txBox="1"/>
           <p:nvPr/>
         </p:nvSpPr>
         <p:spPr>
           <a:xfrm>
-            <a:off x="640080" y="2468880"/>
-            <a:ext cx="731520" cy="548640"/>
+            <a:off x="457200" y="2514600"/>
+            <a:ext cx="777240" cy="320040"/>
           </a:xfrm>
           <a:prstGeom prst="rect">
             <a:avLst/>
@@ -4883,14 +5266,16 @@
           <a:noFill/>
         </p:spPr>
         <p:txBody>
-          <a:bodyPr wrap="square"/>
-          <a:lstStyle/>
-          <a:p>
-            <a:pPr algn="l"/>
-            <a:r>
-              <a:rPr sz="800" b="0">
-                <a:solidFill>
-                  <a:srgbClr val="A09D96"/>
+          <a:bodyPr wrap="square">
+            <a:spAutoFit/>
+          </a:bodyPr>
+          <a:lstStyle/>
+          <a:p>
+            <a:pPr algn="l" rtl="0"/>
+            <a:r>
+              <a:rPr sz="800" b="1">
+                <a:solidFill>
+                  <a:srgbClr val="777777"/>
                 </a:solidFill>
                 <a:latin typeface="Consolas"/>
               </a:rPr>
@@ -4901,20 +5286,24 @@
       </p:sp>
       <p:sp>
         <p:nvSpPr>
-          <p:cNvPr id="14" name="Rectangle 13"/>
+          <p:cNvPr id="21" name="Rounded Rectangle 20"/>
           <p:cNvSpPr/>
           <p:nvPr/>
         </p:nvSpPr>
         <p:spPr>
           <a:xfrm>
-            <a:off x="1508760" y="2514600"/>
-            <a:ext cx="757123" cy="457200"/>
-          </a:xfrm>
-          <a:prstGeom prst="rect">
-            <a:avLst/>
+            <a:off x="1783080" y="2468880"/>
+            <a:ext cx="905256" cy="411480"/>
+          </a:xfrm>
+          <a:prstGeom prst="roundRect">
+            <a:avLst>
+              <a:gd name="adj" fmla="val 15000"/>
+            </a:avLst>
           </a:prstGeom>
           <a:solidFill>
-            <a:srgbClr val="F59E0B"/>
+            <a:srgbClr val="F59E0B">
+              <a:alpha val="60000"/>
+            </a:srgbClr>
           </a:solidFill>
           <a:ln>
             <a:noFill/>
@@ -4944,20 +5333,24 @@
       </p:sp>
       <p:sp>
         <p:nvSpPr>
-          <p:cNvPr id="15" name="Rectangle 14"/>
+          <p:cNvPr id="22" name="Rounded Rectangle 21"/>
           <p:cNvSpPr/>
           <p:nvPr/>
         </p:nvSpPr>
         <p:spPr>
           <a:xfrm>
-            <a:off x="2602382" y="2514600"/>
-            <a:ext cx="588873" cy="457200"/>
-          </a:xfrm>
-          <a:prstGeom prst="rect">
-            <a:avLst/>
+            <a:off x="3090672" y="2468880"/>
+            <a:ext cx="704088" cy="411480"/>
+          </a:xfrm>
+          <a:prstGeom prst="roundRect">
+            <a:avLst>
+              <a:gd name="adj" fmla="val 15000"/>
+            </a:avLst>
           </a:prstGeom>
           <a:solidFill>
-            <a:srgbClr val="F59E0B"/>
+            <a:srgbClr val="F59E0B">
+              <a:alpha val="60000"/>
+            </a:srgbClr>
           </a:solidFill>
           <a:ln>
             <a:noFill/>
@@ -4987,20 +5380,24 @@
       </p:sp>
       <p:sp>
         <p:nvSpPr>
-          <p:cNvPr id="16" name="Rectangle 15"/>
+          <p:cNvPr id="23" name="Rounded Rectangle 22"/>
           <p:cNvSpPr/>
           <p:nvPr/>
         </p:nvSpPr>
         <p:spPr>
           <a:xfrm>
-            <a:off x="3569816" y="2514600"/>
-            <a:ext cx="925372" cy="457200"/>
-          </a:xfrm>
-          <a:prstGeom prst="rect">
-            <a:avLst/>
+            <a:off x="4247388" y="2468880"/>
+            <a:ext cx="1106424" cy="411480"/>
+          </a:xfrm>
+          <a:prstGeom prst="roundRect">
+            <a:avLst>
+              <a:gd name="adj" fmla="val 15000"/>
+            </a:avLst>
           </a:prstGeom>
           <a:solidFill>
-            <a:srgbClr val="F59E0B"/>
+            <a:srgbClr val="F59E0B">
+              <a:alpha val="60000"/>
+            </a:srgbClr>
           </a:solidFill>
           <a:ln>
             <a:noFill/>
@@ -5030,14 +5427,14 @@
       </p:sp>
       <p:sp>
         <p:nvSpPr>
-          <p:cNvPr id="17" name="TextBox 16"/>
+          <p:cNvPr id="24" name="TextBox 23"/>
           <p:cNvSpPr txBox="1"/>
           <p:nvPr/>
         </p:nvSpPr>
         <p:spPr>
           <a:xfrm>
-            <a:off x="640080" y="3154680"/>
-            <a:ext cx="731520" cy="548640"/>
+            <a:off x="457200" y="3017520"/>
+            <a:ext cx="777240" cy="320040"/>
           </a:xfrm>
           <a:prstGeom prst="rect">
             <a:avLst/>
@@ -5045,14 +5442,16 @@
           <a:noFill/>
         </p:spPr>
         <p:txBody>
-          <a:bodyPr wrap="square"/>
-          <a:lstStyle/>
-          <a:p>
-            <a:pPr algn="l"/>
-            <a:r>
-              <a:rPr sz="800" b="0">
-                <a:solidFill>
-                  <a:srgbClr val="A09D96"/>
+          <a:bodyPr wrap="square">
+            <a:spAutoFit/>
+          </a:bodyPr>
+          <a:lstStyle/>
+          <a:p>
+            <a:pPr algn="l" rtl="0"/>
+            <a:r>
+              <a:rPr sz="800" b="1">
+                <a:solidFill>
+                  <a:srgbClr val="777777"/>
                 </a:solidFill>
                 <a:latin typeface="Consolas"/>
               </a:rPr>
@@ -5063,20 +5462,24 @@
       </p:sp>
       <p:sp>
         <p:nvSpPr>
-          <p:cNvPr id="18" name="Rectangle 17"/>
+          <p:cNvPr id="25" name="Rounded Rectangle 24"/>
           <p:cNvSpPr/>
           <p:nvPr/>
         </p:nvSpPr>
         <p:spPr>
           <a:xfrm>
-            <a:off x="1508760" y="3200400"/>
-            <a:ext cx="462686" cy="457200"/>
-          </a:xfrm>
-          <a:prstGeom prst="rect">
-            <a:avLst/>
+            <a:off x="1632204" y="2971800"/>
+            <a:ext cx="553212" cy="411480"/>
+          </a:xfrm>
+          <a:prstGeom prst="roundRect">
+            <a:avLst>
+              <a:gd name="adj" fmla="val 15000"/>
+            </a:avLst>
           </a:prstGeom>
           <a:solidFill>
-            <a:srgbClr val="EC4899"/>
+            <a:srgbClr val="A855F7">
+              <a:alpha val="60000"/>
+            </a:srgbClr>
           </a:solidFill>
           <a:ln>
             <a:noFill/>
@@ -5106,20 +5509,24 @@
       </p:sp>
       <p:sp>
         <p:nvSpPr>
-          <p:cNvPr id="19" name="Rectangle 18"/>
+          <p:cNvPr id="26" name="Rounded Rectangle 25"/>
           <p:cNvSpPr/>
           <p:nvPr/>
         </p:nvSpPr>
         <p:spPr>
           <a:xfrm>
-            <a:off x="2560319" y="3200400"/>
-            <a:ext cx="378561" cy="457200"/>
-          </a:xfrm>
-          <a:prstGeom prst="rect">
-            <a:avLst/>
+            <a:off x="2889504" y="2971800"/>
+            <a:ext cx="452628" cy="411480"/>
+          </a:xfrm>
+          <a:prstGeom prst="roundRect">
+            <a:avLst>
+              <a:gd name="adj" fmla="val 15000"/>
+            </a:avLst>
           </a:prstGeom>
           <a:solidFill>
-            <a:srgbClr val="EC4899"/>
+            <a:srgbClr val="A855F7">
+              <a:alpha val="60000"/>
+            </a:srgbClr>
           </a:solidFill>
           <a:ln>
             <a:noFill/>
@@ -5149,20 +5556,24 @@
       </p:sp>
       <p:sp>
         <p:nvSpPr>
-          <p:cNvPr id="20" name="Rectangle 19"/>
+          <p:cNvPr id="27" name="Rounded Rectangle 26"/>
           <p:cNvSpPr/>
           <p:nvPr/>
         </p:nvSpPr>
         <p:spPr>
           <a:xfrm>
-            <a:off x="3401566" y="3200400"/>
-            <a:ext cx="546811" cy="457200"/>
-          </a:xfrm>
-          <a:prstGeom prst="rect">
-            <a:avLst/>
+            <a:off x="3895344" y="2971800"/>
+            <a:ext cx="653796" cy="411480"/>
+          </a:xfrm>
+          <a:prstGeom prst="roundRect">
+            <a:avLst>
+              <a:gd name="adj" fmla="val 15000"/>
+            </a:avLst>
           </a:prstGeom>
           <a:solidFill>
-            <a:srgbClr val="EC4899"/>
+            <a:srgbClr val="A855F7">
+              <a:alpha val="60000"/>
+            </a:srgbClr>
           </a:solidFill>
           <a:ln>
             <a:noFill/>
@@ -5192,53 +5603,24 @@
       </p:sp>
       <p:sp>
         <p:nvSpPr>
-          <p:cNvPr id="21" name="TextBox 20"/>
-          <p:cNvSpPr txBox="1"/>
-          <p:nvPr/>
-        </p:nvSpPr>
-        <p:spPr>
-          <a:xfrm>
-            <a:off x="640080" y="3840480"/>
-            <a:ext cx="731520" cy="548640"/>
-          </a:xfrm>
-          <a:prstGeom prst="rect">
-            <a:avLst/>
-          </a:prstGeom>
-          <a:noFill/>
-        </p:spPr>
-        <p:txBody>
-          <a:bodyPr wrap="square"/>
-          <a:lstStyle/>
-          <a:p>
-            <a:pPr algn="l"/>
-            <a:r>
-              <a:rPr sz="800" b="0">
-                <a:solidFill>
-                  <a:srgbClr val="A09D96"/>
-                </a:solidFill>
-                <a:latin typeface="Consolas"/>
-              </a:rPr>
-              <a:t>MUSIC</a:t>
-            </a:r>
-          </a:p>
-        </p:txBody>
-      </p:sp>
-      <p:sp>
-        <p:nvSpPr>
-          <p:cNvPr id="22" name="Rectangle 21"/>
+          <p:cNvPr id="28" name="Rounded Rectangle 27"/>
           <p:cNvSpPr/>
           <p:nvPr/>
         </p:nvSpPr>
         <p:spPr>
           <a:xfrm>
-            <a:off x="1508760" y="3886200"/>
-            <a:ext cx="1766620" cy="457200"/>
-          </a:xfrm>
-          <a:prstGeom prst="rect">
-            <a:avLst/>
+            <a:off x="4850892" y="2971800"/>
+            <a:ext cx="502920" cy="411480"/>
+          </a:xfrm>
+          <a:prstGeom prst="roundRect">
+            <a:avLst>
+              <a:gd name="adj" fmla="val 15000"/>
+            </a:avLst>
           </a:prstGeom>
           <a:solidFill>
-            <a:srgbClr val="22C55E"/>
+            <a:srgbClr val="A855F7">
+              <a:alpha val="60000"/>
+            </a:srgbClr>
           </a:solidFill>
           <a:ln>
             <a:noFill/>
@@ -5268,20 +5650,59 @@
       </p:sp>
       <p:sp>
         <p:nvSpPr>
-          <p:cNvPr id="23" name="Rectangle 22"/>
+          <p:cNvPr id="29" name="TextBox 28"/>
+          <p:cNvSpPr txBox="1"/>
+          <p:nvPr/>
+        </p:nvSpPr>
+        <p:spPr>
+          <a:xfrm>
+            <a:off x="457200" y="3520440"/>
+            <a:ext cx="777240" cy="320040"/>
+          </a:xfrm>
+          <a:prstGeom prst="rect">
+            <a:avLst/>
+          </a:prstGeom>
+          <a:noFill/>
+        </p:spPr>
+        <p:txBody>
+          <a:bodyPr wrap="square">
+            <a:spAutoFit/>
+          </a:bodyPr>
+          <a:lstStyle/>
+          <a:p>
+            <a:pPr algn="l" rtl="0"/>
+            <a:r>
+              <a:rPr sz="800" b="1">
+                <a:solidFill>
+                  <a:srgbClr val="777777"/>
+                </a:solidFill>
+                <a:latin typeface="Consolas"/>
+              </a:rPr>
+              <a:t>MUSIC</a:t>
+            </a:r>
+          </a:p>
+        </p:txBody>
+      </p:sp>
+      <p:sp>
+        <p:nvSpPr>
+          <p:cNvPr id="30" name="Rounded Rectangle 29"/>
           <p:cNvSpPr/>
           <p:nvPr/>
         </p:nvSpPr>
         <p:spPr>
           <a:xfrm>
-            <a:off x="3485692" y="3886200"/>
-            <a:ext cx="1261872" cy="457200"/>
-          </a:xfrm>
-          <a:prstGeom prst="rect">
-            <a:avLst/>
+            <a:off x="1280160" y="3474720"/>
+            <a:ext cx="2112264" cy="411480"/>
+          </a:xfrm>
+          <a:prstGeom prst="roundRect">
+            <a:avLst>
+              <a:gd name="adj" fmla="val 15000"/>
+            </a:avLst>
           </a:prstGeom>
           <a:solidFill>
-            <a:srgbClr val="22C55E"/>
+            <a:srgbClr val="EC4899">
+              <a:alpha val="60000"/>
+            </a:srgbClr>
           </a:solidFill>
           <a:ln>
             <a:noFill/>
@@ -5311,53 +5732,24 @@
       </p:sp>
       <p:sp>
         <p:nvSpPr>
-          <p:cNvPr id="24" name="TextBox 23"/>
-          <p:cNvSpPr txBox="1"/>
-          <p:nvPr/>
-        </p:nvSpPr>
-        <p:spPr>
-          <a:xfrm>
-            <a:off x="640080" y="4526280"/>
-            <a:ext cx="731520" cy="548640"/>
-          </a:xfrm>
-          <a:prstGeom prst="rect">
-            <a:avLst/>
-          </a:prstGeom>
-          <a:noFill/>
-        </p:spPr>
-        <p:txBody>
-          <a:bodyPr wrap="square"/>
-          <a:lstStyle/>
-          <a:p>
-            <a:pPr algn="l"/>
-            <a:r>
-              <a:rPr sz="800" b="0">
-                <a:solidFill>
-                  <a:srgbClr val="A09D96"/>
-                </a:solidFill>
-                <a:latin typeface="Consolas"/>
-              </a:rPr>
-              <a:t>B-ROLL</a:t>
-            </a:r>
-          </a:p>
-        </p:txBody>
-      </p:sp>
-      <p:sp>
-        <p:nvSpPr>
-          <p:cNvPr id="25" name="Rectangle 24"/>
+          <p:cNvPr id="31" name="Rounded Rectangle 30"/>
           <p:cNvSpPr/>
           <p:nvPr/>
         </p:nvSpPr>
         <p:spPr>
           <a:xfrm>
-            <a:off x="1508760" y="4572000"/>
-            <a:ext cx="672998" cy="457200"/>
-          </a:xfrm>
-          <a:prstGeom prst="rect">
-            <a:avLst/>
+            <a:off x="3643884" y="3474720"/>
+            <a:ext cx="1508760" cy="411480"/>
+          </a:xfrm>
+          <a:prstGeom prst="roundRect">
+            <a:avLst>
+              <a:gd name="adj" fmla="val 15000"/>
+            </a:avLst>
           </a:prstGeom>
           <a:solidFill>
-            <a:srgbClr val="F97316"/>
+            <a:srgbClr val="EC4899">
+              <a:alpha val="60000"/>
+            </a:srgbClr>
           </a:solidFill>
           <a:ln>
             <a:noFill/>
@@ -5387,20 +5779,59 @@
       </p:sp>
       <p:sp>
         <p:nvSpPr>
-          <p:cNvPr id="26" name="Rectangle 25"/>
+          <p:cNvPr id="32" name="TextBox 31"/>
+          <p:cNvSpPr txBox="1"/>
+          <p:nvPr/>
+        </p:nvSpPr>
+        <p:spPr>
+          <a:xfrm>
+            <a:off x="457200" y="4023360"/>
+            <a:ext cx="777240" cy="320040"/>
+          </a:xfrm>
+          <a:prstGeom prst="rect">
+            <a:avLst/>
+          </a:prstGeom>
+          <a:noFill/>
+        </p:spPr>
+        <p:txBody>
+          <a:bodyPr wrap="square">
+            <a:spAutoFit/>
+          </a:bodyPr>
+          <a:lstStyle/>
+          <a:p>
+            <a:pPr algn="l" rtl="0"/>
+            <a:r>
+              <a:rPr sz="800" b="1">
+                <a:solidFill>
+                  <a:srgbClr val="777777"/>
+                </a:solidFill>
+                <a:latin typeface="Consolas"/>
+              </a:rPr>
+              <a:t>B-ROLL</a:t>
+            </a:r>
+          </a:p>
+        </p:txBody>
+      </p:sp>
+      <p:sp>
+        <p:nvSpPr>
+          <p:cNvPr id="33" name="Rounded Rectangle 32"/>
           <p:cNvSpPr/>
           <p:nvPr/>
         </p:nvSpPr>
         <p:spPr>
           <a:xfrm>
-            <a:off x="2644444" y="4572000"/>
-            <a:ext cx="841248" cy="457200"/>
-          </a:xfrm>
-          <a:prstGeom prst="rect">
-            <a:avLst/>
+            <a:off x="1531620" y="3977640"/>
+            <a:ext cx="804672" cy="411480"/>
+          </a:xfrm>
+          <a:prstGeom prst="roundRect">
+            <a:avLst>
+              <a:gd name="adj" fmla="val 15000"/>
+            </a:avLst>
           </a:prstGeom>
           <a:solidFill>
-            <a:srgbClr val="F97316"/>
+            <a:srgbClr val="06B6D4">
+              <a:alpha val="60000"/>
+            </a:srgbClr>
           </a:solidFill>
           <a:ln>
             <a:noFill/>
@@ -5430,20 +5861,114 @@
       </p:sp>
       <p:sp>
         <p:nvSpPr>
-          <p:cNvPr id="27" name="Rectangle 26"/>
+          <p:cNvPr id="34" name="Rounded Rectangle 33"/>
           <p:cNvSpPr/>
           <p:nvPr/>
         </p:nvSpPr>
         <p:spPr>
           <a:xfrm>
-            <a:off x="3780128" y="4572000"/>
-            <a:ext cx="546811" cy="457200"/>
+            <a:off x="2889504" y="3977640"/>
+            <a:ext cx="1005840" cy="411480"/>
+          </a:xfrm>
+          <a:prstGeom prst="roundRect">
+            <a:avLst>
+              <a:gd name="adj" fmla="val 15000"/>
+            </a:avLst>
+          </a:prstGeom>
+          <a:solidFill>
+            <a:srgbClr val="06B6D4">
+              <a:alpha val="60000"/>
+            </a:srgbClr>
+          </a:solidFill>
+          <a:ln>
+            <a:noFill/>
+          </a:ln>
+        </p:spPr>
+        <p:style>
+          <a:lnRef idx="1">
+            <a:schemeClr val="accent1"/>
+          </a:lnRef>
+          <a:fillRef idx="3">
+            <a:schemeClr val="accent1"/>
+          </a:fillRef>
+          <a:effectRef idx="2">
+            <a:schemeClr val="accent1"/>
+          </a:effectRef>
+          <a:fontRef idx="minor">
+            <a:schemeClr val="lt1"/>
+          </a:fontRef>
+        </p:style>
+        <p:txBody>
+          <a:bodyPr rtlCol="0" anchor="ctr"/>
+          <a:lstStyle/>
+          <a:p>
+            <a:pPr algn="ctr"/>
+          </a:p>
+        </p:txBody>
+      </p:sp>
+      <p:sp>
+        <p:nvSpPr>
+          <p:cNvPr id="35" name="Rounded Rectangle 34"/>
+          <p:cNvSpPr/>
+          <p:nvPr/>
+        </p:nvSpPr>
+        <p:spPr>
+          <a:xfrm>
+            <a:off x="4247388" y="3977640"/>
+            <a:ext cx="653796" cy="411480"/>
+          </a:xfrm>
+          <a:prstGeom prst="roundRect">
+            <a:avLst>
+              <a:gd name="adj" fmla="val 15000"/>
+            </a:avLst>
+          </a:prstGeom>
+          <a:solidFill>
+            <a:srgbClr val="06B6D4">
+              <a:alpha val="60000"/>
+            </a:srgbClr>
+          </a:solidFill>
+          <a:ln>
+            <a:noFill/>
+          </a:ln>
+        </p:spPr>
+        <p:style>
+          <a:lnRef idx="1">
+            <a:schemeClr val="accent1"/>
+          </a:lnRef>
+          <a:fillRef idx="3">
+            <a:schemeClr val="accent1"/>
+          </a:fillRef>
+          <a:effectRef idx="2">
+            <a:schemeClr val="accent1"/>
+          </a:effectRef>
+          <a:fontRef idx="minor">
+            <a:schemeClr val="lt1"/>
+          </a:fontRef>
+        </p:style>
+        <p:txBody>
+          <a:bodyPr rtlCol="0" anchor="ctr"/>
+          <a:lstStyle/>
+          <a:p>
+            <a:pPr algn="ctr"/>
+          </a:p>
+        </p:txBody>
+      </p:sp>
+      <p:sp>
+        <p:nvSpPr>
+          <p:cNvPr id="36" name="Rectangle 35"/>
+          <p:cNvSpPr/>
+          <p:nvPr/>
+        </p:nvSpPr>
+        <p:spPr>
+          <a:xfrm>
+            <a:off x="3040380" y="1371600"/>
+            <a:ext cx="18288" cy="3200400"/>
           </a:xfrm>
           <a:prstGeom prst="rect">
             <a:avLst/>
           </a:prstGeom>
           <a:solidFill>
-            <a:srgbClr val="F97316"/>
+            <a:srgbClr val="EF4444"/>
           </a:solidFill>
           <a:ln>
             <a:noFill/>
@@ -5505,8 +6030,8 @@
         </p:nvSpPr>
         <p:spPr>
           <a:xfrm>
-            <a:off x="457200" y="365760"/>
-            <a:ext cx="11247120" cy="457200"/>
+            <a:off x="0" y="548640"/>
+            <a:ext cx="12191695" cy="457200"/>
           </a:xfrm>
           <a:prstGeom prst="rect">
             <a:avLst/>
@@ -5514,16 +6039,18 @@
           <a:noFill/>
         </p:spPr>
         <p:txBody>
-          <a:bodyPr wrap="square"/>
-          <a:lstStyle/>
-          <a:p>
-            <a:pPr algn="ctr"/>
-            <a:r>
-              <a:rPr sz="1200" b="1">
+          <a:bodyPr wrap="square">
+            <a:spAutoFit/>
+          </a:bodyPr>
+          <a:lstStyle/>
+          <a:p>
+            <a:pPr algn="ctr" rtl="0"/>
+            <a:r>
+              <a:rPr sz="1400" b="1">
                 <a:solidFill>
                   <a:srgbClr val="22C55E"/>
                 </a:solidFill>
-                <a:latin typeface="Arial"/>
+                <a:latin typeface="Heebo"/>
               </a:rPr>
               <a:t>THE SOLUTION</a:t>
             </a:r>
@@ -5538,8 +6065,8 @@
         </p:nvSpPr>
         <p:spPr>
           <a:xfrm>
-            <a:off x="457200" y="731520"/>
-            <a:ext cx="11247120" cy="914400"/>
+            <a:off x="0" y="914400"/>
+            <a:ext cx="12191695" cy="640080"/>
           </a:xfrm>
           <a:prstGeom prst="rect">
             <a:avLst/>
@@ -5547,18 +6074,20 @@
           <a:noFill/>
         </p:spPr>
         <p:txBody>
-          <a:bodyPr wrap="square"/>
-          <a:lstStyle/>
-          <a:p>
-            <a:pPr algn="ctr"/>
+          <a:bodyPr wrap="square">
+            <a:spAutoFit/>
+          </a:bodyPr>
+          <a:lstStyle/>
+          <a:p>
+            <a:pPr algn="ctr" rtl="1"/>
             <a:r>
               <a:rPr sz="3200" b="1">
                 <a:solidFill>
                   <a:srgbClr val="DCDAD5"/>
                 </a:solidFill>
-                <a:latin typeface="Arial"/>
+                <a:latin typeface="Heebo"/>
               </a:rPr>
-              <a:t>?מה זה Remotion</a:t>
+              <a:t>מה זה Remotion?</a:t>
             </a:r>
           </a:p>
         </p:txBody>
@@ -5571,8 +6100,8 @@
         </p:nvSpPr>
         <p:spPr>
           <a:xfrm>
-            <a:off x="1371600" y="1371600"/>
-            <a:ext cx="9418320" cy="731520"/>
+            <a:off x="0" y="1554480"/>
+            <a:ext cx="12191695" cy="365760"/>
           </a:xfrm>
           <a:prstGeom prst="rect">
             <a:avLst/>
@@ -5580,16 +6109,18 @@
           <a:noFill/>
         </p:spPr>
         <p:txBody>
-          <a:bodyPr wrap="square"/>
-          <a:lstStyle/>
-          <a:p>
-            <a:pPr algn="ctr"/>
-            <a:r>
-              <a:rPr sz="1600" b="0">
-                <a:solidFill>
-                  <a:srgbClr val="A09D96"/>
-                </a:solidFill>
-                <a:latin typeface="Arial"/>
+          <a:bodyPr wrap="square">
+            <a:spAutoFit/>
+          </a:bodyPr>
+          <a:lstStyle/>
+          <a:p>
+            <a:pPr algn="ctr" rtl="1"/>
+            <a:r>
+              <a:rPr sz="1800" b="0">
+                <a:solidFill>
+                  <a:srgbClr val="22C55E"/>
+                </a:solidFill>
+                <a:latin typeface="Heebo"/>
               </a:rPr>
               <a:t>בונים וידאו עם React</a:t>
             </a:r>
@@ -5604,8 +6135,8 @@
         </p:nvSpPr>
         <p:spPr>
           <a:xfrm>
-            <a:off x="1371600" y="1828800"/>
-            <a:ext cx="9418320" cy="548640"/>
+            <a:off x="1828800" y="2011680"/>
+            <a:ext cx="8503920" cy="548640"/>
           </a:xfrm>
           <a:prstGeom prst="rect">
             <a:avLst/>
@@ -5613,16 +6144,18 @@
           <a:noFill/>
         </p:spPr>
         <p:txBody>
-          <a:bodyPr wrap="square"/>
-          <a:lstStyle/>
-          <a:p>
-            <a:pPr algn="ctr"/>
+          <a:bodyPr wrap="square">
+            <a:spAutoFit/>
+          </a:bodyPr>
+          <a:lstStyle/>
+          <a:p>
+            <a:pPr algn="ctr" rtl="1"/>
             <a:r>
               <a:rPr sz="1400" b="0">
                 <a:solidFill>
                   <a:srgbClr val="A09D96"/>
                 </a:solidFill>
-                <a:latin typeface="Arial"/>
+                <a:latin typeface="Heebo"/>
               </a:rPr>
               <a:t>Remotion מאפשר לבנות וידאו באמצעות קוד. קומפוננטות. אנימציות. דינמיות מלאה.</a:t>
             </a:r>
@@ -5631,24 +6164,26 @@
       </p:sp>
       <p:sp>
         <p:nvSpPr>
-          <p:cNvPr id="6" name="Rectangle 5"/>
+          <p:cNvPr id="6" name="Rounded Rectangle 5"/>
           <p:cNvSpPr/>
           <p:nvPr/>
         </p:nvSpPr>
         <p:spPr>
           <a:xfrm>
-            <a:off x="457200" y="2560320"/>
-            <a:ext cx="6217920" cy="3931920"/>
-          </a:xfrm>
-          <a:prstGeom prst="rect">
-            <a:avLst/>
+            <a:off x="457200" y="2743200"/>
+            <a:ext cx="6400800" cy="3840480"/>
+          </a:xfrm>
+          <a:prstGeom prst="roundRect">
+            <a:avLst>
+              <a:gd name="adj" fmla="val 5000"/>
+            </a:avLst>
           </a:prstGeom>
           <a:solidFill>
-            <a:srgbClr val="0A0E14"/>
+            <a:srgbClr val="1E1E1E"/>
           </a:solidFill>
           <a:ln w="12700">
             <a:solidFill>
-              <a:srgbClr val="303030"/>
+              <a:srgbClr val="333333"/>
             </a:solidFill>
           </a:ln>
         </p:spPr>
@@ -5676,14 +6211,143 @@
       </p:sp>
       <p:sp>
         <p:nvSpPr>
-          <p:cNvPr id="7" name="TextBox 6"/>
+          <p:cNvPr id="7" name="Oval 6"/>
+          <p:cNvSpPr/>
+          <p:nvPr/>
+        </p:nvSpPr>
+        <p:spPr>
+          <a:xfrm>
+            <a:off x="594360" y="2834640"/>
+            <a:ext cx="137160" cy="137160"/>
+          </a:xfrm>
+          <a:prstGeom prst="ellipse">
+            <a:avLst/>
+          </a:prstGeom>
+          <a:solidFill>
+            <a:srgbClr val="FF5F57"/>
+          </a:solidFill>
+          <a:ln>
+            <a:noFill/>
+          </a:ln>
+        </p:spPr>
+        <p:style>
+          <a:lnRef idx="1">
+            <a:schemeClr val="accent1"/>
+          </a:lnRef>
+          <a:fillRef idx="3">
+            <a:schemeClr val="accent1"/>
+          </a:fillRef>
+          <a:effectRef idx="2">
+            <a:schemeClr val="accent1"/>
+          </a:effectRef>
+          <a:fontRef idx="minor">
+            <a:schemeClr val="lt1"/>
+          </a:fontRef>
+        </p:style>
+        <p:txBody>
+          <a:bodyPr rtlCol="0" anchor="ctr"/>
+          <a:lstStyle/>
+          <a:p>
+            <a:pPr algn="ctr"/>
+          </a:p>
+        </p:txBody>
+      </p:sp>
+      <p:sp>
+        <p:nvSpPr>
+          <p:cNvPr id="8" name="Oval 7"/>
+          <p:cNvSpPr/>
+          <p:nvPr/>
+        </p:nvSpPr>
+        <p:spPr>
+          <a:xfrm>
+            <a:off x="850392" y="2834640"/>
+            <a:ext cx="137160" cy="137160"/>
+          </a:xfrm>
+          <a:prstGeom prst="ellipse">
+            <a:avLst/>
+          </a:prstGeom>
+          <a:solidFill>
+            <a:srgbClr val="FEBC2E"/>
+          </a:solidFill>
+          <a:ln>
+            <a:noFill/>
+          </a:ln>
+        </p:spPr>
+        <p:style>
+          <a:lnRef idx="1">
+            <a:schemeClr val="accent1"/>
+          </a:lnRef>
+          <a:fillRef idx="3">
+            <a:schemeClr val="accent1"/>
+          </a:fillRef>
+          <a:effectRef idx="2">
+            <a:schemeClr val="accent1"/>
+          </a:effectRef>
+          <a:fontRef idx="minor">
+            <a:schemeClr val="lt1"/>
+          </a:fontRef>
+        </p:style>
+        <p:txBody>
+          <a:bodyPr rtlCol="0" anchor="ctr"/>
+          <a:lstStyle/>
+          <a:p>
+            <a:pPr algn="ctr"/>
+          </a:p>
+        </p:txBody>
+      </p:sp>
+      <p:sp>
+        <p:nvSpPr>
+          <p:cNvPr id="9" name="Oval 8"/>
+          <p:cNvSpPr/>
+          <p:nvPr/>
+        </p:nvSpPr>
+        <p:spPr>
+          <a:xfrm>
+            <a:off x="1106424" y="2834640"/>
+            <a:ext cx="137160" cy="137160"/>
+          </a:xfrm>
+          <a:prstGeom prst="ellipse">
+            <a:avLst/>
+          </a:prstGeom>
+          <a:solidFill>
+            <a:srgbClr val="28C840"/>
+          </a:solidFill>
+          <a:ln>
+            <a:noFill/>
+          </a:ln>
+        </p:spPr>
+        <p:style>
+          <a:lnRef idx="1">
+            <a:schemeClr val="accent1"/>
+          </a:lnRef>
+          <a:fillRef idx="3">
+            <a:schemeClr val="accent1"/>
+          </a:fillRef>
+          <a:effectRef idx="2">
+            <a:schemeClr val="accent1"/>
+          </a:effectRef>
+          <a:fontRef idx="minor">
+            <a:schemeClr val="lt1"/>
+          </a:fontRef>
+        </p:style>
+        <p:txBody>
+          <a:bodyPr rtlCol="0" anchor="ctr"/>
+          <a:lstStyle/>
+          <a:p>
+            <a:pPr algn="ctr"/>
+          </a:p>
+        </p:txBody>
+      </p:sp>
+      <p:sp>
+        <p:nvSpPr>
+          <p:cNvPr id="10" name="TextBox 9"/>
           <p:cNvSpPr txBox="1"/>
           <p:nvPr/>
         </p:nvSpPr>
         <p:spPr>
           <a:xfrm>
-            <a:off x="640080" y="2606040"/>
-            <a:ext cx="1828800" cy="274320"/>
+            <a:off x="1554480" y="2788920"/>
+            <a:ext cx="5029200" cy="274320"/>
           </a:xfrm>
           <a:prstGeom prst="rect">
             <a:avLst/>
@@ -5691,14 +6355,16 @@
           <a:noFill/>
         </p:spPr>
         <p:txBody>
-          <a:bodyPr wrap="square"/>
-          <a:lstStyle/>
-          <a:p>
-            <a:pPr algn="l"/>
+          <a:bodyPr wrap="square">
+            <a:spAutoFit/>
+          </a:bodyPr>
+          <a:lstStyle/>
+          <a:p>
+            <a:pPr algn="l" rtl="0"/>
             <a:r>
               <a:rPr sz="900" b="0">
                 <a:solidFill>
-                  <a:srgbClr val="1A803E"/>
+                  <a:srgbClr val="666666"/>
                 </a:solidFill>
                 <a:latin typeface="Consolas"/>
               </a:rPr>
@@ -5709,14 +6375,14 @@
       </p:sp>
       <p:sp>
         <p:nvSpPr>
-          <p:cNvPr id="8" name="TextBox 7"/>
+          <p:cNvPr id="11" name="TextBox 10"/>
           <p:cNvSpPr txBox="1"/>
           <p:nvPr/>
         </p:nvSpPr>
         <p:spPr>
           <a:xfrm>
-            <a:off x="640080" y="3017520"/>
-            <a:ext cx="5852160" cy="3200400"/>
+            <a:off x="640080" y="3063240"/>
+            <a:ext cx="6035040" cy="3429000"/>
           </a:xfrm>
           <a:prstGeom prst="rect">
             <a:avLst/>
@@ -5724,190 +6390,60 @@
           <a:noFill/>
         </p:spPr>
         <p:txBody>
-          <a:bodyPr wrap="square"/>
-          <a:lstStyle/>
-          <a:p>
-            <a:pPr algn="l">
-              <a:spcAft>
-                <a:spcPts val="200"/>
-              </a:spcAft>
-            </a:pPr>
-            <a:r>
-              <a:rPr sz="1000">
+          <a:bodyPr wrap="square">
+            <a:spAutoFit/>
+          </a:bodyPr>
+          <a:lstStyle/>
+          <a:p>
+            <a:pPr algn="l" rtl="0"/>
+            <a:r>
+              <a:rPr sz="1000" b="0">
                 <a:solidFill>
                   <a:srgbClr val="C5C1B9"/>
                 </a:solidFill>
                 <a:latin typeface="Consolas"/>
               </a:rPr>
-              <a:t>import { AbsoluteFill, useCurrentFrame, interpolate } from 'remotion'</a:t>
-            </a:r>
-          </a:p>
-          <a:p>
-            <a:pPr algn="l">
-              <a:spcAft>
-                <a:spcPts val="200"/>
-              </a:spcAft>
-            </a:pPr>
-            <a:r>
-              <a:rPr sz="1000">
-                <a:solidFill>
-                  <a:srgbClr val="C5C1B9"/>
-                </a:solidFill>
-                <a:latin typeface="Consolas"/>
-              </a:rPr>
-              <a:t>export const MyComp = () =&gt; {</a:t>
-            </a:r>
-          </a:p>
-          <a:p>
-            <a:pPr algn="l">
-              <a:spcAft>
-                <a:spcPts val="200"/>
-              </a:spcAft>
-            </a:pPr>
-            <a:r>
-              <a:rPr sz="1000">
-                <a:solidFill>
-                  <a:srgbClr val="C5C1B9"/>
-                </a:solidFill>
-                <a:latin typeface="Consolas"/>
-              </a:rPr>
-              <a:t>  const frame = useCurrentFrame()</a:t>
-            </a:r>
-          </a:p>
-          <a:p>
-            <a:pPr algn="l">
-              <a:spcAft>
-                <a:spcPts val="200"/>
-              </a:spcAft>
-            </a:pPr>
-            <a:r>
-              <a:rPr sz="1000">
-                <a:solidFill>
-                  <a:srgbClr val="C5C1B9"/>
-                </a:solidFill>
-                <a:latin typeface="Consolas"/>
-              </a:rPr>
-              <a:t>  return (&lt;AbsoluteFill style={{ background: '#0d1117' }}&gt;</a:t>
-            </a:r>
-          </a:p>
-          <a:p>
-            <a:pPr algn="l">
-              <a:spcAft>
-                <a:spcPts val="200"/>
-              </a:spcAft>
-            </a:pPr>
-            <a:r>
-              <a:rPr sz="1000">
-                <a:solidFill>
-                  <a:srgbClr val="C5C1B9"/>
-                </a:solidFill>
-                <a:latin typeface="Consolas"/>
-              </a:rPr>
-              <a:t>    &lt;div style={{ transform: `translateX(${frame*3}px)` }} /&gt;</a:t>
-            </a:r>
-          </a:p>
-          <a:p>
-            <a:pPr algn="l">
-              <a:spcAft>
-                <a:spcPts val="200"/>
-              </a:spcAft>
-            </a:pPr>
-            <a:r>
-              <a:rPr sz="1000">
-                <a:solidFill>
-                  <a:srgbClr val="C5C1B9"/>
-                </a:solidFill>
-                <a:latin typeface="Consolas"/>
-              </a:rPr>
-              <a:t>    &lt;h1 style={{ opacity: interpolate(frame,[0,30],[0,1]) }}&gt;</a:t>
-            </a:r>
-          </a:p>
-          <a:p>
-            <a:pPr algn="l">
-              <a:spcAft>
-                <a:spcPts val="200"/>
-              </a:spcAft>
-            </a:pPr>
-            <a:r>
-              <a:rPr sz="1000">
-                <a:solidFill>
-                  <a:srgbClr val="C5C1B9"/>
-                </a:solidFill>
-                <a:latin typeface="Consolas"/>
-              </a:rPr>
-              <a:t>      Hello, Remotion&lt;/h1&gt;</a:t>
-            </a:r>
-          </a:p>
-          <a:p>
-            <a:pPr algn="l">
-              <a:spcAft>
-                <a:spcPts val="200"/>
-              </a:spcAft>
-            </a:pPr>
-            <a:r>
-              <a:rPr sz="1000">
-                <a:solidFill>
-                  <a:srgbClr val="C5C1B9"/>
-                </a:solidFill>
-                <a:latin typeface="Consolas"/>
-              </a:rPr>
-              <a:t>    &lt;div style={{ transform: `scale(${...})` }} /&gt;</a:t>
-            </a:r>
-          </a:p>
-          <a:p>
-            <a:pPr algn="l">
-              <a:spcAft>
-                <a:spcPts val="200"/>
-              </a:spcAft>
-            </a:pPr>
-            <a:r>
-              <a:rPr sz="1000">
-                <a:solidFill>
-                  <a:srgbClr val="C5C1B9"/>
-                </a:solidFill>
-                <a:latin typeface="Consolas"/>
-              </a:rPr>
-              <a:t>  &lt;/AbsoluteFill&gt;)</a:t>
-            </a:r>
-          </a:p>
-          <a:p>
-            <a:pPr algn="l">
-              <a:spcAft>
-                <a:spcPts val="200"/>
-              </a:spcAft>
-            </a:pPr>
-            <a:r>
-              <a:rPr sz="1000">
-                <a:solidFill>
-                  <a:srgbClr val="C5C1B9"/>
-                </a:solidFill>
-                <a:latin typeface="Consolas"/>
-              </a:rPr>
-              <a:t>}</a:t>
-            </a:r>
-          </a:p>
-        </p:txBody>
-      </p:sp>
-      <p:sp>
-        <p:nvSpPr>
-          <p:cNvPr id="9" name="Rectangle 8"/>
+              <a:t>import { AbsoluteFill, useCurrentFrame,
+         interpolate } from 'remotion'
+export const MyComp = () =&gt; {
+  const frame = useCurrentFrame()
+  return (&lt;AbsoluteFill style={{
+    background: '#0d1117' }}&gt;
+    &lt;div style={{ transform:
+      `translateX(${frame*3}px)` }} /&gt;
+    &lt;h1 style={{ opacity:
+      interpolate(frame,[0,30],[0,1])
+    }}&gt;Hello, Remotion&lt;/h1&gt;
+    &lt;div style={{ transform:
+      `scale(...)` }} /&gt;
+  &lt;/AbsoluteFill&gt;)
+}</a:t>
+            </a:r>
+          </a:p>
+        </p:txBody>
+      </p:sp>
+      <p:sp>
+        <p:nvSpPr>
+          <p:cNvPr id="12" name="Rounded Rectangle 11"/>
           <p:cNvSpPr/>
           <p:nvPr/>
         </p:nvSpPr>
         <p:spPr>
           <a:xfrm>
-            <a:off x="6949440" y="2560320"/>
-            <a:ext cx="4754880" cy="3931920"/>
-          </a:xfrm>
-          <a:prstGeom prst="rect">
-            <a:avLst/>
+            <a:off x="7315200" y="2743200"/>
+            <a:ext cx="4389120" cy="3840480"/>
+          </a:xfrm>
+          <a:prstGeom prst="roundRect">
+            <a:avLst>
+              <a:gd name="adj" fmla="val 5000"/>
+            </a:avLst>
           </a:prstGeom>
           <a:solidFill>
             <a:srgbClr val="0D1117"/>
           </a:solidFill>
           <a:ln w="12700">
             <a:solidFill>
-              <a:srgbClr val="303030"/>
+              <a:srgbClr val="333333"/>
             </a:solidFill>
           </a:ln>
         </p:spPr>
@@ -5935,14 +6471,143 @@
       </p:sp>
       <p:sp>
         <p:nvSpPr>
-          <p:cNvPr id="10" name="TextBox 9"/>
+          <p:cNvPr id="13" name="Oval 12"/>
+          <p:cNvSpPr/>
+          <p:nvPr/>
+        </p:nvSpPr>
+        <p:spPr>
+          <a:xfrm>
+            <a:off x="7452360" y="2834640"/>
+            <a:ext cx="137160" cy="137160"/>
+          </a:xfrm>
+          <a:prstGeom prst="ellipse">
+            <a:avLst/>
+          </a:prstGeom>
+          <a:solidFill>
+            <a:srgbClr val="FF5F57"/>
+          </a:solidFill>
+          <a:ln>
+            <a:noFill/>
+          </a:ln>
+        </p:spPr>
+        <p:style>
+          <a:lnRef idx="1">
+            <a:schemeClr val="accent1"/>
+          </a:lnRef>
+          <a:fillRef idx="3">
+            <a:schemeClr val="accent1"/>
+          </a:fillRef>
+          <a:effectRef idx="2">
+            <a:schemeClr val="accent1"/>
+          </a:effectRef>
+          <a:fontRef idx="minor">
+            <a:schemeClr val="lt1"/>
+          </a:fontRef>
+        </p:style>
+        <p:txBody>
+          <a:bodyPr rtlCol="0" anchor="ctr"/>
+          <a:lstStyle/>
+          <a:p>
+            <a:pPr algn="ctr"/>
+          </a:p>
+        </p:txBody>
+      </p:sp>
+      <p:sp>
+        <p:nvSpPr>
+          <p:cNvPr id="14" name="Oval 13"/>
+          <p:cNvSpPr/>
+          <p:nvPr/>
+        </p:nvSpPr>
+        <p:spPr>
+          <a:xfrm>
+            <a:off x="7708392" y="2834640"/>
+            <a:ext cx="137160" cy="137160"/>
+          </a:xfrm>
+          <a:prstGeom prst="ellipse">
+            <a:avLst/>
+          </a:prstGeom>
+          <a:solidFill>
+            <a:srgbClr val="FEBC2E"/>
+          </a:solidFill>
+          <a:ln>
+            <a:noFill/>
+          </a:ln>
+        </p:spPr>
+        <p:style>
+          <a:lnRef idx="1">
+            <a:schemeClr val="accent1"/>
+          </a:lnRef>
+          <a:fillRef idx="3">
+            <a:schemeClr val="accent1"/>
+          </a:fillRef>
+          <a:effectRef idx="2">
+            <a:schemeClr val="accent1"/>
+          </a:effectRef>
+          <a:fontRef idx="minor">
+            <a:schemeClr val="lt1"/>
+          </a:fontRef>
+        </p:style>
+        <p:txBody>
+          <a:bodyPr rtlCol="0" anchor="ctr"/>
+          <a:lstStyle/>
+          <a:p>
+            <a:pPr algn="ctr"/>
+          </a:p>
+        </p:txBody>
+      </p:sp>
+      <p:sp>
+        <p:nvSpPr>
+          <p:cNvPr id="15" name="Oval 14"/>
+          <p:cNvSpPr/>
+          <p:nvPr/>
+        </p:nvSpPr>
+        <p:spPr>
+          <a:xfrm>
+            <a:off x="7964424" y="2834640"/>
+            <a:ext cx="137160" cy="137160"/>
+          </a:xfrm>
+          <a:prstGeom prst="ellipse">
+            <a:avLst/>
+          </a:prstGeom>
+          <a:solidFill>
+            <a:srgbClr val="28C840"/>
+          </a:solidFill>
+          <a:ln>
+            <a:noFill/>
+          </a:ln>
+        </p:spPr>
+        <p:style>
+          <a:lnRef idx="1">
+            <a:schemeClr val="accent1"/>
+          </a:lnRef>
+          <a:fillRef idx="3">
+            <a:schemeClr val="accent1"/>
+          </a:fillRef>
+          <a:effectRef idx="2">
+            <a:schemeClr val="accent1"/>
+          </a:effectRef>
+          <a:fontRef idx="minor">
+            <a:schemeClr val="lt1"/>
+          </a:fontRef>
+        </p:style>
+        <p:txBody>
+          <a:bodyPr rtlCol="0" anchor="ctr"/>
+          <a:lstStyle/>
+          <a:p>
+            <a:pPr algn="ctr"/>
+          </a:p>
+        </p:txBody>
+      </p:sp>
+      <p:sp>
+        <p:nvSpPr>
+          <p:cNvPr id="16" name="TextBox 15"/>
           <p:cNvSpPr txBox="1"/>
           <p:nvPr/>
         </p:nvSpPr>
         <p:spPr>
           <a:xfrm>
-            <a:off x="7132320" y="2606040"/>
-            <a:ext cx="2743200" cy="274320"/>
+            <a:off x="8412480" y="2788920"/>
+            <a:ext cx="1828800" cy="274320"/>
           </a:xfrm>
           <a:prstGeom prst="rect">
             <a:avLst/>
@@ -5950,14 +6615,16 @@
           <a:noFill/>
         </p:spPr>
         <p:txBody>
-          <a:bodyPr wrap="square"/>
-          <a:lstStyle/>
-          <a:p>
-            <a:pPr algn="l"/>
+          <a:bodyPr wrap="square">
+            <a:spAutoFit/>
+          </a:bodyPr>
+          <a:lstStyle/>
+          <a:p>
+            <a:pPr algn="l" rtl="0"/>
             <a:r>
               <a:rPr sz="900" b="0">
                 <a:solidFill>
-                  <a:srgbClr val="1A803E"/>
+                  <a:srgbClr val="666666"/>
                 </a:solidFill>
                 <a:latin typeface="Consolas"/>
               </a:rPr>
@@ -5968,14 +6635,14 @@
       </p:sp>
       <p:sp>
         <p:nvSpPr>
-          <p:cNvPr id="11" name="Rectangle 10"/>
+          <p:cNvPr id="17" name="Rectangle 16"/>
           <p:cNvSpPr/>
           <p:nvPr/>
         </p:nvSpPr>
         <p:spPr>
           <a:xfrm>
-            <a:off x="7498079" y="3474720"/>
-            <a:ext cx="731520" cy="731520"/>
+            <a:off x="8046720" y="3474720"/>
+            <a:ext cx="1097280" cy="731520"/>
           </a:xfrm>
           <a:prstGeom prst="rect">
             <a:avLst/>
@@ -6011,14 +6678,14 @@
       </p:sp>
       <p:sp>
         <p:nvSpPr>
-          <p:cNvPr id="12" name="TextBox 11"/>
+          <p:cNvPr id="18" name="TextBox 17"/>
           <p:cNvSpPr txBox="1"/>
           <p:nvPr/>
         </p:nvSpPr>
         <p:spPr>
           <a:xfrm>
-            <a:off x="7315200" y="4389120"/>
-            <a:ext cx="3657600" cy="548640"/>
+            <a:off x="7772400" y="4389120"/>
+            <a:ext cx="3474720" cy="548640"/>
           </a:xfrm>
           <a:prstGeom prst="rect">
             <a:avLst/>
@@ -6026,16 +6693,18 @@
           <a:noFill/>
         </p:spPr>
         <p:txBody>
-          <a:bodyPr wrap="square"/>
-          <a:lstStyle/>
-          <a:p>
-            <a:pPr algn="ctr"/>
-            <a:r>
-              <a:rPr sz="2000" b="1">
-                <a:solidFill>
-                  <a:srgbClr val="DCDAD5"/>
-                </a:solidFill>
-                <a:latin typeface="Arial"/>
+          <a:bodyPr wrap="square">
+            <a:spAutoFit/>
+          </a:bodyPr>
+          <a:lstStyle/>
+          <a:p>
+            <a:pPr algn="ctr" rtl="0"/>
+            <a:r>
+              <a:rPr sz="2200" b="1">
+                <a:solidFill>
+                  <a:srgbClr val="FFFFFF"/>
+                </a:solidFill>
+                <a:latin typeface="Heebo"/>
               </a:rPr>
               <a:t>Hello, Remotion</a:t>
             </a:r>
@@ -6044,20 +6713,20 @@
       </p:sp>
       <p:sp>
         <p:nvSpPr>
-          <p:cNvPr id="13" name="Oval 12"/>
+          <p:cNvPr id="19" name="Oval 18"/>
           <p:cNvSpPr/>
           <p:nvPr/>
         </p:nvSpPr>
         <p:spPr>
           <a:xfrm>
-            <a:off x="8961120" y="5120640"/>
-            <a:ext cx="822960" cy="822960"/>
+            <a:off x="8961120" y="5212080"/>
+            <a:ext cx="1097280" cy="1097280"/>
           </a:xfrm>
           <a:prstGeom prst="ellipse">
             <a:avLst/>
           </a:prstGeom>
           <a:solidFill>
-            <a:srgbClr val="6366F1"/>
+            <a:srgbClr val="22C55E"/>
           </a:solidFill>
           <a:ln>
             <a:noFill/>
@@ -6119,8 +6788,8 @@
         </p:nvSpPr>
         <p:spPr>
           <a:xfrm>
-            <a:off x="457200" y="457200"/>
-            <a:ext cx="11247120" cy="457200"/>
+            <a:off x="0" y="548640"/>
+            <a:ext cx="12191695" cy="457200"/>
           </a:xfrm>
           <a:prstGeom prst="rect">
             <a:avLst/>
@@ -6128,16 +6797,18 @@
           <a:noFill/>
         </p:spPr>
         <p:txBody>
-          <a:bodyPr wrap="square"/>
-          <a:lstStyle/>
-          <a:p>
-            <a:pPr algn="ctr"/>
-            <a:r>
-              <a:rPr sz="1200" b="1">
+          <a:bodyPr wrap="square">
+            <a:spAutoFit/>
+          </a:bodyPr>
+          <a:lstStyle/>
+          <a:p>
+            <a:pPr algn="ctr" rtl="0"/>
+            <a:r>
+              <a:rPr sz="1400" b="1">
                 <a:solidFill>
                   <a:srgbClr val="22C55E"/>
                 </a:solidFill>
-                <a:latin typeface="Arial"/>
+                <a:latin typeface="Heebo"/>
               </a:rPr>
               <a:t>מה אפשר לבנות</a:t>
             </a:r>
@@ -6152,8 +6823,8 @@
         </p:nvSpPr>
         <p:spPr>
           <a:xfrm>
-            <a:off x="457200" y="914400"/>
-            <a:ext cx="11247120" cy="914400"/>
+            <a:off x="914400" y="914400"/>
+            <a:ext cx="10332720" cy="731520"/>
           </a:xfrm>
           <a:prstGeom prst="rect">
             <a:avLst/>
@@ -6161,16 +6832,18 @@
           <a:noFill/>
         </p:spPr>
         <p:txBody>
-          <a:bodyPr wrap="square"/>
-          <a:lstStyle/>
-          <a:p>
-            <a:pPr algn="ctr"/>
+          <a:bodyPr wrap="square">
+            <a:spAutoFit/>
+          </a:bodyPr>
+          <a:lstStyle/>
+          <a:p>
+            <a:pPr algn="ctr" rtl="1"/>
             <a:r>
               <a:rPr sz="2800" b="1">
                 <a:solidFill>
                   <a:srgbClr val="DCDAD5"/>
                 </a:solidFill>
-                <a:latin typeface="Arial"/>
+                <a:latin typeface="Heebo"/>
               </a:rPr>
               <a:t>לא רק אנימציה. Remotion היא מערכת לייצור וידאו.</a:t>
             </a:r>
@@ -6185,18 +6858,20 @@
         </p:nvSpPr>
         <p:spPr>
           <a:xfrm>
-            <a:off x="518007" y="2011680"/>
-            <a:ext cx="2011680" cy="2926080"/>
+            <a:off x="838047" y="2103120"/>
+            <a:ext cx="1920240" cy="3200400"/>
           </a:xfrm>
           <a:prstGeom prst="roundRect">
-            <a:avLst/>
+            <a:avLst>
+              <a:gd name="adj" fmla="val 5000"/>
+            </a:avLst>
           </a:prstGeom>
           <a:solidFill>
-            <a:srgbClr val="14171F"/>
+            <a:srgbClr val="252525"/>
           </a:solidFill>
           <a:ln w="12700">
             <a:solidFill>
-              <a:srgbClr val="2A2A2A"/>
+              <a:srgbClr val="334433"/>
             </a:solidFill>
           </a:ln>
         </p:spPr>
@@ -6230,8 +6905,8 @@
         </p:nvSpPr>
         <p:spPr>
           <a:xfrm>
-            <a:off x="518007" y="2377440"/>
-            <a:ext cx="2011680" cy="731520"/>
+            <a:off x="838047" y="2468880"/>
+            <a:ext cx="1920240" cy="1097280"/>
           </a:xfrm>
           <a:prstGeom prst="rect">
             <a:avLst/>
@@ -6239,18 +6914,20 @@
           <a:noFill/>
         </p:spPr>
         <p:txBody>
-          <a:bodyPr wrap="square"/>
-          <a:lstStyle/>
-          <a:p>
-            <a:pPr algn="ctr"/>
-            <a:r>
-              <a:rPr sz="3600" b="0">
-                <a:solidFill>
-                  <a:srgbClr val="DCDAD5"/>
-                </a:solidFill>
-                <a:latin typeface="Arial"/>
+          <a:bodyPr wrap="square">
+            <a:spAutoFit/>
+          </a:bodyPr>
+          <a:lstStyle/>
+          <a:p>
+            <a:pPr algn="ctr" rtl="0"/>
+            <a:r>
+              <a:rPr sz="3200" b="0">
+                <a:solidFill>
+                  <a:srgbClr val="22C55E"/>
+                </a:solidFill>
+                <a:latin typeface="Heebo"/>
               </a:rPr>
-              <a:t>📱</a:t>
+              <a:t>▯</a:t>
             </a:r>
           </a:p>
         </p:txBody>
@@ -6263,8 +6940,8 @@
         </p:nvSpPr>
         <p:spPr>
           <a:xfrm>
-            <a:off x="518007" y="3383280"/>
-            <a:ext cx="2011680" cy="1097280"/>
+            <a:off x="929487" y="3749040"/>
+            <a:ext cx="1737360" cy="1097280"/>
           </a:xfrm>
           <a:prstGeom prst="rect">
             <a:avLst/>
@@ -6272,19 +6949,40 @@
           <a:noFill/>
         </p:spPr>
         <p:txBody>
-          <a:bodyPr wrap="square"/>
-          <a:lstStyle/>
-          <a:p>
-            <a:pPr algn="ctr"/>
-            <a:r>
-              <a:rPr sz="1600" b="0">
-                <a:solidFill>
-                  <a:srgbClr val="DCDAD5"/>
-                </a:solidFill>
-                <a:latin typeface="Arial"/>
+          <a:bodyPr wrap="square">
+            <a:spAutoFit/>
+          </a:bodyPr>
+          <a:lstStyle/>
+          <a:p>
+            <a:pPr algn="ctr" rtl="1">
+              <a:lnSpc>
+                <a:spcPts val="2200"/>
+              </a:lnSpc>
+            </a:pPr>
+            <a:r>
+              <a:rPr sz="1400" b="0">
+                <a:solidFill>
+                  <a:srgbClr val="C5C1B9"/>
+                </a:solidFill>
+                <a:latin typeface="Heebo"/>
               </a:rPr>
-              <a:t>סרטוני
-SHORTS</a:t>
+              <a:t>סרטוני</a:t>
+            </a:r>
+          </a:p>
+          <a:p>
+            <a:pPr algn="ctr" rtl="1">
+              <a:lnSpc>
+                <a:spcPts val="2200"/>
+              </a:lnSpc>
+            </a:pPr>
+            <a:r>
+              <a:rPr sz="1400" b="0">
+                <a:solidFill>
+                  <a:srgbClr val="C5C1B9"/>
+                </a:solidFill>
+                <a:latin typeface="Heebo"/>
+              </a:rPr>
+              <a:t>SHORTS</a:t>
             </a:r>
           </a:p>
         </p:txBody>
@@ -6297,18 +6995,20 @@
         </p:nvSpPr>
         <p:spPr>
           <a:xfrm>
-            <a:off x="2804007" y="2011680"/>
-            <a:ext cx="2011680" cy="2926080"/>
+            <a:off x="2986887" y="2103120"/>
+            <a:ext cx="1920240" cy="3200400"/>
           </a:xfrm>
           <a:prstGeom prst="roundRect">
-            <a:avLst/>
+            <a:avLst>
+              <a:gd name="adj" fmla="val 5000"/>
+            </a:avLst>
           </a:prstGeom>
           <a:solidFill>
-            <a:srgbClr val="14171F"/>
+            <a:srgbClr val="252525"/>
           </a:solidFill>
           <a:ln w="12700">
             <a:solidFill>
-              <a:srgbClr val="2A2A2A"/>
+              <a:srgbClr val="334433"/>
             </a:solidFill>
           </a:ln>
         </p:spPr>
@@ -6342,8 +7042,8 @@
         </p:nvSpPr>
         <p:spPr>
           <a:xfrm>
-            <a:off x="2804007" y="2377440"/>
-            <a:ext cx="2011680" cy="731520"/>
+            <a:off x="2986887" y="2468880"/>
+            <a:ext cx="1920240" cy="1097280"/>
           </a:xfrm>
           <a:prstGeom prst="rect">
             <a:avLst/>
@@ -6351,18 +7051,20 @@
           <a:noFill/>
         </p:spPr>
         <p:txBody>
-          <a:bodyPr wrap="square"/>
-          <a:lstStyle/>
-          <a:p>
-            <a:pPr algn="ctr"/>
-            <a:r>
-              <a:rPr sz="3600" b="0">
-                <a:solidFill>
-                  <a:srgbClr val="DCDAD5"/>
-                </a:solidFill>
-                <a:latin typeface="Arial"/>
+          <a:bodyPr wrap="square">
+            <a:spAutoFit/>
+          </a:bodyPr>
+          <a:lstStyle/>
+          <a:p>
+            <a:pPr algn="ctr" rtl="0"/>
+            <a:r>
+              <a:rPr sz="3200" b="0">
+                <a:solidFill>
+                  <a:srgbClr val="22C55E"/>
+                </a:solidFill>
+                <a:latin typeface="Heebo"/>
               </a:rPr>
-              <a:t>📊</a:t>
+              <a:t>▁▃▅▇</a:t>
             </a:r>
           </a:p>
         </p:txBody>
@@ -6375,8 +7077,8 @@
         </p:nvSpPr>
         <p:spPr>
           <a:xfrm>
-            <a:off x="2804007" y="3383280"/>
-            <a:ext cx="2011680" cy="1097280"/>
+            <a:off x="3078327" y="3749040"/>
+            <a:ext cx="1737360" cy="1097280"/>
           </a:xfrm>
           <a:prstGeom prst="rect">
             <a:avLst/>
@@ -6384,19 +7086,40 @@
           <a:noFill/>
         </p:spPr>
         <p:txBody>
-          <a:bodyPr wrap="square"/>
-          <a:lstStyle/>
-          <a:p>
-            <a:pPr algn="ctr"/>
-            <a:r>
-              <a:rPr sz="1600" b="0">
-                <a:solidFill>
-                  <a:srgbClr val="DCDAD5"/>
-                </a:solidFill>
-                <a:latin typeface="Arial"/>
+          <a:bodyPr wrap="square">
+            <a:spAutoFit/>
+          </a:bodyPr>
+          <a:lstStyle/>
+          <a:p>
+            <a:pPr algn="ctr" rtl="1">
+              <a:lnSpc>
+                <a:spcPts val="2200"/>
+              </a:lnSpc>
+            </a:pPr>
+            <a:r>
+              <a:rPr sz="1400" b="0">
+                <a:solidFill>
+                  <a:srgbClr val="C5C1B9"/>
+                </a:solidFill>
+                <a:latin typeface="Heebo"/>
               </a:rPr>
-              <a:t>הדמיות
-נתונים</a:t>
+              <a:t>הדמיות</a:t>
+            </a:r>
+          </a:p>
+          <a:p>
+            <a:pPr algn="ctr" rtl="1">
+              <a:lnSpc>
+                <a:spcPts val="2200"/>
+              </a:lnSpc>
+            </a:pPr>
+            <a:r>
+              <a:rPr sz="1400" b="0">
+                <a:solidFill>
+                  <a:srgbClr val="C5C1B9"/>
+                </a:solidFill>
+                <a:latin typeface="Heebo"/>
+              </a:rPr>
+              <a:t>נתונים</a:t>
             </a:r>
           </a:p>
         </p:txBody>
@@ -6409,18 +7132,20 @@
         </p:nvSpPr>
         <p:spPr>
           <a:xfrm>
-            <a:off x="5090007" y="2011680"/>
-            <a:ext cx="2011680" cy="2926080"/>
+            <a:off x="5135727" y="2103120"/>
+            <a:ext cx="1920240" cy="3200400"/>
           </a:xfrm>
           <a:prstGeom prst="roundRect">
-            <a:avLst/>
+            <a:avLst>
+              <a:gd name="adj" fmla="val 5000"/>
+            </a:avLst>
           </a:prstGeom>
           <a:solidFill>
-            <a:srgbClr val="14171F"/>
+            <a:srgbClr val="252525"/>
           </a:solidFill>
           <a:ln w="12700">
             <a:solidFill>
-              <a:srgbClr val="2A2A2A"/>
+              <a:srgbClr val="334433"/>
             </a:solidFill>
           </a:ln>
         </p:spPr>
@@ -6454,8 +7179,8 @@
         </p:nvSpPr>
         <p:spPr>
           <a:xfrm>
-            <a:off x="5090007" y="2377440"/>
-            <a:ext cx="2011680" cy="731520"/>
+            <a:off x="5135727" y="2468880"/>
+            <a:ext cx="1920240" cy="1097280"/>
           </a:xfrm>
           <a:prstGeom prst="rect">
             <a:avLst/>
@@ -6463,18 +7188,20 @@
           <a:noFill/>
         </p:spPr>
         <p:txBody>
-          <a:bodyPr wrap="square"/>
-          <a:lstStyle/>
-          <a:p>
-            <a:pPr algn="ctr"/>
-            <a:r>
-              <a:rPr sz="3600" b="0">
-                <a:solidFill>
-                  <a:srgbClr val="DCDAD5"/>
-                </a:solidFill>
-                <a:latin typeface="Arial"/>
+          <a:bodyPr wrap="square">
+            <a:spAutoFit/>
+          </a:bodyPr>
+          <a:lstStyle/>
+          <a:p>
+            <a:pPr algn="ctr" rtl="0"/>
+            <a:r>
+              <a:rPr sz="3200" b="0">
+                <a:solidFill>
+                  <a:srgbClr val="22C55E"/>
+                </a:solidFill>
+                <a:latin typeface="Heebo"/>
               </a:rPr>
-              <a:t>🎬</a:t>
+              <a:t>■</a:t>
             </a:r>
           </a:p>
         </p:txBody>
@@ -6487,8 +7214,8 @@
         </p:nvSpPr>
         <p:spPr>
           <a:xfrm>
-            <a:off x="5090007" y="3383280"/>
-            <a:ext cx="2011680" cy="1097280"/>
+            <a:off x="5227167" y="3749040"/>
+            <a:ext cx="1737360" cy="1097280"/>
           </a:xfrm>
           <a:prstGeom prst="rect">
             <a:avLst/>
@@ -6496,19 +7223,40 @@
           <a:noFill/>
         </p:spPr>
         <p:txBody>
-          <a:bodyPr wrap="square"/>
-          <a:lstStyle/>
-          <a:p>
-            <a:pPr algn="ctr"/>
-            <a:r>
-              <a:rPr sz="1600" b="0">
-                <a:solidFill>
-                  <a:srgbClr val="DCDAD5"/>
-                </a:solidFill>
-                <a:latin typeface="Arial"/>
+          <a:bodyPr wrap="square">
+            <a:spAutoFit/>
+          </a:bodyPr>
+          <a:lstStyle/>
+          <a:p>
+            <a:pPr algn="ctr" rtl="1">
+              <a:lnSpc>
+                <a:spcPts val="2200"/>
+              </a:lnSpc>
+            </a:pPr>
+            <a:r>
+              <a:rPr sz="1400" b="0">
+                <a:solidFill>
+                  <a:srgbClr val="C5C1B9"/>
+                </a:solidFill>
+                <a:latin typeface="Heebo"/>
               </a:rPr>
-              <a:t>סרטוני
-Promotion</a:t>
+              <a:t>סרטוני</a:t>
+            </a:r>
+          </a:p>
+          <a:p>
+            <a:pPr algn="ctr" rtl="1">
+              <a:lnSpc>
+                <a:spcPts val="2200"/>
+              </a:lnSpc>
+            </a:pPr>
+            <a:r>
+              <a:rPr sz="1400" b="0">
+                <a:solidFill>
+                  <a:srgbClr val="C5C1B9"/>
+                </a:solidFill>
+                <a:latin typeface="Heebo"/>
+              </a:rPr>
+              <a:t>Promotion</a:t>
             </a:r>
           </a:p>
         </p:txBody>
@@ -6521,18 +7269,20 @@
         </p:nvSpPr>
         <p:spPr>
           <a:xfrm>
-            <a:off x="7376007" y="2011680"/>
-            <a:ext cx="2011680" cy="2926080"/>
+            <a:off x="7284567" y="2103120"/>
+            <a:ext cx="1920240" cy="3200400"/>
           </a:xfrm>
           <a:prstGeom prst="roundRect">
-            <a:avLst/>
+            <a:avLst>
+              <a:gd name="adj" fmla="val 5000"/>
+            </a:avLst>
           </a:prstGeom>
           <a:solidFill>
-            <a:srgbClr val="14171F"/>
+            <a:srgbClr val="252525"/>
           </a:solidFill>
           <a:ln w="12700">
             <a:solidFill>
-              <a:srgbClr val="2A2A2A"/>
+              <a:srgbClr val="334433"/>
             </a:solidFill>
           </a:ln>
         </p:spPr>
@@ -6566,8 +7316,8 @@
         </p:nvSpPr>
         <p:spPr>
           <a:xfrm>
-            <a:off x="7376007" y="2377440"/>
-            <a:ext cx="2011680" cy="731520"/>
+            <a:off x="7284567" y="2468880"/>
+            <a:ext cx="1920240" cy="1097280"/>
           </a:xfrm>
           <a:prstGeom prst="rect">
             <a:avLst/>
@@ -6575,18 +7325,20 @@
           <a:noFill/>
         </p:spPr>
         <p:txBody>
-          <a:bodyPr wrap="square"/>
-          <a:lstStyle/>
-          <a:p>
-            <a:pPr algn="ctr"/>
-            <a:r>
-              <a:rPr sz="3600" b="0">
-                <a:solidFill>
-                  <a:srgbClr val="DCDAD5"/>
-                </a:solidFill>
-                <a:latin typeface="Arial"/>
+          <a:bodyPr wrap="square">
+            <a:spAutoFit/>
+          </a:bodyPr>
+          <a:lstStyle/>
+          <a:p>
+            <a:pPr algn="ctr" rtl="0"/>
+            <a:r>
+              <a:rPr sz="3200" b="0">
+                <a:solidFill>
+                  <a:srgbClr val="22C55E"/>
+                </a:solidFill>
+                <a:latin typeface="Heebo"/>
               </a:rPr>
-              <a:t>💬</a:t>
+              <a:t>CC</a:t>
             </a:r>
           </a:p>
         </p:txBody>
@@ -6599,8 +7351,8 @@
         </p:nvSpPr>
         <p:spPr>
           <a:xfrm>
-            <a:off x="7376007" y="3383280"/>
-            <a:ext cx="2011680" cy="1097280"/>
+            <a:off x="7376007" y="3749040"/>
+            <a:ext cx="1737360" cy="1097280"/>
           </a:xfrm>
           <a:prstGeom prst="rect">
             <a:avLst/>
@@ -6608,19 +7360,40 @@
           <a:noFill/>
         </p:spPr>
         <p:txBody>
-          <a:bodyPr wrap="square"/>
-          <a:lstStyle/>
-          <a:p>
-            <a:pPr algn="ctr"/>
-            <a:r>
-              <a:rPr sz="1600" b="0">
-                <a:solidFill>
-                  <a:srgbClr val="DCDAD5"/>
-                </a:solidFill>
-                <a:latin typeface="Arial"/>
+          <a:bodyPr wrap="square">
+            <a:spAutoFit/>
+          </a:bodyPr>
+          <a:lstStyle/>
+          <a:p>
+            <a:pPr algn="ctr" rtl="1">
+              <a:lnSpc>
+                <a:spcPts val="2200"/>
+              </a:lnSpc>
+            </a:pPr>
+            <a:r>
+              <a:rPr sz="1400" b="0">
+                <a:solidFill>
+                  <a:srgbClr val="C5C1B9"/>
+                </a:solidFill>
+                <a:latin typeface="Heebo"/>
               </a:rPr>
-              <a:t>הוספת
-כתוביות</a:t>
+              <a:t>הוספת</a:t>
+            </a:r>
+          </a:p>
+          <a:p>
+            <a:pPr algn="ctr" rtl="1">
+              <a:lnSpc>
+                <a:spcPts val="2200"/>
+              </a:lnSpc>
+            </a:pPr>
+            <a:r>
+              <a:rPr sz="1400" b="0">
+                <a:solidFill>
+                  <a:srgbClr val="C5C1B9"/>
+                </a:solidFill>
+                <a:latin typeface="Heebo"/>
+              </a:rPr>
+              <a:t>כתוביות</a:t>
             </a:r>
           </a:p>
         </p:txBody>
@@ -6633,18 +7406,20 @@
         </p:nvSpPr>
         <p:spPr>
           <a:xfrm>
-            <a:off x="9662007" y="2011680"/>
-            <a:ext cx="2011680" cy="2926080"/>
+            <a:off x="9433407" y="2103120"/>
+            <a:ext cx="1920240" cy="3200400"/>
           </a:xfrm>
           <a:prstGeom prst="roundRect">
-            <a:avLst/>
+            <a:avLst>
+              <a:gd name="adj" fmla="val 5000"/>
+            </a:avLst>
           </a:prstGeom>
           <a:solidFill>
-            <a:srgbClr val="14171F"/>
+            <a:srgbClr val="252525"/>
           </a:solidFill>
           <a:ln w="12700">
             <a:solidFill>
-              <a:srgbClr val="2A2A2A"/>
+              <a:srgbClr val="334433"/>
             </a:solidFill>
           </a:ln>
         </p:spPr>
@@ -6678,8 +7453,8 @@
         </p:nvSpPr>
         <p:spPr>
           <a:xfrm>
-            <a:off x="9662007" y="2377440"/>
-            <a:ext cx="2011680" cy="731520"/>
+            <a:off x="9433407" y="2468880"/>
+            <a:ext cx="1920240" cy="1097280"/>
           </a:xfrm>
           <a:prstGeom prst="rect">
             <a:avLst/>
@@ -6687,18 +7462,20 @@
           <a:noFill/>
         </p:spPr>
         <p:txBody>
-          <a:bodyPr wrap="square"/>
-          <a:lstStyle/>
-          <a:p>
-            <a:pPr algn="ctr"/>
-            <a:r>
-              <a:rPr sz="3600" b="0">
-                <a:solidFill>
-                  <a:srgbClr val="DCDAD5"/>
-                </a:solidFill>
-                <a:latin typeface="Arial"/>
+          <a:bodyPr wrap="square">
+            <a:spAutoFit/>
+          </a:bodyPr>
+          <a:lstStyle/>
+          <a:p>
+            <a:pPr algn="ctr" rtl="0"/>
+            <a:r>
+              <a:rPr sz="3200" b="0">
+                <a:solidFill>
+                  <a:srgbClr val="22C55E"/>
+                </a:solidFill>
+                <a:latin typeface="Heebo"/>
               </a:rPr>
-              <a:t>🖱</a:t>
+              <a:t>○○○</a:t>
             </a:r>
           </a:p>
         </p:txBody>
@@ -6711,8 +7488,8 @@
         </p:nvSpPr>
         <p:spPr>
           <a:xfrm>
-            <a:off x="9662007" y="3383280"/>
-            <a:ext cx="2011680" cy="1097280"/>
+            <a:off x="9524847" y="3749040"/>
+            <a:ext cx="1737360" cy="1097280"/>
           </a:xfrm>
           <a:prstGeom prst="rect">
             <a:avLst/>
@@ -6720,19 +7497,40 @@
           <a:noFill/>
         </p:spPr>
         <p:txBody>
-          <a:bodyPr wrap="square"/>
-          <a:lstStyle/>
-          <a:p>
-            <a:pPr algn="ctr"/>
-            <a:r>
-              <a:rPr sz="1600" b="0">
-                <a:solidFill>
-                  <a:srgbClr val="DCDAD5"/>
-                </a:solidFill>
-                <a:latin typeface="Arial"/>
+          <a:bodyPr wrap="square">
+            <a:spAutoFit/>
+          </a:bodyPr>
+          <a:lstStyle/>
+          <a:p>
+            <a:pPr algn="ctr" rtl="1">
+              <a:lnSpc>
+                <a:spcPts val="2200"/>
+              </a:lnSpc>
+            </a:pPr>
+            <a:r>
+              <a:rPr sz="1400" b="0">
+                <a:solidFill>
+                  <a:srgbClr val="C5C1B9"/>
+                </a:solidFill>
+                <a:latin typeface="Heebo"/>
               </a:rPr>
-              <a:t>אינטראקציות
-בממשק</a:t>
+              <a:t>אינטראקציות</a:t>
+            </a:r>
+          </a:p>
+          <a:p>
+            <a:pPr algn="ctr" rtl="1">
+              <a:lnSpc>
+                <a:spcPts val="2200"/>
+              </a:lnSpc>
+            </a:pPr>
+            <a:r>
+              <a:rPr sz="1400" b="0">
+                <a:solidFill>
+                  <a:srgbClr val="C5C1B9"/>
+                </a:solidFill>
+                <a:latin typeface="Heebo"/>
+              </a:rPr>
+              <a:t>בממשק</a:t>
             </a:r>
           </a:p>
         </p:txBody>
@@ -6745,8 +7543,8 @@
         </p:nvSpPr>
         <p:spPr>
           <a:xfrm>
-            <a:off x="1828800" y="5303520"/>
-            <a:ext cx="8503920" cy="457200"/>
+            <a:off x="0" y="5669280"/>
+            <a:ext cx="12191695" cy="457200"/>
           </a:xfrm>
           <a:prstGeom prst="rect">
             <a:avLst/>
@@ -6754,16 +7552,18 @@
           <a:noFill/>
         </p:spPr>
         <p:txBody>
-          <a:bodyPr wrap="square"/>
-          <a:lstStyle/>
-          <a:p>
-            <a:pPr algn="ctr"/>
+          <a:bodyPr wrap="square">
+            <a:spAutoFit/>
+          </a:bodyPr>
+          <a:lstStyle/>
+          <a:p>
+            <a:pPr algn="ctr" rtl="1"/>
             <a:r>
               <a:rPr sz="1600" b="0">
                 <a:solidFill>
                   <a:srgbClr val="A09D96"/>
                 </a:solidFill>
-                <a:latin typeface="Arial"/>
+                <a:latin typeface="Heebo"/>
               </a:rPr>
               <a:t>וידאו שמבוסס על דאטה, פרומפט או API.</a:t>
             </a:r>
@@ -6804,8 +7604,8 @@
         </p:nvSpPr>
         <p:spPr>
           <a:xfrm>
-            <a:off x="457200" y="457200"/>
-            <a:ext cx="11247120" cy="457200"/>
+            <a:off x="0" y="548640"/>
+            <a:ext cx="12191695" cy="457200"/>
           </a:xfrm>
           <a:prstGeom prst="rect">
             <a:avLst/>
@@ -6813,16 +7613,18 @@
           <a:noFill/>
         </p:spPr>
         <p:txBody>
-          <a:bodyPr wrap="square"/>
-          <a:lstStyle/>
-          <a:p>
-            <a:pPr algn="ctr"/>
-            <a:r>
-              <a:rPr sz="1200" b="1">
+          <a:bodyPr wrap="square">
+            <a:spAutoFit/>
+          </a:bodyPr>
+          <a:lstStyle/>
+          <a:p>
+            <a:pPr algn="ctr" rtl="0"/>
+            <a:r>
+              <a:rPr sz="1400" b="1">
                 <a:solidFill>
                   <a:srgbClr val="22C55E"/>
                 </a:solidFill>
-                <a:latin typeface="Arial"/>
+                <a:latin typeface="Heebo"/>
               </a:rPr>
               <a:t>למה עכשיו</a:t>
             </a:r>
@@ -6837,8 +7639,8 @@
         </p:nvSpPr>
         <p:spPr>
           <a:xfrm>
-            <a:off x="457200" y="914400"/>
-            <a:ext cx="11247120" cy="914400"/>
+            <a:off x="0" y="1005840"/>
+            <a:ext cx="12191695" cy="640080"/>
           </a:xfrm>
           <a:prstGeom prst="rect">
             <a:avLst/>
@@ -6846,16 +7648,18 @@
           <a:noFill/>
         </p:spPr>
         <p:txBody>
-          <a:bodyPr wrap="square"/>
-          <a:lstStyle/>
-          <a:p>
-            <a:pPr algn="ctr"/>
-            <a:r>
-              <a:rPr sz="3200" b="1">
+          <a:bodyPr wrap="square">
+            <a:spAutoFit/>
+          </a:bodyPr>
+          <a:lstStyle/>
+          <a:p>
+            <a:pPr algn="ctr" rtl="1"/>
+            <a:r>
+              <a:rPr sz="3000" b="1">
                 <a:solidFill>
                   <a:srgbClr val="DCDAD5"/>
                 </a:solidFill>
-                <a:latin typeface="Arial"/>
+                <a:latin typeface="Heebo"/>
               </a:rPr>
               <a:t>כי בינה מלאכותית כותבת קוד</a:t>
             </a:r>
@@ -6870,18 +7674,20 @@
         </p:nvSpPr>
         <p:spPr>
           <a:xfrm>
-            <a:off x="1066647" y="2011680"/>
-            <a:ext cx="2103120" cy="2560320"/>
+            <a:off x="700887" y="2194560"/>
+            <a:ext cx="2286000" cy="2560320"/>
           </a:xfrm>
           <a:prstGeom prst="roundRect">
-            <a:avLst/>
+            <a:avLst>
+              <a:gd name="adj" fmla="val 5000"/>
+            </a:avLst>
           </a:prstGeom>
           <a:solidFill>
-            <a:srgbClr val="14171F"/>
+            <a:srgbClr val="252525"/>
           </a:solidFill>
           <a:ln w="12700">
             <a:solidFill>
-              <a:srgbClr val="1A803E"/>
+              <a:srgbClr val="22C55E"/>
             </a:solidFill>
           </a:ln>
         </p:spPr>
@@ -6915,8 +7721,8 @@
         </p:nvSpPr>
         <p:spPr>
           <a:xfrm>
-            <a:off x="1066647" y="2286000"/>
-            <a:ext cx="2103120" cy="731520"/>
+            <a:off x="700887" y="2743200"/>
+            <a:ext cx="2286000" cy="457200"/>
           </a:xfrm>
           <a:prstGeom prst="rect">
             <a:avLst/>
@@ -6924,18 +7730,20 @@
           <a:noFill/>
         </p:spPr>
         <p:txBody>
-          <a:bodyPr wrap="square"/>
-          <a:lstStyle/>
-          <a:p>
-            <a:pPr algn="ctr"/>
-            <a:r>
-              <a:rPr sz="3600" b="0">
+          <a:bodyPr wrap="square">
+            <a:spAutoFit/>
+          </a:bodyPr>
+          <a:lstStyle/>
+          <a:p>
+            <a:pPr algn="ctr" rtl="0"/>
+            <a:r>
+              <a:rPr sz="2000" b="1">
                 <a:solidFill>
                   <a:srgbClr val="22C55E"/>
                 </a:solidFill>
-                <a:latin typeface="Arial"/>
+                <a:latin typeface="Heebo"/>
               </a:rPr>
-              <a:t>💬</a:t>
+              <a:t>PROMPT</a:t>
             </a:r>
           </a:p>
         </p:txBody>
@@ -6948,8 +7756,8 @@
         </p:nvSpPr>
         <p:spPr>
           <a:xfrm>
-            <a:off x="1066647" y="3108960"/>
-            <a:ext cx="2103120" cy="457200"/>
+            <a:off x="883767" y="3383280"/>
+            <a:ext cx="1920240" cy="914400"/>
           </a:xfrm>
           <a:prstGeom prst="rect">
             <a:avLst/>
@@ -6957,49 +7765,18 @@
           <a:noFill/>
         </p:spPr>
         <p:txBody>
-          <a:bodyPr wrap="square"/>
-          <a:lstStyle/>
-          <a:p>
-            <a:pPr algn="ctr"/>
-            <a:r>
-              <a:rPr sz="1600" b="1">
-                <a:solidFill>
-                  <a:srgbClr val="DCDAD5"/>
-                </a:solidFill>
-                <a:latin typeface="Consolas"/>
-              </a:rPr>
-              <a:t>PROMPT</a:t>
-            </a:r>
-          </a:p>
-        </p:txBody>
-      </p:sp>
-      <p:sp>
-        <p:nvSpPr>
-          <p:cNvPr id="7" name="TextBox 6"/>
-          <p:cNvSpPr txBox="1"/>
-          <p:nvPr/>
-        </p:nvSpPr>
-        <p:spPr>
-          <a:xfrm>
-            <a:off x="1066647" y="3657600"/>
-            <a:ext cx="2103120" cy="731520"/>
-          </a:xfrm>
-          <a:prstGeom prst="rect">
-            <a:avLst/>
-          </a:prstGeom>
-          <a:noFill/>
-        </p:spPr>
-        <p:txBody>
-          <a:bodyPr wrap="square"/>
-          <a:lstStyle/>
-          <a:p>
-            <a:pPr algn="ctr"/>
-            <a:r>
-              <a:rPr sz="1300" b="0">
+          <a:bodyPr wrap="square">
+            <a:spAutoFit/>
+          </a:bodyPr>
+          <a:lstStyle/>
+          <a:p>
+            <a:pPr algn="ctr" rtl="1"/>
+            <a:r>
+              <a:rPr sz="1400" b="0">
                 <a:solidFill>
                   <a:srgbClr val="A09D96"/>
                 </a:solidFill>
-                <a:latin typeface="Arial"/>
+                <a:latin typeface="Heebo"/>
               </a:rPr>
               <a:t>תאר מה אתה רוצה</a:t>
             </a:r>
@@ -7008,58 +7785,23 @@
       </p:sp>
       <p:sp>
         <p:nvSpPr>
-          <p:cNvPr id="8" name="TextBox 7"/>
-          <p:cNvSpPr txBox="1"/>
-          <p:nvPr/>
-        </p:nvSpPr>
-        <p:spPr>
-          <a:xfrm>
-            <a:off x="3169767" y="2926080"/>
-            <a:ext cx="548640" cy="548640"/>
-          </a:xfrm>
-          <a:prstGeom prst="rect">
-            <a:avLst/>
-          </a:prstGeom>
-          <a:noFill/>
-        </p:spPr>
-        <p:txBody>
-          <a:bodyPr wrap="square"/>
-          <a:lstStyle/>
-          <a:p>
-            <a:pPr algn="ctr"/>
-            <a:r>
-              <a:rPr sz="2800" b="1">
-                <a:solidFill>
-                  <a:srgbClr val="22C55E"/>
-                </a:solidFill>
-                <a:latin typeface="Arial"/>
-              </a:rPr>
-              <a:t>→</a:t>
-            </a:r>
-          </a:p>
-        </p:txBody>
-      </p:sp>
-      <p:sp>
-        <p:nvSpPr>
-          <p:cNvPr id="9" name="Rounded Rectangle 8"/>
+          <p:cNvPr id="7" name="Right Arrow 6"/>
           <p:cNvSpPr/>
           <p:nvPr/>
         </p:nvSpPr>
         <p:spPr>
           <a:xfrm>
-            <a:off x="3718407" y="2011680"/>
-            <a:ext cx="2103120" cy="2560320"/>
-          </a:xfrm>
-          <a:prstGeom prst="roundRect">
+            <a:off x="3032607" y="3291840"/>
+            <a:ext cx="457200" cy="320040"/>
+          </a:xfrm>
+          <a:prstGeom prst="rightArrow">
             <a:avLst/>
           </a:prstGeom>
           <a:solidFill>
-            <a:srgbClr val="14171F"/>
+            <a:srgbClr val="22C55E"/>
           </a:solidFill>
-          <a:ln w="12700">
-            <a:solidFill>
-              <a:srgbClr val="1A803E"/>
-            </a:solidFill>
+          <a:ln>
+            <a:noFill/>
           </a:ln>
         </p:spPr>
         <p:style>
@@ -7086,156 +7828,26 @@
       </p:sp>
       <p:sp>
         <p:nvSpPr>
-          <p:cNvPr id="10" name="TextBox 9"/>
-          <p:cNvSpPr txBox="1"/>
-          <p:nvPr/>
-        </p:nvSpPr>
-        <p:spPr>
-          <a:xfrm>
-            <a:off x="3718407" y="2286000"/>
-            <a:ext cx="2103120" cy="731520"/>
-          </a:xfrm>
-          <a:prstGeom prst="rect">
-            <a:avLst/>
-          </a:prstGeom>
-          <a:noFill/>
-        </p:spPr>
-        <p:txBody>
-          <a:bodyPr wrap="square"/>
-          <a:lstStyle/>
-          <a:p>
-            <a:pPr algn="ctr"/>
-            <a:r>
-              <a:rPr sz="3600" b="0">
-                <a:solidFill>
-                  <a:srgbClr val="22C55E"/>
-                </a:solidFill>
-                <a:latin typeface="Arial"/>
-              </a:rPr>
-              <a:t>🤖</a:t>
-            </a:r>
-          </a:p>
-        </p:txBody>
-      </p:sp>
-      <p:sp>
-        <p:nvSpPr>
-          <p:cNvPr id="11" name="TextBox 10"/>
-          <p:cNvSpPr txBox="1"/>
-          <p:nvPr/>
-        </p:nvSpPr>
-        <p:spPr>
-          <a:xfrm>
-            <a:off x="3718407" y="3108960"/>
-            <a:ext cx="2103120" cy="457200"/>
-          </a:xfrm>
-          <a:prstGeom prst="rect">
-            <a:avLst/>
-          </a:prstGeom>
-          <a:noFill/>
-        </p:spPr>
-        <p:txBody>
-          <a:bodyPr wrap="square"/>
-          <a:lstStyle/>
-          <a:p>
-            <a:pPr algn="ctr"/>
-            <a:r>
-              <a:rPr sz="1600" b="1">
-                <a:solidFill>
-                  <a:srgbClr val="DCDAD5"/>
-                </a:solidFill>
-                <a:latin typeface="Consolas"/>
-              </a:rPr>
-              <a:t>AI AGENT</a:t>
-            </a:r>
-          </a:p>
-        </p:txBody>
-      </p:sp>
-      <p:sp>
-        <p:nvSpPr>
-          <p:cNvPr id="12" name="TextBox 11"/>
-          <p:cNvSpPr txBox="1"/>
-          <p:nvPr/>
-        </p:nvSpPr>
-        <p:spPr>
-          <a:xfrm>
-            <a:off x="3718407" y="3657600"/>
-            <a:ext cx="2103120" cy="731520"/>
-          </a:xfrm>
-          <a:prstGeom prst="rect">
-            <a:avLst/>
-          </a:prstGeom>
-          <a:noFill/>
-        </p:spPr>
-        <p:txBody>
-          <a:bodyPr wrap="square"/>
-          <a:lstStyle/>
-          <a:p>
-            <a:pPr algn="ctr"/>
-            <a:r>
-              <a:rPr sz="1300" b="0">
-                <a:solidFill>
-                  <a:srgbClr val="A09D96"/>
-                </a:solidFill>
-                <a:latin typeface="Arial"/>
-              </a:rPr>
-              <a:t>Claude Code מנתח ומתכנן</a:t>
-            </a:r>
-          </a:p>
-        </p:txBody>
-      </p:sp>
-      <p:sp>
-        <p:nvSpPr>
-          <p:cNvPr id="13" name="TextBox 12"/>
-          <p:cNvSpPr txBox="1"/>
-          <p:nvPr/>
-        </p:nvSpPr>
-        <p:spPr>
-          <a:xfrm>
-            <a:off x="5821527" y="2926080"/>
-            <a:ext cx="548640" cy="548640"/>
-          </a:xfrm>
-          <a:prstGeom prst="rect">
-            <a:avLst/>
-          </a:prstGeom>
-          <a:noFill/>
-        </p:spPr>
-        <p:txBody>
-          <a:bodyPr wrap="square"/>
-          <a:lstStyle/>
-          <a:p>
-            <a:pPr algn="ctr"/>
-            <a:r>
-              <a:rPr sz="2800" b="1">
-                <a:solidFill>
-                  <a:srgbClr val="22C55E"/>
-                </a:solidFill>
-                <a:latin typeface="Arial"/>
-              </a:rPr>
-              <a:t>→</a:t>
-            </a:r>
-          </a:p>
-        </p:txBody>
-      </p:sp>
-      <p:sp>
-        <p:nvSpPr>
-          <p:cNvPr id="14" name="Rounded Rectangle 13"/>
+          <p:cNvPr id="8" name="Rounded Rectangle 7"/>
           <p:cNvSpPr/>
           <p:nvPr/>
         </p:nvSpPr>
         <p:spPr>
           <a:xfrm>
-            <a:off x="6370167" y="2011680"/>
-            <a:ext cx="2103120" cy="2560320"/>
+            <a:off x="3535527" y="2194560"/>
+            <a:ext cx="2286000" cy="2560320"/>
           </a:xfrm>
           <a:prstGeom prst="roundRect">
-            <a:avLst/>
+            <a:avLst>
+              <a:gd name="adj" fmla="val 5000"/>
+            </a:avLst>
           </a:prstGeom>
           <a:solidFill>
-            <a:srgbClr val="14171F"/>
+            <a:srgbClr val="252525"/>
           </a:solidFill>
           <a:ln w="12700">
             <a:solidFill>
-              <a:srgbClr val="1A803E"/>
+              <a:srgbClr val="22C55E"/>
             </a:solidFill>
           </a:ln>
         </p:spPr>
@@ -7263,14 +7875,14 @@
       </p:sp>
       <p:sp>
         <p:nvSpPr>
-          <p:cNvPr id="15" name="TextBox 14"/>
+          <p:cNvPr id="9" name="TextBox 8"/>
           <p:cNvSpPr txBox="1"/>
           <p:nvPr/>
         </p:nvSpPr>
         <p:spPr>
           <a:xfrm>
-            <a:off x="6370167" y="2286000"/>
-            <a:ext cx="2103120" cy="731520"/>
+            <a:off x="3535527" y="2743200"/>
+            <a:ext cx="2286000" cy="457200"/>
           </a:xfrm>
           <a:prstGeom prst="rect">
             <a:avLst/>
@@ -7278,32 +7890,34 @@
           <a:noFill/>
         </p:spPr>
         <p:txBody>
-          <a:bodyPr wrap="square"/>
-          <a:lstStyle/>
-          <a:p>
-            <a:pPr algn="ctr"/>
-            <a:r>
-              <a:rPr sz="3600" b="0">
+          <a:bodyPr wrap="square">
+            <a:spAutoFit/>
+          </a:bodyPr>
+          <a:lstStyle/>
+          <a:p>
+            <a:pPr algn="ctr" rtl="0"/>
+            <a:r>
+              <a:rPr sz="2000" b="1">
                 <a:solidFill>
                   <a:srgbClr val="22C55E"/>
                 </a:solidFill>
-                <a:latin typeface="Arial"/>
+                <a:latin typeface="Heebo"/>
               </a:rPr>
-              <a:t>&lt; &gt;</a:t>
-            </a:r>
-          </a:p>
-        </p:txBody>
-      </p:sp>
-      <p:sp>
-        <p:nvSpPr>
-          <p:cNvPr id="16" name="TextBox 15"/>
+              <a:t>AI AGENT</a:t>
+            </a:r>
+          </a:p>
+        </p:txBody>
+      </p:sp>
+      <p:sp>
+        <p:nvSpPr>
+          <p:cNvPr id="10" name="TextBox 9"/>
           <p:cNvSpPr txBox="1"/>
           <p:nvPr/>
         </p:nvSpPr>
         <p:spPr>
           <a:xfrm>
-            <a:off x="6370167" y="3108960"/>
-            <a:ext cx="2103120" cy="457200"/>
+            <a:off x="3718407" y="3383280"/>
+            <a:ext cx="1920240" cy="914400"/>
           </a:xfrm>
           <a:prstGeom prst="rect">
             <a:avLst/>
@@ -7311,109 +7925,43 @@
           <a:noFill/>
         </p:spPr>
         <p:txBody>
-          <a:bodyPr wrap="square"/>
-          <a:lstStyle/>
-          <a:p>
-            <a:pPr algn="ctr"/>
-            <a:r>
-              <a:rPr sz="1600" b="1">
-                <a:solidFill>
-                  <a:srgbClr val="DCDAD5"/>
-                </a:solidFill>
-                <a:latin typeface="Consolas"/>
+          <a:bodyPr wrap="square">
+            <a:spAutoFit/>
+          </a:bodyPr>
+          <a:lstStyle/>
+          <a:p>
+            <a:pPr algn="ctr" rtl="1"/>
+            <a:r>
+              <a:rPr sz="1400" b="0">
+                <a:solidFill>
+                  <a:srgbClr val="A09D96"/>
+                </a:solidFill>
+                <a:latin typeface="Heebo"/>
               </a:rPr>
-              <a:t>CODE</a:t>
-            </a:r>
-          </a:p>
-        </p:txBody>
-      </p:sp>
-      <p:sp>
-        <p:nvSpPr>
-          <p:cNvPr id="17" name="TextBox 16"/>
-          <p:cNvSpPr txBox="1"/>
-          <p:nvPr/>
-        </p:nvSpPr>
-        <p:spPr>
-          <a:xfrm>
-            <a:off x="6370167" y="3657600"/>
-            <a:ext cx="2103120" cy="731520"/>
-          </a:xfrm>
-          <a:prstGeom prst="rect">
-            <a:avLst/>
-          </a:prstGeom>
-          <a:noFill/>
-        </p:spPr>
-        <p:txBody>
-          <a:bodyPr wrap="square"/>
-          <a:lstStyle/>
-          <a:p>
-            <a:pPr algn="ctr"/>
-            <a:r>
-              <a:rPr sz="1300" b="0">
-                <a:solidFill>
-                  <a:srgbClr val="A09D96"/>
-                </a:solidFill>
-                <a:latin typeface="Arial"/>
-              </a:rPr>
-              <a:t>קומפוננטות React + Remotion</a:t>
-            </a:r>
-          </a:p>
-        </p:txBody>
-      </p:sp>
-      <p:sp>
-        <p:nvSpPr>
-          <p:cNvPr id="18" name="TextBox 17"/>
-          <p:cNvSpPr txBox="1"/>
-          <p:nvPr/>
-        </p:nvSpPr>
-        <p:spPr>
-          <a:xfrm>
-            <a:off x="8473287" y="2926080"/>
-            <a:ext cx="548640" cy="548640"/>
-          </a:xfrm>
-          <a:prstGeom prst="rect">
-            <a:avLst/>
-          </a:prstGeom>
-          <a:noFill/>
-        </p:spPr>
-        <p:txBody>
-          <a:bodyPr wrap="square"/>
-          <a:lstStyle/>
-          <a:p>
-            <a:pPr algn="ctr"/>
-            <a:r>
-              <a:rPr sz="2800" b="1">
-                <a:solidFill>
-                  <a:srgbClr val="22C55E"/>
-                </a:solidFill>
-                <a:latin typeface="Arial"/>
-              </a:rPr>
-              <a:t>→</a:t>
-            </a:r>
-          </a:p>
-        </p:txBody>
-      </p:sp>
-      <p:sp>
-        <p:nvSpPr>
-          <p:cNvPr id="19" name="Rounded Rectangle 18"/>
+              <a:t>Claude Code מנתח ומתכנן</a:t>
+            </a:r>
+          </a:p>
+        </p:txBody>
+      </p:sp>
+      <p:sp>
+        <p:nvSpPr>
+          <p:cNvPr id="11" name="Right Arrow 10"/>
           <p:cNvSpPr/>
           <p:nvPr/>
         </p:nvSpPr>
         <p:spPr>
           <a:xfrm>
-            <a:off x="9021927" y="2011680"/>
-            <a:ext cx="2103120" cy="2560320"/>
-          </a:xfrm>
-          <a:prstGeom prst="roundRect">
+            <a:off x="5867247" y="3291840"/>
+            <a:ext cx="457200" cy="320040"/>
+          </a:xfrm>
+          <a:prstGeom prst="rightArrow">
             <a:avLst/>
           </a:prstGeom>
           <a:solidFill>
-            <a:srgbClr val="14171F"/>
+            <a:srgbClr val="22C55E"/>
           </a:solidFill>
-          <a:ln w="12700">
-            <a:solidFill>
-              <a:srgbClr val="1A803E"/>
-            </a:solidFill>
+          <a:ln>
+            <a:noFill/>
           </a:ln>
         </p:spPr>
         <p:style>
@@ -7440,14 +7988,61 @@
       </p:sp>
       <p:sp>
         <p:nvSpPr>
-          <p:cNvPr id="20" name="TextBox 19"/>
+          <p:cNvPr id="12" name="Rounded Rectangle 11"/>
+          <p:cNvSpPr/>
+          <p:nvPr/>
+        </p:nvSpPr>
+        <p:spPr>
+          <a:xfrm>
+            <a:off x="6370167" y="2194560"/>
+            <a:ext cx="2286000" cy="2560320"/>
+          </a:xfrm>
+          <a:prstGeom prst="roundRect">
+            <a:avLst>
+              <a:gd name="adj" fmla="val 5000"/>
+            </a:avLst>
+          </a:prstGeom>
+          <a:solidFill>
+            <a:srgbClr val="252525"/>
+          </a:solidFill>
+          <a:ln w="12700">
+            <a:solidFill>
+              <a:srgbClr val="22C55E"/>
+            </a:solidFill>
+          </a:ln>
+        </p:spPr>
+        <p:style>
+          <a:lnRef idx="1">
+            <a:schemeClr val="accent1"/>
+          </a:lnRef>
+          <a:fillRef idx="3">
+            <a:schemeClr val="accent1"/>
+          </a:fillRef>
+          <a:effectRef idx="2">
+            <a:schemeClr val="accent1"/>
+          </a:effectRef>
+          <a:fontRef idx="minor">
+            <a:schemeClr val="lt1"/>
+          </a:fontRef>
+        </p:style>
+        <p:txBody>
+          <a:bodyPr rtlCol="0" anchor="ctr"/>
+          <a:lstStyle/>
+          <a:p>
+            <a:pPr algn="ctr"/>
+          </a:p>
+        </p:txBody>
+      </p:sp>
+      <p:sp>
+        <p:nvSpPr>
+          <p:cNvPr id="13" name="TextBox 12"/>
           <p:cNvSpPr txBox="1"/>
           <p:nvPr/>
         </p:nvSpPr>
         <p:spPr>
           <a:xfrm>
-            <a:off x="9021927" y="2286000"/>
-            <a:ext cx="2103120" cy="731520"/>
+            <a:off x="6370167" y="2743200"/>
+            <a:ext cx="2286000" cy="457200"/>
           </a:xfrm>
           <a:prstGeom prst="rect">
             <a:avLst/>
@@ -7455,49 +8050,178 @@
           <a:noFill/>
         </p:spPr>
         <p:txBody>
-          <a:bodyPr wrap="square"/>
+          <a:bodyPr wrap="square">
+            <a:spAutoFit/>
+          </a:bodyPr>
+          <a:lstStyle/>
+          <a:p>
+            <a:pPr algn="ctr" rtl="0"/>
+            <a:r>
+              <a:rPr sz="2000" b="1">
+                <a:solidFill>
+                  <a:srgbClr val="22C55E"/>
+                </a:solidFill>
+                <a:latin typeface="Heebo"/>
+              </a:rPr>
+              <a:t>CODE</a:t>
+            </a:r>
+          </a:p>
+        </p:txBody>
+      </p:sp>
+      <p:sp>
+        <p:nvSpPr>
+          <p:cNvPr id="14" name="TextBox 13"/>
+          <p:cNvSpPr txBox="1"/>
+          <p:nvPr/>
+        </p:nvSpPr>
+        <p:spPr>
+          <a:xfrm>
+            <a:off x="6553047" y="3383280"/>
+            <a:ext cx="1920240" cy="914400"/>
+          </a:xfrm>
+          <a:prstGeom prst="rect">
+            <a:avLst/>
+          </a:prstGeom>
+          <a:noFill/>
+        </p:spPr>
+        <p:txBody>
+          <a:bodyPr wrap="square">
+            <a:spAutoFit/>
+          </a:bodyPr>
+          <a:lstStyle/>
+          <a:p>
+            <a:pPr algn="ctr" rtl="1"/>
+            <a:r>
+              <a:rPr sz="1400" b="0">
+                <a:solidFill>
+                  <a:srgbClr val="A09D96"/>
+                </a:solidFill>
+                <a:latin typeface="Heebo"/>
+              </a:rPr>
+              <a:t>קומפוננטות React + Remotion</a:t>
+            </a:r>
+          </a:p>
+        </p:txBody>
+      </p:sp>
+      <p:sp>
+        <p:nvSpPr>
+          <p:cNvPr id="15" name="Right Arrow 14"/>
+          <p:cNvSpPr/>
+          <p:nvPr/>
+        </p:nvSpPr>
+        <p:spPr>
+          <a:xfrm>
+            <a:off x="8701887" y="3291840"/>
+            <a:ext cx="457200" cy="320040"/>
+          </a:xfrm>
+          <a:prstGeom prst="rightArrow">
+            <a:avLst/>
+          </a:prstGeom>
+          <a:solidFill>
+            <a:srgbClr val="22C55E"/>
+          </a:solidFill>
+          <a:ln>
+            <a:noFill/>
+          </a:ln>
+        </p:spPr>
+        <p:style>
+          <a:lnRef idx="1">
+            <a:schemeClr val="accent1"/>
+          </a:lnRef>
+          <a:fillRef idx="3">
+            <a:schemeClr val="accent1"/>
+          </a:fillRef>
+          <a:effectRef idx="2">
+            <a:schemeClr val="accent1"/>
+          </a:effectRef>
+          <a:fontRef idx="minor">
+            <a:schemeClr val="lt1"/>
+          </a:fontRef>
+        </p:style>
+        <p:txBody>
+          <a:bodyPr rtlCol="0" anchor="ctr"/>
           <a:lstStyle/>
           <a:p>
             <a:pPr algn="ctr"/>
-            <a:r>
-              <a:rPr sz="3600" b="0">
+          </a:p>
+        </p:txBody>
+      </p:sp>
+      <p:sp>
+        <p:nvSpPr>
+          <p:cNvPr id="16" name="Rounded Rectangle 15"/>
+          <p:cNvSpPr/>
+          <p:nvPr/>
+        </p:nvSpPr>
+        <p:spPr>
+          <a:xfrm>
+            <a:off x="9204807" y="2194560"/>
+            <a:ext cx="2286000" cy="2560320"/>
+          </a:xfrm>
+          <a:prstGeom prst="roundRect">
+            <a:avLst>
+              <a:gd name="adj" fmla="val 5000"/>
+            </a:avLst>
+          </a:prstGeom>
+          <a:solidFill>
+            <a:srgbClr val="252525"/>
+          </a:solidFill>
+          <a:ln w="12700">
+            <a:solidFill>
+              <a:srgbClr val="22C55E"/>
+            </a:solidFill>
+          </a:ln>
+        </p:spPr>
+        <p:style>
+          <a:lnRef idx="1">
+            <a:schemeClr val="accent1"/>
+          </a:lnRef>
+          <a:fillRef idx="3">
+            <a:schemeClr val="accent1"/>
+          </a:fillRef>
+          <a:effectRef idx="2">
+            <a:schemeClr val="accent1"/>
+          </a:effectRef>
+          <a:fontRef idx="minor">
+            <a:schemeClr val="lt1"/>
+          </a:fontRef>
+        </p:style>
+        <p:txBody>
+          <a:bodyPr rtlCol="0" anchor="ctr"/>
+          <a:lstStyle/>
+          <a:p>
+            <a:pPr algn="ctr"/>
+          </a:p>
+        </p:txBody>
+      </p:sp>
+      <p:sp>
+        <p:nvSpPr>
+          <p:cNvPr id="17" name="TextBox 16"/>
+          <p:cNvSpPr txBox="1"/>
+          <p:nvPr/>
+        </p:nvSpPr>
+        <p:spPr>
+          <a:xfrm>
+            <a:off x="9204807" y="2743200"/>
+            <a:ext cx="2286000" cy="457200"/>
+          </a:xfrm>
+          <a:prstGeom prst="rect">
+            <a:avLst/>
+          </a:prstGeom>
+          <a:noFill/>
+        </p:spPr>
+        <p:txBody>
+          <a:bodyPr wrap="square">
+            <a:spAutoFit/>
+          </a:bodyPr>
+          <a:lstStyle/>
+          <a:p>
+            <a:pPr algn="ctr" rtl="0"/>
+            <a:r>
+              <a:rPr sz="2000" b="1">
                 <a:solidFill>
                   <a:srgbClr val="22C55E"/>
                 </a:solidFill>
-                <a:latin typeface="Arial"/>
-              </a:rPr>
-              <a:t>▶</a:t>
-            </a:r>
-          </a:p>
-        </p:txBody>
-      </p:sp>
-      <p:sp>
-        <p:nvSpPr>
-          <p:cNvPr id="21" name="TextBox 20"/>
-          <p:cNvSpPr txBox="1"/>
-          <p:nvPr/>
-        </p:nvSpPr>
-        <p:spPr>
-          <a:xfrm>
-            <a:off x="9021927" y="3108960"/>
-            <a:ext cx="2103120" cy="457200"/>
-          </a:xfrm>
-          <a:prstGeom prst="rect">
-            <a:avLst/>
-          </a:prstGeom>
-          <a:noFill/>
-        </p:spPr>
-        <p:txBody>
-          <a:bodyPr wrap="square"/>
-          <a:lstStyle/>
-          <a:p>
-            <a:pPr algn="ctr"/>
-            <a:r>
-              <a:rPr sz="1600" b="1">
-                <a:solidFill>
-                  <a:srgbClr val="DCDAD5"/>
-                </a:solidFill>
-                <a:latin typeface="Consolas"/>
+                <a:latin typeface="Heebo"/>
               </a:rPr>
               <a:t>VIDEO</a:t>
             </a:r>
@@ -7506,14 +8230,14 @@
       </p:sp>
       <p:sp>
         <p:nvSpPr>
-          <p:cNvPr id="22" name="TextBox 21"/>
+          <p:cNvPr id="18" name="TextBox 17"/>
           <p:cNvSpPr txBox="1"/>
           <p:nvPr/>
         </p:nvSpPr>
         <p:spPr>
           <a:xfrm>
-            <a:off x="9021927" y="3657600"/>
-            <a:ext cx="2103120" cy="731520"/>
+            <a:off x="9387687" y="3383280"/>
+            <a:ext cx="1920240" cy="914400"/>
           </a:xfrm>
           <a:prstGeom prst="rect">
             <a:avLst/>
@@ -7521,16 +8245,18 @@
           <a:noFill/>
         </p:spPr>
         <p:txBody>
-          <a:bodyPr wrap="square"/>
-          <a:lstStyle/>
-          <a:p>
-            <a:pPr algn="ctr"/>
-            <a:r>
-              <a:rPr sz="1300" b="0">
+          <a:bodyPr wrap="square">
+            <a:spAutoFit/>
+          </a:bodyPr>
+          <a:lstStyle/>
+          <a:p>
+            <a:pPr algn="ctr" rtl="1"/>
+            <a:r>
+              <a:rPr sz="1400" b="0">
                 <a:solidFill>
                   <a:srgbClr val="A09D96"/>
                 </a:solidFill>
-                <a:latin typeface="Arial"/>
+                <a:latin typeface="Heebo"/>
               </a:rPr>
               <a:t>MP4 מוכן לפרסום</a:t>
             </a:r>
@@ -7539,14 +8265,14 @@
       </p:sp>
       <p:sp>
         <p:nvSpPr>
-          <p:cNvPr id="23" name="TextBox 22"/>
+          <p:cNvPr id="19" name="TextBox 18"/>
           <p:cNvSpPr txBox="1"/>
           <p:nvPr/>
         </p:nvSpPr>
         <p:spPr>
           <a:xfrm>
-            <a:off x="1371600" y="5029200"/>
-            <a:ext cx="9418320" cy="731520"/>
+            <a:off x="914400" y="5303520"/>
+            <a:ext cx="10332720" cy="548640"/>
           </a:xfrm>
           <a:prstGeom prst="rect">
             <a:avLst/>
@@ -7554,16 +8280,18 @@
           <a:noFill/>
         </p:spPr>
         <p:txBody>
-          <a:bodyPr wrap="square"/>
-          <a:lstStyle/>
-          <a:p>
-            <a:pPr algn="ctr"/>
-            <a:r>
-              <a:rPr sz="1600" b="0">
+          <a:bodyPr wrap="square">
+            <a:spAutoFit/>
+          </a:bodyPr>
+          <a:lstStyle/>
+          <a:p>
+            <a:pPr algn="ctr" rtl="1"/>
+            <a:r>
+              <a:rPr sz="1500" b="0">
                 <a:solidFill>
                   <a:srgbClr val="A09D96"/>
                 </a:solidFill>
-                <a:latin typeface="Arial"/>
+                <a:latin typeface="Heebo"/>
               </a:rPr>
               <a:t>כל הצינור הזה רץ אוטומטית — אתה רק מתאר את הוידאו שאתה רוצה</a:t>
             </a:r>
@@ -7604,8 +8332,8 @@
         </p:nvSpPr>
         <p:spPr>
           <a:xfrm>
-            <a:off x="457200" y="274320"/>
-            <a:ext cx="11247120" cy="457200"/>
+            <a:off x="0" y="548640"/>
+            <a:ext cx="12191695" cy="457200"/>
           </a:xfrm>
           <a:prstGeom prst="rect">
             <a:avLst/>
@@ -7613,16 +8341,18 @@
           <a:noFill/>
         </p:spPr>
         <p:txBody>
-          <a:bodyPr wrap="square"/>
-          <a:lstStyle/>
-          <a:p>
-            <a:pPr algn="ctr"/>
-            <a:r>
-              <a:rPr sz="1200" b="1">
+          <a:bodyPr wrap="square">
+            <a:spAutoFit/>
+          </a:bodyPr>
+          <a:lstStyle/>
+          <a:p>
+            <a:pPr algn="ctr" rtl="0"/>
+            <a:r>
+              <a:rPr sz="1400" b="1">
                 <a:solidFill>
                   <a:srgbClr val="22C55E"/>
                 </a:solidFill>
-                <a:latin typeface="Arial"/>
+                <a:latin typeface="Heebo"/>
               </a:rPr>
               <a:t>מה זה Claude Code</a:t>
             </a:r>
@@ -7637,8 +8367,8 @@
         </p:nvSpPr>
         <p:spPr>
           <a:xfrm>
-            <a:off x="457200" y="640080"/>
-            <a:ext cx="11247120" cy="914400"/>
+            <a:off x="0" y="1005840"/>
+            <a:ext cx="12191695" cy="640080"/>
           </a:xfrm>
           <a:prstGeom prst="rect">
             <a:avLst/>
@@ -7646,16 +8376,18 @@
           <a:noFill/>
         </p:spPr>
         <p:txBody>
-          <a:bodyPr wrap="square"/>
-          <a:lstStyle/>
-          <a:p>
-            <a:pPr algn="ctr"/>
-            <a:r>
-              <a:rPr sz="2800" b="1">
+          <a:bodyPr wrap="square">
+            <a:spAutoFit/>
+          </a:bodyPr>
+          <a:lstStyle/>
+          <a:p>
+            <a:pPr algn="ctr" rtl="1"/>
+            <a:r>
+              <a:rPr sz="3000" b="1">
                 <a:solidFill>
                   <a:srgbClr val="DCDAD5"/>
                 </a:solidFill>
-                <a:latin typeface="Arial"/>
+                <a:latin typeface="Heebo"/>
               </a:rPr>
               <a:t>סוכן AI שכותב, מריץ ומרנדר קוד</a:t>
             </a:r>
@@ -7664,24 +8396,26 @@
       </p:sp>
       <p:sp>
         <p:nvSpPr>
-          <p:cNvPr id="4" name="Rectangle 3"/>
+          <p:cNvPr id="4" name="Rounded Rectangle 3"/>
           <p:cNvSpPr/>
           <p:nvPr/>
         </p:nvSpPr>
         <p:spPr>
           <a:xfrm>
-            <a:off x="457200" y="1371600"/>
-            <a:ext cx="6858000" cy="5029200"/>
-          </a:xfrm>
-          <a:prstGeom prst="rect">
-            <a:avLst/>
+            <a:off x="457200" y="2011680"/>
+            <a:ext cx="6400800" cy="4389120"/>
+          </a:xfrm>
+          <a:prstGeom prst="roundRect">
+            <a:avLst>
+              <a:gd name="adj" fmla="val 5000"/>
+            </a:avLst>
           </a:prstGeom>
           <a:solidFill>
-            <a:srgbClr val="0A0E14"/>
+            <a:srgbClr val="1E1E1E"/>
           </a:solidFill>
           <a:ln w="12700">
             <a:solidFill>
-              <a:srgbClr val="303030"/>
+              <a:srgbClr val="333333"/>
             </a:solidFill>
           </a:ln>
         </p:spPr>
@@ -7709,57 +8443,14 @@
       </p:sp>
       <p:sp>
         <p:nvSpPr>
-          <p:cNvPr id="5" name="Rectangle 4"/>
+          <p:cNvPr id="5" name="Oval 4"/>
           <p:cNvSpPr/>
           <p:nvPr/>
         </p:nvSpPr>
         <p:spPr>
           <a:xfrm>
-            <a:off x="457200" y="1371600"/>
-            <a:ext cx="6858000" cy="411480"/>
-          </a:xfrm>
-          <a:prstGeom prst="rect">
-            <a:avLst/>
-          </a:prstGeom>
-          <a:solidFill>
-            <a:srgbClr val="1E1E1E"/>
-          </a:solidFill>
-          <a:ln>
-            <a:noFill/>
-          </a:ln>
-        </p:spPr>
-        <p:style>
-          <a:lnRef idx="1">
-            <a:schemeClr val="accent1"/>
-          </a:lnRef>
-          <a:fillRef idx="3">
-            <a:schemeClr val="accent1"/>
-          </a:fillRef>
-          <a:effectRef idx="2">
-            <a:schemeClr val="accent1"/>
-          </a:effectRef>
-          <a:fontRef idx="minor">
-            <a:schemeClr val="lt1"/>
-          </a:fontRef>
-        </p:style>
-        <p:txBody>
-          <a:bodyPr rtlCol="0" anchor="ctr"/>
-          <a:lstStyle/>
-          <a:p>
-            <a:pPr algn="ctr"/>
-          </a:p>
-        </p:txBody>
-      </p:sp>
-      <p:sp>
-        <p:nvSpPr>
-          <p:cNvPr id="6" name="Oval 5"/>
-          <p:cNvSpPr/>
-          <p:nvPr/>
-        </p:nvSpPr>
-        <p:spPr>
-          <a:xfrm>
-            <a:off x="640080" y="1463040"/>
-            <a:ext cx="118872" cy="118872"/>
+            <a:off x="594360" y="2103120"/>
+            <a:ext cx="137160" cy="137160"/>
           </a:xfrm>
           <a:prstGeom prst="ellipse">
             <a:avLst/>
@@ -7795,14 +8486,14 @@
       </p:sp>
       <p:sp>
         <p:nvSpPr>
-          <p:cNvPr id="7" name="Oval 6"/>
+          <p:cNvPr id="6" name="Oval 5"/>
           <p:cNvSpPr/>
           <p:nvPr/>
         </p:nvSpPr>
         <p:spPr>
           <a:xfrm>
-            <a:off x="868680" y="1463040"/>
-            <a:ext cx="118872" cy="118872"/>
+            <a:off x="850392" y="2103120"/>
+            <a:ext cx="137160" cy="137160"/>
           </a:xfrm>
           <a:prstGeom prst="ellipse">
             <a:avLst/>
@@ -7838,14 +8529,14 @@
       </p:sp>
       <p:sp>
         <p:nvSpPr>
-          <p:cNvPr id="8" name="Oval 7"/>
+          <p:cNvPr id="7" name="Oval 6"/>
           <p:cNvSpPr/>
           <p:nvPr/>
         </p:nvSpPr>
         <p:spPr>
           <a:xfrm>
-            <a:off x="1097280" y="1463040"/>
-            <a:ext cx="118872" cy="118872"/>
+            <a:off x="1106424" y="2103120"/>
+            <a:ext cx="137160" cy="137160"/>
           </a:xfrm>
           <a:prstGeom prst="ellipse">
             <a:avLst/>
@@ -7881,14 +8572,14 @@
       </p:sp>
       <p:sp>
         <p:nvSpPr>
-          <p:cNvPr id="9" name="TextBox 8"/>
+          <p:cNvPr id="8" name="TextBox 7"/>
           <p:cNvSpPr txBox="1"/>
           <p:nvPr/>
         </p:nvSpPr>
         <p:spPr>
           <a:xfrm>
-            <a:off x="1828800" y="1399032"/>
-            <a:ext cx="3657600" cy="320040"/>
+            <a:off x="1554480" y="2057400"/>
+            <a:ext cx="5029200" cy="274320"/>
           </a:xfrm>
           <a:prstGeom prst="rect">
             <a:avLst/>
@@ -7896,14 +8587,16 @@
           <a:noFill/>
         </p:spPr>
         <p:txBody>
-          <a:bodyPr wrap="square"/>
-          <a:lstStyle/>
-          <a:p>
-            <a:pPr algn="ctr"/>
-            <a:r>
-              <a:rPr sz="1000" b="0">
-                <a:solidFill>
-                  <a:srgbClr val="A09D96"/>
+          <a:bodyPr wrap="square">
+            <a:spAutoFit/>
+          </a:bodyPr>
+          <a:lstStyle/>
+          <a:p>
+            <a:pPr algn="l" rtl="0"/>
+            <a:r>
+              <a:rPr sz="900" b="0">
+                <a:solidFill>
+                  <a:srgbClr val="666666"/>
                 </a:solidFill>
                 <a:latin typeface="Consolas"/>
               </a:rPr>
@@ -7914,14 +8607,14 @@
       </p:sp>
       <p:sp>
         <p:nvSpPr>
-          <p:cNvPr id="10" name="TextBox 9"/>
+          <p:cNvPr id="9" name="TextBox 8"/>
           <p:cNvSpPr txBox="1"/>
           <p:nvPr/>
         </p:nvSpPr>
         <p:spPr>
           <a:xfrm>
-            <a:off x="731520" y="1920240"/>
-            <a:ext cx="6400800" cy="4114800"/>
+            <a:off x="640080" y="2331720"/>
+            <a:ext cx="6035040" cy="3977640"/>
           </a:xfrm>
           <a:prstGeom prst="rect">
             <a:avLst/>
@@ -7929,238 +8622,53 @@
           <a:noFill/>
         </p:spPr>
         <p:txBody>
-          <a:bodyPr wrap="square"/>
-          <a:lstStyle/>
-          <a:p>
-            <a:pPr algn="l">
-              <a:spcAft>
-                <a:spcPts val="200"/>
-              </a:spcAft>
-            </a:pPr>
-            <a:r>
-              <a:rPr sz="1200">
+          <a:bodyPr wrap="square">
+            <a:spAutoFit/>
+          </a:bodyPr>
+          <a:lstStyle/>
+          <a:p>
+            <a:pPr algn="l" rtl="0"/>
+            <a:r>
+              <a:rPr sz="1200" b="0">
                 <a:solidFill>
                   <a:srgbClr val="C5C1B9"/>
                 </a:solidFill>
                 <a:latin typeface="Consolas"/>
               </a:rPr>
-              <a:t>$ claude</a:t>
-            </a:r>
-          </a:p>
-          <a:p>
-            <a:pPr algn="l">
-              <a:spcAft>
-                <a:spcPts val="200"/>
-              </a:spcAft>
-            </a:pPr>
-            <a:r>
-              <a:rPr sz="1200">
-                <a:solidFill>
-                  <a:srgbClr val="C5C1B9"/>
-                </a:solidFill>
-                <a:latin typeface="Consolas"/>
-              </a:rPr>
-              <a:t/>
-            </a:r>
-          </a:p>
-          <a:p>
-            <a:pPr algn="l">
-              <a:spcAft>
-                <a:spcPts val="200"/>
-              </a:spcAft>
-            </a:pPr>
-            <a:r>
-              <a:rPr sz="1200">
-                <a:solidFill>
-                  <a:srgbClr val="C5C1B9"/>
-                </a:solidFill>
-                <a:latin typeface="Consolas"/>
-              </a:rPr>
-              <a:t>&gt; Create a Remotion video with animated title,</a:t>
-            </a:r>
-          </a:p>
-          <a:p>
-            <a:pPr algn="l">
-              <a:spcAft>
-                <a:spcPts val="200"/>
-              </a:spcAft>
-            </a:pPr>
-            <a:r>
-              <a:rPr sz="1200">
-                <a:solidFill>
-                  <a:srgbClr val="C5C1B9"/>
-                </a:solidFill>
-                <a:latin typeface="Consolas"/>
-              </a:rPr>
-              <a:t>  background music, and smooth transitions</a:t>
-            </a:r>
-          </a:p>
-          <a:p>
-            <a:pPr algn="l">
-              <a:spcAft>
-                <a:spcPts val="200"/>
-              </a:spcAft>
-            </a:pPr>
-            <a:r>
-              <a:rPr sz="1200">
-                <a:solidFill>
-                  <a:srgbClr val="C5C1B9"/>
-                </a:solidFill>
-                <a:latin typeface="Consolas"/>
-              </a:rPr>
-              <a:t/>
-            </a:r>
-          </a:p>
-          <a:p>
-            <a:pPr algn="l">
-              <a:spcAft>
-                <a:spcPts val="200"/>
-              </a:spcAft>
-            </a:pPr>
-            <a:r>
-              <a:rPr sz="1200">
-                <a:solidFill>
-                  <a:srgbClr val="C5C1B9"/>
-                </a:solidFill>
-                <a:latin typeface="Consolas"/>
-              </a:rPr>
-              <a:t>⠋ Analyzing project structure...</a:t>
-            </a:r>
-          </a:p>
-          <a:p>
-            <a:pPr algn="l">
-              <a:spcAft>
-                <a:spcPts val="200"/>
-              </a:spcAft>
-            </a:pPr>
-            <a:r>
-              <a:rPr sz="1200">
-                <a:solidFill>
-                  <a:srgbClr val="C5C1B9"/>
-                </a:solidFill>
-                <a:latin typeface="Consolas"/>
-              </a:rPr>
-              <a:t>✓ Created Root.tsx</a:t>
-            </a:r>
-          </a:p>
-          <a:p>
-            <a:pPr algn="l">
-              <a:spcAft>
-                <a:spcPts val="200"/>
-              </a:spcAft>
-            </a:pPr>
-            <a:r>
-              <a:rPr sz="1200">
-                <a:solidFill>
-                  <a:srgbClr val="C5C1B9"/>
-                </a:solidFill>
-                <a:latin typeface="Consolas"/>
-              </a:rPr>
-              <a:t>✓ Created Composition.tsx</a:t>
-            </a:r>
-          </a:p>
-          <a:p>
-            <a:pPr algn="l">
-              <a:spcAft>
-                <a:spcPts val="200"/>
-              </a:spcAft>
-            </a:pPr>
-            <a:r>
-              <a:rPr sz="1200">
-                <a:solidFill>
-                  <a:srgbClr val="C5C1B9"/>
-                </a:solidFill>
-                <a:latin typeface="Consolas"/>
-              </a:rPr>
-              <a:t>✓ Created AudioTrack.tsx</a:t>
-            </a:r>
-          </a:p>
-          <a:p>
-            <a:pPr algn="l">
-              <a:spcAft>
-                <a:spcPts val="200"/>
-              </a:spcAft>
-            </a:pPr>
-            <a:r>
-              <a:rPr sz="1200">
-                <a:solidFill>
-                  <a:srgbClr val="C5C1B9"/>
-                </a:solidFill>
-                <a:latin typeface="Consolas"/>
-              </a:rPr>
-              <a:t>✓ Installing dependencies...</a:t>
-            </a:r>
-          </a:p>
-          <a:p>
-            <a:pPr algn="l">
-              <a:spcAft>
-                <a:spcPts val="200"/>
-              </a:spcAft>
-            </a:pPr>
-            <a:r>
-              <a:rPr sz="1200">
-                <a:solidFill>
-                  <a:srgbClr val="C5C1B9"/>
-                </a:solidFill>
-                <a:latin typeface="Consolas"/>
-              </a:rPr>
-              <a:t>✓ npm install remotion @remotion/cli</a:t>
-            </a:r>
-          </a:p>
-          <a:p>
-            <a:pPr algn="l">
-              <a:spcAft>
-                <a:spcPts val="200"/>
-              </a:spcAft>
-            </a:pPr>
-            <a:r>
-              <a:rPr sz="1200">
-                <a:solidFill>
-                  <a:srgbClr val="C5C1B9"/>
-                </a:solidFill>
-                <a:latin typeface="Consolas"/>
-              </a:rPr>
-              <a:t/>
-            </a:r>
-          </a:p>
-          <a:p>
-            <a:pPr algn="l">
-              <a:spcAft>
-                <a:spcPts val="200"/>
-              </a:spcAft>
-            </a:pPr>
-            <a:r>
-              <a:rPr sz="1200">
-                <a:solidFill>
-                  <a:srgbClr val="C5C1B9"/>
-                </a:solidFill>
-                <a:latin typeface="Consolas"/>
-              </a:rPr>
-              <a:t>✨ Project ready! Run: npx remotion preview</a:t>
-            </a:r>
-          </a:p>
-        </p:txBody>
-      </p:sp>
-      <p:sp>
-        <p:nvSpPr>
-          <p:cNvPr id="11" name="Rectangle 10"/>
+              <a:t>$ claude "Create a Remotion video with
+  animated title and sound effects"
+&gt; Creating project structure...
+&gt; Writing Root.tsx...
+&gt; Adding Composition with spring animation
+&gt; Configuring audio track
+&gt; Rendering video at 1920x1080, 30fps
+✔ Video rendered: output/video.mp4</a:t>
+            </a:r>
+          </a:p>
+        </p:txBody>
+      </p:sp>
+      <p:sp>
+        <p:nvSpPr>
+          <p:cNvPr id="10" name="Rounded Rectangle 9"/>
           <p:cNvSpPr/>
           <p:nvPr/>
         </p:nvSpPr>
         <p:spPr>
           <a:xfrm>
-            <a:off x="7589520" y="1371600"/>
-            <a:ext cx="4114800" cy="5029200"/>
-          </a:xfrm>
-          <a:prstGeom prst="rect">
-            <a:avLst/>
+            <a:off x="7315200" y="2011680"/>
+            <a:ext cx="4389120" cy="4389120"/>
+          </a:xfrm>
+          <a:prstGeom prst="roundRect">
+            <a:avLst>
+              <a:gd name="adj" fmla="val 5000"/>
+            </a:avLst>
           </a:prstGeom>
           <a:solidFill>
-            <a:srgbClr val="14171F"/>
+            <a:srgbClr val="1E1E1E"/>
           </a:solidFill>
           <a:ln w="12700">
             <a:solidFill>
-              <a:srgbClr val="303030"/>
+              <a:srgbClr val="333333"/>
             </a:solidFill>
           </a:ln>
         </p:spPr>
@@ -8188,14 +8696,14 @@
       </p:sp>
       <p:sp>
         <p:nvSpPr>
-          <p:cNvPr id="12" name="TextBox 11"/>
+          <p:cNvPr id="11" name="TextBox 10"/>
           <p:cNvSpPr txBox="1"/>
           <p:nvPr/>
         </p:nvSpPr>
         <p:spPr>
           <a:xfrm>
-            <a:off x="7772400" y="1554480"/>
-            <a:ext cx="3657600" cy="365760"/>
+            <a:off x="7589520" y="2194560"/>
+            <a:ext cx="2743200" cy="365760"/>
           </a:xfrm>
           <a:prstGeom prst="rect">
             <a:avLst/>
@@ -8203,14 +8711,16 @@
           <a:noFill/>
         </p:spPr>
         <p:txBody>
-          <a:bodyPr wrap="square"/>
-          <a:lstStyle/>
-          <a:p>
-            <a:pPr algn="l"/>
-            <a:r>
-              <a:rPr sz="1100" b="1">
-                <a:solidFill>
-                  <a:srgbClr val="22C55E"/>
+          <a:bodyPr wrap="square">
+            <a:spAutoFit/>
+          </a:bodyPr>
+          <a:lstStyle/>
+          <a:p>
+            <a:pPr algn="l" rtl="0"/>
+            <a:r>
+              <a:rPr sz="1200" b="1">
+                <a:solidFill>
+                  <a:srgbClr val="666666"/>
                 </a:solidFill>
                 <a:latin typeface="Consolas"/>
               </a:rPr>
@@ -8221,20 +8731,20 @@
       </p:sp>
       <p:sp>
         <p:nvSpPr>
-          <p:cNvPr id="13" name="Rounded Rectangle 12"/>
+          <p:cNvPr id="12" name="Oval 11"/>
           <p:cNvSpPr/>
           <p:nvPr/>
         </p:nvSpPr>
         <p:spPr>
           <a:xfrm>
-            <a:off x="7863840" y="2194560"/>
-            <a:ext cx="457200" cy="457200"/>
-          </a:xfrm>
-          <a:prstGeom prst="roundRect">
+            <a:off x="7680960" y="2816352"/>
+            <a:ext cx="109728" cy="109728"/>
+          </a:xfrm>
+          <a:prstGeom prst="ellipse">
             <a:avLst/>
           </a:prstGeom>
           <a:solidFill>
-            <a:srgbClr val="1A2A1A"/>
+            <a:srgbClr val="22C55E"/>
           </a:solidFill>
           <a:ln>
             <a:noFill/>
@@ -8264,14 +8774,14 @@
       </p:sp>
       <p:sp>
         <p:nvSpPr>
-          <p:cNvPr id="14" name="TextBox 13"/>
+          <p:cNvPr id="13" name="TextBox 12"/>
           <p:cNvSpPr txBox="1"/>
           <p:nvPr/>
         </p:nvSpPr>
         <p:spPr>
           <a:xfrm>
-            <a:off x="7863840" y="2194560"/>
-            <a:ext cx="457200" cy="457200"/>
+            <a:off x="7955280" y="2697480"/>
+            <a:ext cx="3200400" cy="320040"/>
           </a:xfrm>
           <a:prstGeom prst="rect">
             <a:avLst/>
@@ -8279,47 +8789,16 @@
           <a:noFill/>
         </p:spPr>
         <p:txBody>
-          <a:bodyPr wrap="square"/>
-          <a:lstStyle/>
-          <a:p>
-            <a:pPr algn="ctr"/>
-            <a:r>
-              <a:rPr sz="1400" b="0">
-                <a:solidFill>
-                  <a:srgbClr val="22C55E"/>
-                </a:solidFill>
-                <a:latin typeface="Arial"/>
-              </a:rPr>
-              <a:t>{ }</a:t>
-            </a:r>
-          </a:p>
-        </p:txBody>
-      </p:sp>
-      <p:sp>
-        <p:nvSpPr>
-          <p:cNvPr id="15" name="TextBox 14"/>
-          <p:cNvSpPr txBox="1"/>
-          <p:nvPr/>
-        </p:nvSpPr>
-        <p:spPr>
-          <a:xfrm>
-            <a:off x="8503920" y="2194560"/>
-            <a:ext cx="2743200" cy="274320"/>
-          </a:xfrm>
-          <a:prstGeom prst="rect">
-            <a:avLst/>
-          </a:prstGeom>
-          <a:noFill/>
-        </p:spPr>
-        <p:txBody>
-          <a:bodyPr wrap="square"/>
-          <a:lstStyle/>
-          <a:p>
-            <a:pPr algn="l"/>
+          <a:bodyPr wrap="square">
+            <a:spAutoFit/>
+          </a:bodyPr>
+          <a:lstStyle/>
+          <a:p>
+            <a:pPr algn="l" rtl="0"/>
             <a:r>
               <a:rPr sz="1400" b="1">
                 <a:solidFill>
-                  <a:srgbClr val="DCDAD5"/>
+                  <a:srgbClr val="FFFFFF"/>
                 </a:solidFill>
                 <a:latin typeface="Consolas"/>
               </a:rPr>
@@ -8330,14 +8809,14 @@
       </p:sp>
       <p:sp>
         <p:nvSpPr>
-          <p:cNvPr id="16" name="TextBox 15"/>
+          <p:cNvPr id="14" name="TextBox 13"/>
           <p:cNvSpPr txBox="1"/>
           <p:nvPr/>
         </p:nvSpPr>
         <p:spPr>
           <a:xfrm>
-            <a:off x="8503920" y="2468880"/>
-            <a:ext cx="2743200" cy="228600"/>
+            <a:off x="7955280" y="2971800"/>
+            <a:ext cx="3200400" cy="274320"/>
           </a:xfrm>
           <a:prstGeom prst="rect">
             <a:avLst/>
@@ -8345,12 +8824,14 @@
           <a:noFill/>
         </p:spPr>
         <p:txBody>
-          <a:bodyPr wrap="square"/>
-          <a:lstStyle/>
-          <a:p>
-            <a:pPr algn="l"/>
-            <a:r>
-              <a:rPr sz="1000" b="0">
+          <a:bodyPr wrap="square">
+            <a:spAutoFit/>
+          </a:bodyPr>
+          <a:lstStyle/>
+          <a:p>
+            <a:pPr algn="l" rtl="0"/>
+            <a:r>
+              <a:rPr sz="1100" b="0">
                 <a:solidFill>
                   <a:srgbClr val="A09D96"/>
                 </a:solidFill>
@@ -8363,20 +8844,20 @@
       </p:sp>
       <p:sp>
         <p:nvSpPr>
-          <p:cNvPr id="17" name="Rounded Rectangle 16"/>
+          <p:cNvPr id="15" name="Oval 14"/>
           <p:cNvSpPr/>
           <p:nvPr/>
         </p:nvSpPr>
         <p:spPr>
           <a:xfrm>
-            <a:off x="7863840" y="3063239"/>
-            <a:ext cx="457200" cy="457200"/>
-          </a:xfrm>
-          <a:prstGeom prst="roundRect">
+            <a:off x="7680960" y="3639312"/>
+            <a:ext cx="109728" cy="109728"/>
+          </a:xfrm>
+          <a:prstGeom prst="ellipse">
             <a:avLst/>
           </a:prstGeom>
           <a:solidFill>
-            <a:srgbClr val="1A2A1A"/>
+            <a:srgbClr val="22C55E"/>
           </a:solidFill>
           <a:ln>
             <a:noFill/>
@@ -8406,14 +8887,14 @@
       </p:sp>
       <p:sp>
         <p:nvSpPr>
-          <p:cNvPr id="18" name="TextBox 17"/>
+          <p:cNvPr id="16" name="TextBox 15"/>
           <p:cNvSpPr txBox="1"/>
           <p:nvPr/>
         </p:nvSpPr>
         <p:spPr>
           <a:xfrm>
-            <a:off x="7863840" y="3063239"/>
-            <a:ext cx="457200" cy="457200"/>
+            <a:off x="7955280" y="3520440"/>
+            <a:ext cx="3200400" cy="320040"/>
           </a:xfrm>
           <a:prstGeom prst="rect">
             <a:avLst/>
@@ -8421,47 +8902,16 @@
           <a:noFill/>
         </p:spPr>
         <p:txBody>
-          <a:bodyPr wrap="square"/>
-          <a:lstStyle/>
-          <a:p>
-            <a:pPr algn="ctr"/>
-            <a:r>
-              <a:rPr sz="1400" b="0">
-                <a:solidFill>
-                  <a:srgbClr val="22C55E"/>
-                </a:solidFill>
-                <a:latin typeface="Arial"/>
-              </a:rPr>
-              <a:t>▶</a:t>
-            </a:r>
-          </a:p>
-        </p:txBody>
-      </p:sp>
-      <p:sp>
-        <p:nvSpPr>
-          <p:cNvPr id="19" name="TextBox 18"/>
-          <p:cNvSpPr txBox="1"/>
-          <p:nvPr/>
-        </p:nvSpPr>
-        <p:spPr>
-          <a:xfrm>
-            <a:off x="8503920" y="3063239"/>
-            <a:ext cx="2743200" cy="274320"/>
-          </a:xfrm>
-          <a:prstGeom prst="rect">
-            <a:avLst/>
-          </a:prstGeom>
-          <a:noFill/>
-        </p:spPr>
-        <p:txBody>
-          <a:bodyPr wrap="square"/>
-          <a:lstStyle/>
-          <a:p>
-            <a:pPr algn="l"/>
+          <a:bodyPr wrap="square">
+            <a:spAutoFit/>
+          </a:bodyPr>
+          <a:lstStyle/>
+          <a:p>
+            <a:pPr algn="l" rtl="0"/>
             <a:r>
               <a:rPr sz="1400" b="1">
                 <a:solidFill>
-                  <a:srgbClr val="DCDAD5"/>
+                  <a:srgbClr val="FFFFFF"/>
                 </a:solidFill>
                 <a:latin typeface="Consolas"/>
               </a:rPr>
@@ -8472,14 +8922,14 @@
       </p:sp>
       <p:sp>
         <p:nvSpPr>
-          <p:cNvPr id="20" name="TextBox 19"/>
+          <p:cNvPr id="17" name="TextBox 16"/>
           <p:cNvSpPr txBox="1"/>
           <p:nvPr/>
         </p:nvSpPr>
         <p:spPr>
           <a:xfrm>
-            <a:off x="8503920" y="3337559"/>
-            <a:ext cx="2743200" cy="228600"/>
+            <a:off x="7955280" y="3794760"/>
+            <a:ext cx="3200400" cy="274320"/>
           </a:xfrm>
           <a:prstGeom prst="rect">
             <a:avLst/>
@@ -8487,12 +8937,14 @@
           <a:noFill/>
         </p:spPr>
         <p:txBody>
-          <a:bodyPr wrap="square"/>
-          <a:lstStyle/>
-          <a:p>
-            <a:pPr algn="l"/>
-            <a:r>
-              <a:rPr sz="1000" b="0">
+          <a:bodyPr wrap="square">
+            <a:spAutoFit/>
+          </a:bodyPr>
+          <a:lstStyle/>
+          <a:p>
+            <a:pPr algn="l" rtl="0"/>
+            <a:r>
+              <a:rPr sz="1100" b="0">
                 <a:solidFill>
                   <a:srgbClr val="A09D96"/>
                 </a:solidFill>
@@ -8505,20 +8957,20 @@
       </p:sp>
       <p:sp>
         <p:nvSpPr>
-          <p:cNvPr id="21" name="Rounded Rectangle 20"/>
+          <p:cNvPr id="18" name="Oval 17"/>
           <p:cNvSpPr/>
           <p:nvPr/>
         </p:nvSpPr>
         <p:spPr>
           <a:xfrm>
-            <a:off x="7863840" y="3931920"/>
-            <a:ext cx="457200" cy="457200"/>
-          </a:xfrm>
-          <a:prstGeom prst="roundRect">
+            <a:off x="7680960" y="4462272"/>
+            <a:ext cx="109728" cy="109728"/>
+          </a:xfrm>
+          <a:prstGeom prst="ellipse">
             <a:avLst/>
           </a:prstGeom>
           <a:solidFill>
-            <a:srgbClr val="1A2A1A"/>
+            <a:srgbClr val="22C55E"/>
           </a:solidFill>
           <a:ln>
             <a:noFill/>
@@ -8548,14 +9000,14 @@
       </p:sp>
       <p:sp>
         <p:nvSpPr>
-          <p:cNvPr id="22" name="TextBox 21"/>
+          <p:cNvPr id="19" name="TextBox 18"/>
           <p:cNvSpPr txBox="1"/>
           <p:nvPr/>
         </p:nvSpPr>
         <p:spPr>
           <a:xfrm>
-            <a:off x="7863840" y="3931920"/>
-            <a:ext cx="457200" cy="457200"/>
+            <a:off x="7955280" y="4343400"/>
+            <a:ext cx="3200400" cy="320040"/>
           </a:xfrm>
           <a:prstGeom prst="rect">
             <a:avLst/>
@@ -8563,47 +9015,16 @@
           <a:noFill/>
         </p:spPr>
         <p:txBody>
-          <a:bodyPr wrap="square"/>
-          <a:lstStyle/>
-          <a:p>
-            <a:pPr algn="ctr"/>
-            <a:r>
-              <a:rPr sz="1400" b="0">
-                <a:solidFill>
-                  <a:srgbClr val="22C55E"/>
-                </a:solidFill>
-                <a:latin typeface="Arial"/>
-              </a:rPr>
-              <a:t>♪</a:t>
-            </a:r>
-          </a:p>
-        </p:txBody>
-      </p:sp>
-      <p:sp>
-        <p:nvSpPr>
-          <p:cNvPr id="23" name="TextBox 22"/>
-          <p:cNvSpPr txBox="1"/>
-          <p:nvPr/>
-        </p:nvSpPr>
-        <p:spPr>
-          <a:xfrm>
-            <a:off x="8503920" y="3931920"/>
-            <a:ext cx="2743200" cy="274320"/>
-          </a:xfrm>
-          <a:prstGeom prst="rect">
-            <a:avLst/>
-          </a:prstGeom>
-          <a:noFill/>
-        </p:spPr>
-        <p:txBody>
-          <a:bodyPr wrap="square"/>
-          <a:lstStyle/>
-          <a:p>
-            <a:pPr algn="l"/>
+          <a:bodyPr wrap="square">
+            <a:spAutoFit/>
+          </a:bodyPr>
+          <a:lstStyle/>
+          <a:p>
+            <a:pPr algn="l" rtl="0"/>
             <a:r>
               <a:rPr sz="1400" b="1">
                 <a:solidFill>
-                  <a:srgbClr val="DCDAD5"/>
+                  <a:srgbClr val="FFFFFF"/>
                 </a:solidFill>
                 <a:latin typeface="Consolas"/>
               </a:rPr>
@@ -8614,14 +9035,14 @@
       </p:sp>
       <p:sp>
         <p:nvSpPr>
-          <p:cNvPr id="24" name="TextBox 23"/>
+          <p:cNvPr id="20" name="TextBox 19"/>
           <p:cNvSpPr txBox="1"/>
           <p:nvPr/>
         </p:nvSpPr>
         <p:spPr>
           <a:xfrm>
-            <a:off x="8503920" y="4206240"/>
-            <a:ext cx="2743200" cy="228600"/>
+            <a:off x="7955280" y="4617720"/>
+            <a:ext cx="3200400" cy="274320"/>
           </a:xfrm>
           <a:prstGeom prst="rect">
             <a:avLst/>
@@ -8629,12 +9050,14 @@
           <a:noFill/>
         </p:spPr>
         <p:txBody>
-          <a:bodyPr wrap="square"/>
-          <a:lstStyle/>
-          <a:p>
-            <a:pPr algn="l"/>
-            <a:r>
-              <a:rPr sz="1000" b="0">
+          <a:bodyPr wrap="square">
+            <a:spAutoFit/>
+          </a:bodyPr>
+          <a:lstStyle/>
+          <a:p>
+            <a:pPr algn="l" rtl="0"/>
+            <a:r>
+              <a:rPr sz="1100" b="0">
                 <a:solidFill>
                   <a:srgbClr val="A09D96"/>
                 </a:solidFill>
@@ -8647,20 +9070,20 @@
       </p:sp>
       <p:sp>
         <p:nvSpPr>
-          <p:cNvPr id="25" name="Rounded Rectangle 24"/>
+          <p:cNvPr id="21" name="Oval 20"/>
           <p:cNvSpPr/>
           <p:nvPr/>
         </p:nvSpPr>
         <p:spPr>
           <a:xfrm>
-            <a:off x="7863840" y="4800600"/>
-            <a:ext cx="457200" cy="457200"/>
-          </a:xfrm>
-          <a:prstGeom prst="roundRect">
+            <a:off x="7680960" y="5285232"/>
+            <a:ext cx="109728" cy="109728"/>
+          </a:xfrm>
+          <a:prstGeom prst="ellipse">
             <a:avLst/>
           </a:prstGeom>
           <a:solidFill>
-            <a:srgbClr val="1A2A1A"/>
+            <a:srgbClr val="22C55E"/>
           </a:solidFill>
           <a:ln>
             <a:noFill/>
@@ -8690,14 +9113,14 @@
       </p:sp>
       <p:sp>
         <p:nvSpPr>
-          <p:cNvPr id="26" name="TextBox 25"/>
+          <p:cNvPr id="22" name="TextBox 21"/>
           <p:cNvSpPr txBox="1"/>
           <p:nvPr/>
         </p:nvSpPr>
         <p:spPr>
           <a:xfrm>
-            <a:off x="7863840" y="4800600"/>
-            <a:ext cx="457200" cy="457200"/>
+            <a:off x="7955280" y="5166360"/>
+            <a:ext cx="3200400" cy="320040"/>
           </a:xfrm>
           <a:prstGeom prst="rect">
             <a:avLst/>
@@ -8705,47 +9128,16 @@
           <a:noFill/>
         </p:spPr>
         <p:txBody>
-          <a:bodyPr wrap="square"/>
-          <a:lstStyle/>
-          <a:p>
-            <a:pPr algn="ctr"/>
-            <a:r>
-              <a:rPr sz="1400" b="0">
-                <a:solidFill>
-                  <a:srgbClr val="22C55E"/>
-                </a:solidFill>
-                <a:latin typeface="Arial"/>
-              </a:rPr>
-              <a:t>◆</a:t>
-            </a:r>
-          </a:p>
-        </p:txBody>
-      </p:sp>
-      <p:sp>
-        <p:nvSpPr>
-          <p:cNvPr id="27" name="TextBox 26"/>
-          <p:cNvSpPr txBox="1"/>
-          <p:nvPr/>
-        </p:nvSpPr>
-        <p:spPr>
-          <a:xfrm>
-            <a:off x="8503920" y="4800600"/>
-            <a:ext cx="2743200" cy="274320"/>
-          </a:xfrm>
-          <a:prstGeom prst="rect">
-            <a:avLst/>
-          </a:prstGeom>
-          <a:noFill/>
-        </p:spPr>
-        <p:txBody>
-          <a:bodyPr wrap="square"/>
-          <a:lstStyle/>
-          <a:p>
-            <a:pPr algn="l"/>
+          <a:bodyPr wrap="square">
+            <a:spAutoFit/>
+          </a:bodyPr>
+          <a:lstStyle/>
+          <a:p>
+            <a:pPr algn="l" rtl="0"/>
             <a:r>
               <a:rPr sz="1400" b="1">
                 <a:solidFill>
-                  <a:srgbClr val="DCDAD5"/>
+                  <a:srgbClr val="FFFFFF"/>
                 </a:solidFill>
                 <a:latin typeface="Consolas"/>
               </a:rPr>
@@ -8756,14 +9148,14 @@
       </p:sp>
       <p:sp>
         <p:nvSpPr>
-          <p:cNvPr id="28" name="TextBox 27"/>
+          <p:cNvPr id="23" name="TextBox 22"/>
           <p:cNvSpPr txBox="1"/>
           <p:nvPr/>
         </p:nvSpPr>
         <p:spPr>
           <a:xfrm>
-            <a:off x="8503920" y="5074920"/>
-            <a:ext cx="2743200" cy="228600"/>
+            <a:off x="7955280" y="5440680"/>
+            <a:ext cx="3200400" cy="274320"/>
           </a:xfrm>
           <a:prstGeom prst="rect">
             <a:avLst/>
@@ -8771,12 +9163,14 @@
           <a:noFill/>
         </p:spPr>
         <p:txBody>
-          <a:bodyPr wrap="square"/>
-          <a:lstStyle/>
-          <a:p>
-            <a:pPr algn="l"/>
-            <a:r>
-              <a:rPr sz="1000" b="0">
+          <a:bodyPr wrap="square">
+            <a:spAutoFit/>
+          </a:bodyPr>
+          <a:lstStyle/>
+          <a:p>
+            <a:pPr algn="l" rtl="0"/>
+            <a:r>
+              <a:rPr sz="1100" b="0">
                 <a:solidFill>
                   <a:srgbClr val="A09D96"/>
                 </a:solidFill>
@@ -8821,8 +9215,8 @@
         </p:nvSpPr>
         <p:spPr>
           <a:xfrm>
-            <a:off x="457200" y="457200"/>
-            <a:ext cx="11247120" cy="457200"/>
+            <a:off x="0" y="548640"/>
+            <a:ext cx="12191695" cy="457200"/>
           </a:xfrm>
           <a:prstGeom prst="rect">
             <a:avLst/>
@@ -8830,16 +9224,18 @@
           <a:noFill/>
         </p:spPr>
         <p:txBody>
-          <a:bodyPr wrap="square"/>
-          <a:lstStyle/>
-          <a:p>
-            <a:pPr algn="ctr"/>
-            <a:r>
-              <a:rPr sz="1200" b="1">
+          <a:bodyPr wrap="square">
+            <a:spAutoFit/>
+          </a:bodyPr>
+          <a:lstStyle/>
+          <a:p>
+            <a:pPr algn="ctr" rtl="0"/>
+            <a:r>
+              <a:rPr sz="1400" b="1">
                 <a:solidFill>
                   <a:srgbClr val="22C55E"/>
                 </a:solidFill>
-                <a:latin typeface="Arial"/>
+                <a:latin typeface="Heebo"/>
               </a:rPr>
               <a:t>מה זה Skills</a:t>
             </a:r>
@@ -8854,8 +9250,8 @@
         </p:nvSpPr>
         <p:spPr>
           <a:xfrm>
-            <a:off x="457200" y="914400"/>
-            <a:ext cx="11247120" cy="914400"/>
+            <a:off x="0" y="1005840"/>
+            <a:ext cx="12191695" cy="640080"/>
           </a:xfrm>
           <a:prstGeom prst="rect">
             <a:avLst/>
@@ -8863,16 +9259,18 @@
           <a:noFill/>
         </p:spPr>
         <p:txBody>
-          <a:bodyPr wrap="square"/>
-          <a:lstStyle/>
-          <a:p>
-            <a:pPr algn="ctr"/>
-            <a:r>
-              <a:rPr sz="3200" b="1">
+          <a:bodyPr wrap="square">
+            <a:spAutoFit/>
+          </a:bodyPr>
+          <a:lstStyle/>
+          <a:p>
+            <a:pPr algn="ctr" rtl="1"/>
+            <a:r>
+              <a:rPr sz="3000" b="1">
                 <a:solidFill>
                   <a:srgbClr val="DCDAD5"/>
                 </a:solidFill>
-                <a:latin typeface="Arial"/>
+                <a:latin typeface="Heebo"/>
               </a:rPr>
               <a:t>חבילות יכולות מובנות לסוכן</a:t>
             </a:r>
@@ -8887,7 +9285,7 @@
         </p:nvSpPr>
         <p:spPr>
           <a:xfrm>
-            <a:off x="2286000" y="2011680"/>
+            <a:off x="1828800" y="2286000"/>
             <a:ext cx="4572000" cy="365760"/>
           </a:xfrm>
           <a:prstGeom prst="rect">
@@ -8896,14 +9294,16 @@
           <a:noFill/>
         </p:spPr>
         <p:txBody>
-          <a:bodyPr wrap="square"/>
-          <a:lstStyle/>
-          <a:p>
-            <a:pPr algn="l"/>
+          <a:bodyPr wrap="square">
+            <a:spAutoFit/>
+          </a:bodyPr>
+          <a:lstStyle/>
+          <a:p>
+            <a:pPr algn="l" rtl="0"/>
             <a:r>
               <a:rPr sz="1400" b="0">
                 <a:solidFill>
-                  <a:srgbClr val="DCDAD5"/>
+                  <a:srgbClr val="C5C1B9"/>
                 </a:solidFill>
                 <a:latin typeface="Consolas"/>
               </a:rPr>
@@ -8920,8 +9320,8 @@
         </p:nvSpPr>
         <p:spPr>
           <a:xfrm>
-            <a:off x="8229600" y="2011680"/>
-            <a:ext cx="1371600" cy="365760"/>
+            <a:off x="8229600" y="2286000"/>
+            <a:ext cx="2103120" cy="365760"/>
           </a:xfrm>
           <a:prstGeom prst="rect">
             <a:avLst/>
@@ -8929,10 +9329,12 @@
           <a:noFill/>
         </p:spPr>
         <p:txBody>
-          <a:bodyPr wrap="square"/>
-          <a:lstStyle/>
-          <a:p>
-            <a:pPr algn="r"/>
+          <a:bodyPr wrap="square">
+            <a:spAutoFit/>
+          </a:bodyPr>
+          <a:lstStyle/>
+          <a:p>
+            <a:pPr algn="r" rtl="0"/>
             <a:r>
               <a:rPr sz="1400" b="1">
                 <a:solidFill>
@@ -8947,20 +9349,22 @@
       </p:sp>
       <p:sp>
         <p:nvSpPr>
-          <p:cNvPr id="6" name="Rectangle 5"/>
+          <p:cNvPr id="6" name="Rounded Rectangle 5"/>
           <p:cNvSpPr/>
           <p:nvPr/>
         </p:nvSpPr>
         <p:spPr>
           <a:xfrm>
-            <a:off x="2286000" y="2468880"/>
-            <a:ext cx="7589520" cy="274320"/>
-          </a:xfrm>
-          <a:prstGeom prst="rect">
-            <a:avLst/>
+            <a:off x="1828800" y="2743200"/>
+            <a:ext cx="8503920" cy="274320"/>
+          </a:xfrm>
+          <a:prstGeom prst="roundRect">
+            <a:avLst>
+              <a:gd name="adj" fmla="val 5000"/>
+            </a:avLst>
           </a:prstGeom>
           <a:solidFill>
-            <a:srgbClr val="2A2A2A"/>
+            <a:srgbClr val="333333"/>
           </a:solidFill>
           <a:ln>
             <a:noFill/>
@@ -8990,17 +9394,19 @@
       </p:sp>
       <p:sp>
         <p:nvSpPr>
-          <p:cNvPr id="7" name="Rectangle 6"/>
+          <p:cNvPr id="7" name="Rounded Rectangle 6"/>
           <p:cNvSpPr/>
           <p:nvPr/>
         </p:nvSpPr>
         <p:spPr>
           <a:xfrm>
-            <a:off x="2286000" y="2468880"/>
-            <a:ext cx="7589520" cy="274320"/>
-          </a:xfrm>
-          <a:prstGeom prst="rect">
-            <a:avLst/>
+            <a:off x="1828800" y="2743200"/>
+            <a:ext cx="8503920" cy="274320"/>
+          </a:xfrm>
+          <a:prstGeom prst="roundRect">
+            <a:avLst>
+              <a:gd name="adj" fmla="val 5000"/>
+            </a:avLst>
           </a:prstGeom>
           <a:solidFill>
             <a:srgbClr val="22C55E"/>
@@ -9039,8 +9445,8 @@
         </p:nvSpPr>
         <p:spPr>
           <a:xfrm>
-            <a:off x="2286000" y="2926080"/>
-            <a:ext cx="7589520" cy="365760"/>
+            <a:off x="1828800" y="3154680"/>
+            <a:ext cx="8503920" cy="365760"/>
           </a:xfrm>
           <a:prstGeom prst="rect">
             <a:avLst/>
@@ -9048,14 +9454,16 @@
           <a:noFill/>
         </p:spPr>
         <p:txBody>
-          <a:bodyPr wrap="square"/>
-          <a:lstStyle/>
-          <a:p>
-            <a:pPr algn="l"/>
+          <a:bodyPr wrap="square">
+            <a:spAutoFit/>
+          </a:bodyPr>
+          <a:lstStyle/>
+          <a:p>
+            <a:pPr algn="l" rtl="0"/>
             <a:r>
               <a:rPr sz="1200" b="0">
                 <a:solidFill>
-                  <a:srgbClr val="A09D96"/>
+                  <a:srgbClr val="22C55E"/>
                 </a:solidFill>
                 <a:latin typeface="Consolas"/>
               </a:rPr>
@@ -9072,18 +9480,18 @@
         </p:nvSpPr>
         <p:spPr>
           <a:xfrm>
-            <a:off x="2392527" y="3657600"/>
+            <a:off x="2392527" y="3840480"/>
             <a:ext cx="1645920" cy="502920"/>
           </a:xfrm>
           <a:prstGeom prst="roundRect">
-            <a:avLst/>
-          </a:prstGeom>
-          <a:solidFill>
-            <a:srgbClr val="14171F"/>
-          </a:solidFill>
+            <a:avLst>
+              <a:gd name="adj" fmla="val 50000"/>
+            </a:avLst>
+          </a:prstGeom>
+          <a:noFill/>
           <a:ln w="12700">
             <a:solidFill>
-              <a:srgbClr val="1A803E"/>
+              <a:srgbClr val="22C55E"/>
             </a:solidFill>
           </a:ln>
         </p:spPr>
@@ -9102,66 +9510,42 @@
           </a:fontRef>
         </p:style>
         <p:txBody>
-          <a:bodyPr rtlCol="0" anchor="ctr"/>
+          <a:bodyPr rtlCol="0" anchor="ctr" wrap="none"/>
           <a:lstStyle/>
           <a:p>
             <a:pPr algn="ctr"/>
-          </a:p>
-        </p:txBody>
-      </p:sp>
-      <p:sp>
-        <p:nvSpPr>
-          <p:cNvPr id="10" name="TextBox 9"/>
-          <p:cNvSpPr txBox="1"/>
-          <p:nvPr/>
-        </p:nvSpPr>
-        <p:spPr>
-          <a:xfrm>
-            <a:off x="2392527" y="3703320"/>
+            <a:r>
+              <a:rPr sz="1400" b="1">
+                <a:solidFill>
+                  <a:srgbClr val="FFFFFF"/>
+                </a:solidFill>
+                <a:latin typeface="Heebo"/>
+              </a:rPr>
+              <a:t>React</a:t>
+            </a:r>
+          </a:p>
+        </p:txBody>
+      </p:sp>
+      <p:sp>
+        <p:nvSpPr>
+          <p:cNvPr id="10" name="Rounded Rectangle 9"/>
+          <p:cNvSpPr/>
+          <p:nvPr/>
+        </p:nvSpPr>
+        <p:spPr>
+          <a:xfrm>
+            <a:off x="4312767" y="3840480"/>
             <a:ext cx="1645920" cy="502920"/>
           </a:xfrm>
-          <a:prstGeom prst="rect">
-            <a:avLst/>
+          <a:prstGeom prst="roundRect">
+            <a:avLst>
+              <a:gd name="adj" fmla="val 50000"/>
+            </a:avLst>
           </a:prstGeom>
           <a:noFill/>
-        </p:spPr>
-        <p:txBody>
-          <a:bodyPr wrap="square"/>
-          <a:lstStyle/>
-          <a:p>
-            <a:pPr algn="ctr"/>
-            <a:r>
-              <a:rPr sz="1300" b="0">
-                <a:solidFill>
-                  <a:srgbClr val="22C55E"/>
-                </a:solidFill>
-                <a:latin typeface="Consolas"/>
-              </a:rPr>
-              <a:t>⟨/⟩  React</a:t>
-            </a:r>
-          </a:p>
-        </p:txBody>
-      </p:sp>
-      <p:sp>
-        <p:nvSpPr>
-          <p:cNvPr id="11" name="Rounded Rectangle 10"/>
-          <p:cNvSpPr/>
-          <p:nvPr/>
-        </p:nvSpPr>
-        <p:spPr>
-          <a:xfrm>
-            <a:off x="4312767" y="3657600"/>
-            <a:ext cx="1645920" cy="502920"/>
-          </a:xfrm>
-          <a:prstGeom prst="roundRect">
-            <a:avLst/>
-          </a:prstGeom>
-          <a:solidFill>
-            <a:srgbClr val="14171F"/>
-          </a:solidFill>
           <a:ln w="12700">
             <a:solidFill>
-              <a:srgbClr val="1A803E"/>
+              <a:srgbClr val="22C55E"/>
             </a:solidFill>
           </a:ln>
         </p:spPr>
@@ -9180,66 +9564,42 @@
           </a:fontRef>
         </p:style>
         <p:txBody>
-          <a:bodyPr rtlCol="0" anchor="ctr"/>
+          <a:bodyPr rtlCol="0" anchor="ctr" wrap="none"/>
           <a:lstStyle/>
           <a:p>
             <a:pPr algn="ctr"/>
-          </a:p>
-        </p:txBody>
-      </p:sp>
-      <p:sp>
-        <p:nvSpPr>
-          <p:cNvPr id="12" name="TextBox 11"/>
-          <p:cNvSpPr txBox="1"/>
-          <p:nvPr/>
-        </p:nvSpPr>
-        <p:spPr>
-          <a:xfrm>
-            <a:off x="4312767" y="3703320"/>
+            <a:r>
+              <a:rPr sz="1400" b="1">
+                <a:solidFill>
+                  <a:srgbClr val="FFFFFF"/>
+                </a:solidFill>
+                <a:latin typeface="Heebo"/>
+              </a:rPr>
+              <a:t>Animation</a:t>
+            </a:r>
+          </a:p>
+        </p:txBody>
+      </p:sp>
+      <p:sp>
+        <p:nvSpPr>
+          <p:cNvPr id="11" name="Rounded Rectangle 10"/>
+          <p:cNvSpPr/>
+          <p:nvPr/>
+        </p:nvSpPr>
+        <p:spPr>
+          <a:xfrm>
+            <a:off x="6233007" y="3840480"/>
             <a:ext cx="1645920" cy="502920"/>
           </a:xfrm>
-          <a:prstGeom prst="rect">
-            <a:avLst/>
+          <a:prstGeom prst="roundRect">
+            <a:avLst>
+              <a:gd name="adj" fmla="val 50000"/>
+            </a:avLst>
           </a:prstGeom>
           <a:noFill/>
-        </p:spPr>
-        <p:txBody>
-          <a:bodyPr wrap="square"/>
-          <a:lstStyle/>
-          <a:p>
-            <a:pPr algn="ctr"/>
-            <a:r>
-              <a:rPr sz="1300" b="0">
-                <a:solidFill>
-                  <a:srgbClr val="22C55E"/>
-                </a:solidFill>
-                <a:latin typeface="Consolas"/>
-              </a:rPr>
-              <a:t>⏱  Animation</a:t>
-            </a:r>
-          </a:p>
-        </p:txBody>
-      </p:sp>
-      <p:sp>
-        <p:nvSpPr>
-          <p:cNvPr id="13" name="Rounded Rectangle 12"/>
-          <p:cNvSpPr/>
-          <p:nvPr/>
-        </p:nvSpPr>
-        <p:spPr>
-          <a:xfrm>
-            <a:off x="6233007" y="3657600"/>
-            <a:ext cx="1645920" cy="502920"/>
-          </a:xfrm>
-          <a:prstGeom prst="roundRect">
-            <a:avLst/>
-          </a:prstGeom>
-          <a:solidFill>
-            <a:srgbClr val="14171F"/>
-          </a:solidFill>
           <a:ln w="12700">
             <a:solidFill>
-              <a:srgbClr val="1A803E"/>
+              <a:srgbClr val="22C55E"/>
             </a:solidFill>
           </a:ln>
         </p:spPr>
@@ -9258,66 +9618,42 @@
           </a:fontRef>
         </p:style>
         <p:txBody>
-          <a:bodyPr rtlCol="0" anchor="ctr"/>
+          <a:bodyPr rtlCol="0" anchor="ctr" wrap="none"/>
           <a:lstStyle/>
           <a:p>
             <a:pPr algn="ctr"/>
-          </a:p>
-        </p:txBody>
-      </p:sp>
-      <p:sp>
-        <p:nvSpPr>
-          <p:cNvPr id="14" name="TextBox 13"/>
-          <p:cNvSpPr txBox="1"/>
-          <p:nvPr/>
-        </p:nvSpPr>
-        <p:spPr>
-          <a:xfrm>
-            <a:off x="6233007" y="3703320"/>
+            <a:r>
+              <a:rPr sz="1400" b="1">
+                <a:solidFill>
+                  <a:srgbClr val="FFFFFF"/>
+                </a:solidFill>
+                <a:latin typeface="Heebo"/>
+              </a:rPr>
+              <a:t>Render</a:t>
+            </a:r>
+          </a:p>
+        </p:txBody>
+      </p:sp>
+      <p:sp>
+        <p:nvSpPr>
+          <p:cNvPr id="12" name="Rounded Rectangle 11"/>
+          <p:cNvSpPr/>
+          <p:nvPr/>
+        </p:nvSpPr>
+        <p:spPr>
+          <a:xfrm>
+            <a:off x="8153247" y="3840480"/>
             <a:ext cx="1645920" cy="502920"/>
           </a:xfrm>
-          <a:prstGeom prst="rect">
-            <a:avLst/>
+          <a:prstGeom prst="roundRect">
+            <a:avLst>
+              <a:gd name="adj" fmla="val 50000"/>
+            </a:avLst>
           </a:prstGeom>
           <a:noFill/>
-        </p:spPr>
-        <p:txBody>
-          <a:bodyPr wrap="square"/>
-          <a:lstStyle/>
-          <a:p>
-            <a:pPr algn="ctr"/>
-            <a:r>
-              <a:rPr sz="1300" b="0">
-                <a:solidFill>
-                  <a:srgbClr val="22C55E"/>
-                </a:solidFill>
-                <a:latin typeface="Consolas"/>
-              </a:rPr>
-              <a:t>▶  Render</a:t>
-            </a:r>
-          </a:p>
-        </p:txBody>
-      </p:sp>
-      <p:sp>
-        <p:nvSpPr>
-          <p:cNvPr id="15" name="Rounded Rectangle 14"/>
-          <p:cNvSpPr/>
-          <p:nvPr/>
-        </p:nvSpPr>
-        <p:spPr>
-          <a:xfrm>
-            <a:off x="8153247" y="3657600"/>
-            <a:ext cx="1645920" cy="502920"/>
-          </a:xfrm>
-          <a:prstGeom prst="roundRect">
-            <a:avLst/>
-          </a:prstGeom>
-          <a:solidFill>
-            <a:srgbClr val="14171F"/>
-          </a:solidFill>
           <a:ln w="12700">
             <a:solidFill>
-              <a:srgbClr val="1A803E"/>
+              <a:srgbClr val="22C55E"/>
             </a:solidFill>
           </a:ln>
         </p:spPr>
@@ -9336,23 +9672,32 @@
           </a:fontRef>
         </p:style>
         <p:txBody>
-          <a:bodyPr rtlCol="0" anchor="ctr"/>
+          <a:bodyPr rtlCol="0" anchor="ctr" wrap="none"/>
           <a:lstStyle/>
           <a:p>
             <a:pPr algn="ctr"/>
-          </a:p>
-        </p:txBody>
-      </p:sp>
-      <p:sp>
-        <p:nvSpPr>
-          <p:cNvPr id="16" name="TextBox 15"/>
+            <a:r>
+              <a:rPr sz="1400" b="1">
+                <a:solidFill>
+                  <a:srgbClr val="FFFFFF"/>
+                </a:solidFill>
+                <a:latin typeface="Heebo"/>
+              </a:rPr>
+              <a:t>Audio</a:t>
+            </a:r>
+          </a:p>
+        </p:txBody>
+      </p:sp>
+      <p:sp>
+        <p:nvSpPr>
+          <p:cNvPr id="13" name="TextBox 12"/>
           <p:cNvSpPr txBox="1"/>
           <p:nvPr/>
         </p:nvSpPr>
         <p:spPr>
           <a:xfrm>
-            <a:off x="8153247" y="3703320"/>
-            <a:ext cx="1645920" cy="502920"/>
+            <a:off x="0" y="4754880"/>
+            <a:ext cx="12191695" cy="365760"/>
           </a:xfrm>
           <a:prstGeom prst="rect">
             <a:avLst/>
@@ -9360,32 +9705,34 @@
           <a:noFill/>
         </p:spPr>
         <p:txBody>
-          <a:bodyPr wrap="square"/>
-          <a:lstStyle/>
-          <a:p>
-            <a:pPr algn="ctr"/>
+          <a:bodyPr wrap="square">
+            <a:spAutoFit/>
+          </a:bodyPr>
+          <a:lstStyle/>
+          <a:p>
+            <a:pPr algn="ctr" rtl="0"/>
             <a:r>
               <a:rPr sz="1300" b="0">
                 <a:solidFill>
-                  <a:srgbClr val="22C55E"/>
+                  <a:srgbClr val="A09D96"/>
                 </a:solidFill>
                 <a:latin typeface="Consolas"/>
               </a:rPr>
-              <a:t>♪  Audio</a:t>
-            </a:r>
-          </a:p>
-        </p:txBody>
-      </p:sp>
-      <p:sp>
-        <p:nvSpPr>
-          <p:cNvPr id="17" name="TextBox 16"/>
+              <a:t>remotion-dev/skills</a:t>
+            </a:r>
+          </a:p>
+        </p:txBody>
+      </p:sp>
+      <p:sp>
+        <p:nvSpPr>
+          <p:cNvPr id="14" name="TextBox 13"/>
           <p:cNvSpPr txBox="1"/>
           <p:nvPr/>
         </p:nvSpPr>
         <p:spPr>
           <a:xfrm>
-            <a:off x="2743200" y="4572000"/>
-            <a:ext cx="6675120" cy="365760"/>
+            <a:off x="1371600" y="5303520"/>
+            <a:ext cx="9418320" cy="457200"/>
           </a:xfrm>
           <a:prstGeom prst="rect">
             <a:avLst/>
@@ -9393,49 +9740,18 @@
           <a:noFill/>
         </p:spPr>
         <p:txBody>
-          <a:bodyPr wrap="square"/>
-          <a:lstStyle/>
-          <a:p>
-            <a:pPr algn="ctr"/>
-            <a:r>
-              <a:rPr sz="1200" b="0">
+          <a:bodyPr wrap="square">
+            <a:spAutoFit/>
+          </a:bodyPr>
+          <a:lstStyle/>
+          <a:p>
+            <a:pPr algn="ctr" rtl="1"/>
+            <a:r>
+              <a:rPr sz="1500" b="0">
                 <a:solidFill>
                   <a:srgbClr val="A09D96"/>
                 </a:solidFill>
-                <a:latin typeface="Consolas"/>
-              </a:rPr>
-              <a:t>github.com/remotion-dev/skills</a:t>
-            </a:r>
-          </a:p>
-        </p:txBody>
-      </p:sp>
-      <p:sp>
-        <p:nvSpPr>
-          <p:cNvPr id="18" name="TextBox 17"/>
-          <p:cNvSpPr txBox="1"/>
-          <p:nvPr/>
-        </p:nvSpPr>
-        <p:spPr>
-          <a:xfrm>
-            <a:off x="1828800" y="5120640"/>
-            <a:ext cx="8503920" cy="457200"/>
-          </a:xfrm>
-          <a:prstGeom prst="rect">
-            <a:avLst/>
-          </a:prstGeom>
-          <a:noFill/>
-        </p:spPr>
-        <p:txBody>
-          <a:bodyPr wrap="square"/>
-          <a:lstStyle/>
-          <a:p>
-            <a:pPr algn="ctr"/>
-            <a:r>
-              <a:rPr sz="1400" b="0">
-                <a:solidFill>
-                  <a:srgbClr val="A09D96"/>
-                </a:solidFill>
-                <a:latin typeface="Arial"/>
+                <a:latin typeface="Heebo"/>
               </a:rPr>
               <a:t>Skill = מאות כלים שמאפשרים לסוכן לעבוד עם Remotion</a:t>
             </a:r>
@@ -9476,8 +9792,8 @@
         </p:nvSpPr>
         <p:spPr>
           <a:xfrm>
-            <a:off x="457200" y="731520"/>
-            <a:ext cx="11247120" cy="457200"/>
+            <a:off x="0" y="548640"/>
+            <a:ext cx="12191695" cy="457200"/>
           </a:xfrm>
           <a:prstGeom prst="rect">
             <a:avLst/>
@@ -9485,16 +9801,18 @@
           <a:noFill/>
         </p:spPr>
         <p:txBody>
-          <a:bodyPr wrap="square"/>
-          <a:lstStyle/>
-          <a:p>
-            <a:pPr algn="ctr"/>
-            <a:r>
-              <a:rPr sz="1200" b="1">
+          <a:bodyPr wrap="square">
+            <a:spAutoFit/>
+          </a:bodyPr>
+          <a:lstStyle/>
+          <a:p>
+            <a:pPr algn="ctr" rtl="0"/>
+            <a:r>
+              <a:rPr sz="1400" b="1">
                 <a:solidFill>
                   <a:srgbClr val="22C55E"/>
                 </a:solidFill>
-                <a:latin typeface="Arial"/>
+                <a:latin typeface="Heebo"/>
               </a:rPr>
               <a:t>איך זה הולך לעבוד</a:t>
             </a:r>
@@ -9509,8 +9827,8 @@
         </p:nvSpPr>
         <p:spPr>
           <a:xfrm>
-            <a:off x="457200" y="1188720"/>
-            <a:ext cx="11247120" cy="914400"/>
+            <a:off x="0" y="1005840"/>
+            <a:ext cx="12191695" cy="640080"/>
           </a:xfrm>
           <a:prstGeom prst="rect">
             <a:avLst/>
@@ -9518,16 +9836,18 @@
           <a:noFill/>
         </p:spPr>
         <p:txBody>
-          <a:bodyPr wrap="square"/>
-          <a:lstStyle/>
-          <a:p>
-            <a:pPr algn="ctr"/>
-            <a:r>
-              <a:rPr sz="3200" b="1">
+          <a:bodyPr wrap="square">
+            <a:spAutoFit/>
+          </a:bodyPr>
+          <a:lstStyle/>
+          <a:p>
+            <a:pPr algn="ctr" rtl="1"/>
+            <a:r>
+              <a:rPr sz="3000" b="1">
                 <a:solidFill>
                   <a:srgbClr val="DCDAD5"/>
                 </a:solidFill>
-                <a:latin typeface="Arial"/>
+                <a:latin typeface="Heebo"/>
               </a:rPr>
               <a:t>מה תדעו לעשות עד סוף הסרטון</a:t>
             </a:r>
@@ -9542,8 +9862,8 @@
         </p:nvSpPr>
         <p:spPr>
           <a:xfrm>
-            <a:off x="7498080" y="2286000"/>
-            <a:ext cx="457200" cy="594360"/>
+            <a:off x="7284567" y="2103120"/>
+            <a:ext cx="457200" cy="457200"/>
           </a:xfrm>
           <a:prstGeom prst="rect">
             <a:avLst/>
@@ -9551,16 +9871,18 @@
           <a:noFill/>
         </p:spPr>
         <p:txBody>
-          <a:bodyPr wrap="square"/>
-          <a:lstStyle/>
-          <a:p>
-            <a:pPr algn="ctr"/>
-            <a:r>
-              <a:rPr sz="1800" b="1">
+          <a:bodyPr wrap="square">
+            <a:spAutoFit/>
+          </a:bodyPr>
+          <a:lstStyle/>
+          <a:p>
+            <a:pPr algn="ctr" rtl="0"/>
+            <a:r>
+              <a:rPr sz="2000" b="1">
                 <a:solidFill>
                   <a:srgbClr val="22C55E"/>
                 </a:solidFill>
-                <a:latin typeface="Arial"/>
+                <a:latin typeface="Heebo"/>
               </a:rPr>
               <a:t>✓</a:t>
             </a:r>
@@ -9575,8 +9897,8 @@
         </p:nvSpPr>
         <p:spPr>
           <a:xfrm>
-            <a:off x="3657600" y="2286000"/>
-            <a:ext cx="3657600" cy="594360"/>
+            <a:off x="3809847" y="2103120"/>
+            <a:ext cx="3291840" cy="457200"/>
           </a:xfrm>
           <a:prstGeom prst="rect">
             <a:avLst/>
@@ -9584,16 +9906,18 @@
           <a:noFill/>
         </p:spPr>
         <p:txBody>
-          <a:bodyPr wrap="square"/>
-          <a:lstStyle/>
-          <a:p>
-            <a:pPr algn="r"/>
+          <a:bodyPr wrap="square">
+            <a:spAutoFit/>
+          </a:bodyPr>
+          <a:lstStyle/>
+          <a:p>
+            <a:pPr algn="r" rtl="1"/>
             <a:r>
               <a:rPr sz="2000" b="0">
                 <a:solidFill>
-                  <a:srgbClr val="DCDAD5"/>
-                </a:solidFill>
-                <a:latin typeface="Arial"/>
+                  <a:srgbClr val="C5C1B9"/>
+                </a:solidFill>
+                <a:latin typeface="Heebo"/>
               </a:rPr>
               <a:t>התקנת Remotion</a:t>
             </a:r>
@@ -9608,8 +9932,8 @@
         </p:nvSpPr>
         <p:spPr>
           <a:xfrm>
-            <a:off x="7498080" y="2880360"/>
-            <a:ext cx="457200" cy="594360"/>
+            <a:off x="7284567" y="2788920"/>
+            <a:ext cx="457200" cy="457200"/>
           </a:xfrm>
           <a:prstGeom prst="rect">
             <a:avLst/>
@@ -9617,16 +9941,18 @@
           <a:noFill/>
         </p:spPr>
         <p:txBody>
-          <a:bodyPr wrap="square"/>
-          <a:lstStyle/>
-          <a:p>
-            <a:pPr algn="ctr"/>
-            <a:r>
-              <a:rPr sz="1800" b="1">
+          <a:bodyPr wrap="square">
+            <a:spAutoFit/>
+          </a:bodyPr>
+          <a:lstStyle/>
+          <a:p>
+            <a:pPr algn="ctr" rtl="0"/>
+            <a:r>
+              <a:rPr sz="2000" b="1">
                 <a:solidFill>
                   <a:srgbClr val="22C55E"/>
                 </a:solidFill>
-                <a:latin typeface="Arial"/>
+                <a:latin typeface="Heebo"/>
               </a:rPr>
               <a:t>✓</a:t>
             </a:r>
@@ -9641,8 +9967,8 @@
         </p:nvSpPr>
         <p:spPr>
           <a:xfrm>
-            <a:off x="3657600" y="2880360"/>
-            <a:ext cx="3657600" cy="594360"/>
+            <a:off x="3809847" y="2788920"/>
+            <a:ext cx="3291840" cy="457200"/>
           </a:xfrm>
           <a:prstGeom prst="rect">
             <a:avLst/>
@@ -9650,16 +9976,18 @@
           <a:noFill/>
         </p:spPr>
         <p:txBody>
-          <a:bodyPr wrap="square"/>
-          <a:lstStyle/>
-          <a:p>
-            <a:pPr algn="r"/>
+          <a:bodyPr wrap="square">
+            <a:spAutoFit/>
+          </a:bodyPr>
+          <a:lstStyle/>
+          <a:p>
+            <a:pPr algn="r" rtl="1"/>
             <a:r>
               <a:rPr sz="2000" b="0">
                 <a:solidFill>
-                  <a:srgbClr val="DCDAD5"/>
-                </a:solidFill>
-                <a:latin typeface="Arial"/>
+                  <a:srgbClr val="C5C1B9"/>
+                </a:solidFill>
+                <a:latin typeface="Heebo"/>
               </a:rPr>
               <a:t>יצירת פרויקט</a:t>
             </a:r>
@@ -9674,8 +10002,8 @@
         </p:nvSpPr>
         <p:spPr>
           <a:xfrm>
-            <a:off x="7498080" y="3474720"/>
-            <a:ext cx="457200" cy="594360"/>
+            <a:off x="7284567" y="3474720"/>
+            <a:ext cx="457200" cy="457200"/>
           </a:xfrm>
           <a:prstGeom prst="rect">
             <a:avLst/>
@@ -9683,16 +10011,18 @@
           <a:noFill/>
         </p:spPr>
         <p:txBody>
-          <a:bodyPr wrap="square"/>
-          <a:lstStyle/>
-          <a:p>
-            <a:pPr algn="ctr"/>
-            <a:r>
-              <a:rPr sz="1800" b="1">
+          <a:bodyPr wrap="square">
+            <a:spAutoFit/>
+          </a:bodyPr>
+          <a:lstStyle/>
+          <a:p>
+            <a:pPr algn="ctr" rtl="0"/>
+            <a:r>
+              <a:rPr sz="2000" b="1">
                 <a:solidFill>
                   <a:srgbClr val="22C55E"/>
                 </a:solidFill>
-                <a:latin typeface="Arial"/>
+                <a:latin typeface="Heebo"/>
               </a:rPr>
               <a:t>✓</a:t>
             </a:r>
@@ -9707,8 +10037,8 @@
         </p:nvSpPr>
         <p:spPr>
           <a:xfrm>
-            <a:off x="3657600" y="3474720"/>
-            <a:ext cx="3657600" cy="594360"/>
+            <a:off x="3809847" y="3474720"/>
+            <a:ext cx="3291840" cy="457200"/>
           </a:xfrm>
           <a:prstGeom prst="rect">
             <a:avLst/>
@@ -9716,16 +10046,18 @@
           <a:noFill/>
         </p:spPr>
         <p:txBody>
-          <a:bodyPr wrap="square"/>
-          <a:lstStyle/>
-          <a:p>
-            <a:pPr algn="r"/>
+          <a:bodyPr wrap="square">
+            <a:spAutoFit/>
+          </a:bodyPr>
+          <a:lstStyle/>
+          <a:p>
+            <a:pPr algn="r" rtl="1"/>
             <a:r>
               <a:rPr sz="2000" b="0">
                 <a:solidFill>
-                  <a:srgbClr val="DCDAD5"/>
-                </a:solidFill>
-                <a:latin typeface="Arial"/>
+                  <a:srgbClr val="C5C1B9"/>
+                </a:solidFill>
+                <a:latin typeface="Heebo"/>
               </a:rPr>
               <a:t>בניית אנימציה</a:t>
             </a:r>
@@ -9740,8 +10072,8 @@
         </p:nvSpPr>
         <p:spPr>
           <a:xfrm>
-            <a:off x="7498080" y="4069080"/>
-            <a:ext cx="457200" cy="594360"/>
+            <a:off x="7284567" y="4160520"/>
+            <a:ext cx="457200" cy="457200"/>
           </a:xfrm>
           <a:prstGeom prst="rect">
             <a:avLst/>
@@ -9749,16 +10081,18 @@
           <a:noFill/>
         </p:spPr>
         <p:txBody>
-          <a:bodyPr wrap="square"/>
-          <a:lstStyle/>
-          <a:p>
-            <a:pPr algn="ctr"/>
-            <a:r>
-              <a:rPr sz="1800" b="1">
+          <a:bodyPr wrap="square">
+            <a:spAutoFit/>
+          </a:bodyPr>
+          <a:lstStyle/>
+          <a:p>
+            <a:pPr algn="ctr" rtl="0"/>
+            <a:r>
+              <a:rPr sz="2000" b="1">
                 <a:solidFill>
                   <a:srgbClr val="22C55E"/>
                 </a:solidFill>
-                <a:latin typeface="Arial"/>
+                <a:latin typeface="Heebo"/>
               </a:rPr>
               <a:t>✓</a:t>
             </a:r>
@@ -9773,8 +10107,8 @@
         </p:nvSpPr>
         <p:spPr>
           <a:xfrm>
-            <a:off x="3657600" y="4069080"/>
-            <a:ext cx="3657600" cy="594360"/>
+            <a:off x="3809847" y="4160520"/>
+            <a:ext cx="3291840" cy="457200"/>
           </a:xfrm>
           <a:prstGeom prst="rect">
             <a:avLst/>
@@ -9782,16 +10116,18 @@
           <a:noFill/>
         </p:spPr>
         <p:txBody>
-          <a:bodyPr wrap="square"/>
-          <a:lstStyle/>
-          <a:p>
-            <a:pPr algn="r"/>
+          <a:bodyPr wrap="square">
+            <a:spAutoFit/>
+          </a:bodyPr>
+          <a:lstStyle/>
+          <a:p>
+            <a:pPr algn="r" rtl="1"/>
             <a:r>
               <a:rPr sz="2000" b="0">
                 <a:solidFill>
-                  <a:srgbClr val="DCDAD5"/>
-                </a:solidFill>
-                <a:latin typeface="Arial"/>
+                  <a:srgbClr val="C5C1B9"/>
+                </a:solidFill>
+                <a:latin typeface="Heebo"/>
               </a:rPr>
               <a:t>הוספת סאונד</a:t>
             </a:r>
@@ -9806,8 +10142,8 @@
         </p:nvSpPr>
         <p:spPr>
           <a:xfrm>
-            <a:off x="7498080" y="4663440"/>
-            <a:ext cx="457200" cy="594360"/>
+            <a:off x="7284567" y="4846320"/>
+            <a:ext cx="457200" cy="457200"/>
           </a:xfrm>
           <a:prstGeom prst="rect">
             <a:avLst/>
@@ -9815,16 +10151,18 @@
           <a:noFill/>
         </p:spPr>
         <p:txBody>
-          <a:bodyPr wrap="square"/>
-          <a:lstStyle/>
-          <a:p>
-            <a:pPr algn="ctr"/>
-            <a:r>
-              <a:rPr sz="1800" b="1">
+          <a:bodyPr wrap="square">
+            <a:spAutoFit/>
+          </a:bodyPr>
+          <a:lstStyle/>
+          <a:p>
+            <a:pPr algn="ctr" rtl="0"/>
+            <a:r>
+              <a:rPr sz="2000" b="1">
                 <a:solidFill>
                   <a:srgbClr val="22C55E"/>
                 </a:solidFill>
-                <a:latin typeface="Arial"/>
+                <a:latin typeface="Heebo"/>
               </a:rPr>
               <a:t>✓</a:t>
             </a:r>
@@ -9839,8 +10177,8 @@
         </p:nvSpPr>
         <p:spPr>
           <a:xfrm>
-            <a:off x="3657600" y="4663440"/>
-            <a:ext cx="3657600" cy="594360"/>
+            <a:off x="3809847" y="4846320"/>
+            <a:ext cx="3291840" cy="457200"/>
           </a:xfrm>
           <a:prstGeom prst="rect">
             <a:avLst/>
@@ -9848,16 +10186,18 @@
           <a:noFill/>
         </p:spPr>
         <p:txBody>
-          <a:bodyPr wrap="square"/>
-          <a:lstStyle/>
-          <a:p>
-            <a:pPr algn="r"/>
+          <a:bodyPr wrap="square">
+            <a:spAutoFit/>
+          </a:bodyPr>
+          <a:lstStyle/>
+          <a:p>
+            <a:pPr algn="r" rtl="1"/>
             <a:r>
               <a:rPr sz="2000" b="0">
                 <a:solidFill>
-                  <a:srgbClr val="DCDAD5"/>
-                </a:solidFill>
-                <a:latin typeface="Arial"/>
+                  <a:srgbClr val="C5C1B9"/>
+                </a:solidFill>
+                <a:latin typeface="Heebo"/>
               </a:rPr>
               <a:t>רינדור ויצוא MP4</a:t>
             </a:r>
@@ -9872,8 +10212,8 @@
         </p:nvSpPr>
         <p:spPr>
           <a:xfrm>
-            <a:off x="2743200" y="5303520"/>
-            <a:ext cx="6675120" cy="457200"/>
+            <a:off x="0" y="5669280"/>
+            <a:ext cx="12191695" cy="457200"/>
           </a:xfrm>
           <a:prstGeom prst="rect">
             <a:avLst/>
@@ -9881,16 +10221,18 @@
           <a:noFill/>
         </p:spPr>
         <p:txBody>
-          <a:bodyPr wrap="square"/>
-          <a:lstStyle/>
-          <a:p>
-            <a:pPr algn="ctr"/>
-            <a:r>
-              <a:rPr sz="1800" b="1">
+          <a:bodyPr wrap="square">
+            <a:spAutoFit/>
+          </a:bodyPr>
+          <a:lstStyle/>
+          <a:p>
+            <a:pPr algn="ctr" rtl="1"/>
+            <a:r>
+              <a:rPr sz="2000" b="1">
                 <a:solidFill>
                   <a:srgbClr val="22C55E"/>
                 </a:solidFill>
-                <a:latin typeface="Arial"/>
+                <a:latin typeface="Heebo"/>
               </a:rPr>
               <a:t>לא תיאוריה. בנייה אמיתית.</a:t>
             </a:r>

--- a/presentation.pptx
+++ b/presentation.pptx
@@ -3129,9 +3129,33 @@
           </a:prstGeom>
         </p:spPr>
       </p:pic>
-      <p:sp>
-        <p:nvSpPr>
-          <p:cNvPr id="3" name="TextBox 2"/>
+      <p:pic>
+        <p:nvPicPr>
+          <p:cNvPr id="3" name="Picture 2" descr="_slide_grid.png"/>
+          <p:cNvPicPr>
+            <a:picLocks noChangeAspect="1"/>
+          </p:cNvPicPr>
+          <p:nvPr/>
+        </p:nvPicPr>
+        <p:blipFill>
+          <a:blip r:embed="rId3"/>
+          <a:stretch>
+            <a:fillRect/>
+          </a:stretch>
+        </p:blipFill>
+        <p:spPr>
+          <a:xfrm>
+            <a:off x="-685800" y="-685800"/>
+            <a:ext cx="13563295" cy="8229600"/>
+          </a:xfrm>
+          <a:prstGeom prst="rect">
+            <a:avLst/>
+          </a:prstGeom>
+        </p:spPr>
+      </p:pic>
+      <p:sp>
+        <p:nvSpPr>
+          <p:cNvPr id="6" name="TextBox 5"/>
           <p:cNvSpPr txBox="1"/>
           <p:nvPr/>
         </p:nvSpPr>
@@ -3166,7 +3190,7 @@
       </p:sp>
       <p:sp>
         <p:nvSpPr>
-          <p:cNvPr id="4" name="TextBox 3"/>
+          <p:cNvPr id="7" name="TextBox 6"/>
           <p:cNvSpPr txBox="1"/>
           <p:nvPr/>
         </p:nvSpPr>
@@ -3201,7 +3225,7 @@
       </p:sp>
       <p:sp>
         <p:nvSpPr>
-          <p:cNvPr id="5" name="TextBox 4"/>
+          <p:cNvPr id="8" name="TextBox 7"/>
           <p:cNvSpPr txBox="1"/>
           <p:nvPr/>
         </p:nvSpPr>
@@ -3259,6 +3283,66 @@
   <p:clrMapOvr>
     <a:masterClrMapping/>
   </p:clrMapOvr>
+  <p:timing>
+    <p:tnLst>
+      <p:par>
+        <p:cTn id="1" dur="indefinite" restart="never" nodeType="tmRoot">
+          <p:childTnLst>
+            <p:seq concurrent="1" nextAc="seek">
+              <p:cTn id="2" dur="indefinite" nodeType="mainSeq">
+                <p:childTnLst>
+                  <p:par>
+                    <p:cTn id="3" fill="hold">
+                      <p:stCondLst>
+                        <p:cond delay="0"/>
+                      </p:stCondLst>
+                      <p:childTnLst>
+                        <p:par>
+                          <p:cTn id="4" fill="hold">
+                            <p:stCondLst>
+                              <p:cond delay="0"/>
+                            </p:stCondLst>
+                            <p:childTnLst>
+                              <p:animMotion origin="layout" path="M 0 0 L 0.03 0.03" pathEditMode="relative" ptsTypes="AA" rAng="0">
+                                <p:cBhvr>
+                                  <p:cTn id="5" dur="8000" repeatCount="indefinite" autoRev="1" fill="hold">
+                                    <p:stCondLst>
+                                      <p:cond delay="0"/>
+                                    </p:stCondLst>
+                                  </p:cTn>
+                                  <p:tgtEl>
+                                    <p:spTgt spid="3"/>
+                                  </p:tgtEl>
+                                </p:cBhvr>
+                              </p:animMotion>
+                            </p:childTnLst>
+                          </p:cTn>
+                        </p:par>
+                      </p:childTnLst>
+                    </p:cTn>
+                  </p:par>
+                </p:childTnLst>
+              </p:cTn>
+              <p:prevCondLst>
+                <p:cond evt="onPrev" delay="0">
+                  <p:tgtEl>
+                    <p:sldTgt/>
+                  </p:tgtEl>
+                </p:cond>
+              </p:prevCondLst>
+              <p:nextCondLst>
+                <p:cond evt="onNext" delay="0">
+                  <p:tgtEl>
+                    <p:sldTgt/>
+                  </p:tgtEl>
+                </p:cond>
+              </p:nextCondLst>
+            </p:seq>
+          </p:childTnLst>
+        </p:cTn>
+      </p:par>
+    </p:tnLst>
+  </p:timing>
 </p:sld>
 </file>
 
@@ -3304,9 +3388,33 @@
           </a:prstGeom>
         </p:spPr>
       </p:pic>
-      <p:sp>
-        <p:nvSpPr>
-          <p:cNvPr id="3" name="TextBox 2"/>
+      <p:pic>
+        <p:nvPicPr>
+          <p:cNvPr id="3" name="Picture 2" descr="_slide_grid.png"/>
+          <p:cNvPicPr>
+            <a:picLocks noChangeAspect="1"/>
+          </p:cNvPicPr>
+          <p:nvPr/>
+        </p:nvPicPr>
+        <p:blipFill>
+          <a:blip r:embed="rId3"/>
+          <a:stretch>
+            <a:fillRect/>
+          </a:stretch>
+        </p:blipFill>
+        <p:spPr>
+          <a:xfrm>
+            <a:off x="-685800" y="-685800"/>
+            <a:ext cx="13563295" cy="8229600"/>
+          </a:xfrm>
+          <a:prstGeom prst="rect">
+            <a:avLst/>
+          </a:prstGeom>
+        </p:spPr>
+      </p:pic>
+      <p:sp>
+        <p:nvSpPr>
+          <p:cNvPr id="6" name="TextBox 5"/>
           <p:cNvSpPr txBox="1"/>
           <p:nvPr/>
         </p:nvSpPr>
@@ -3341,7 +3449,7 @@
       </p:sp>
       <p:sp>
         <p:nvSpPr>
-          <p:cNvPr id="4" name="Rounded Rectangle 3"/>
+          <p:cNvPr id="7" name="Rounded Rectangle 6"/>
           <p:cNvSpPr/>
           <p:nvPr/>
         </p:nvSpPr>
@@ -3388,7 +3496,7 @@
       </p:sp>
       <p:sp>
         <p:nvSpPr>
-          <p:cNvPr id="5" name="TextBox 4"/>
+          <p:cNvPr id="8" name="TextBox 7"/>
           <p:cNvSpPr txBox="1"/>
           <p:nvPr/>
         </p:nvSpPr>
@@ -3423,7 +3531,7 @@
       </p:sp>
       <p:sp>
         <p:nvSpPr>
-          <p:cNvPr id="6" name="TextBox 5"/>
+          <p:cNvPr id="9" name="TextBox 8"/>
           <p:cNvSpPr txBox="1"/>
           <p:nvPr/>
         </p:nvSpPr>
@@ -3458,7 +3566,7 @@
       </p:sp>
       <p:sp>
         <p:nvSpPr>
-          <p:cNvPr id="7" name="TextBox 6"/>
+          <p:cNvPr id="10" name="TextBox 9"/>
           <p:cNvSpPr txBox="1"/>
           <p:nvPr/>
         </p:nvSpPr>
@@ -3493,7 +3601,7 @@
       </p:sp>
       <p:sp>
         <p:nvSpPr>
-          <p:cNvPr id="8" name="Rounded Rectangle 7"/>
+          <p:cNvPr id="11" name="Rounded Rectangle 10"/>
           <p:cNvSpPr/>
           <p:nvPr/>
         </p:nvSpPr>
@@ -3540,7 +3648,7 @@
       </p:sp>
       <p:sp>
         <p:nvSpPr>
-          <p:cNvPr id="9" name="TextBox 8"/>
+          <p:cNvPr id="12" name="TextBox 11"/>
           <p:cNvSpPr txBox="1"/>
           <p:nvPr/>
         </p:nvSpPr>
@@ -3575,7 +3683,7 @@
       </p:sp>
       <p:sp>
         <p:nvSpPr>
-          <p:cNvPr id="10" name="TextBox 9"/>
+          <p:cNvPr id="13" name="TextBox 12"/>
           <p:cNvSpPr txBox="1"/>
           <p:nvPr/>
         </p:nvSpPr>
@@ -3610,7 +3718,7 @@
       </p:sp>
       <p:sp>
         <p:nvSpPr>
-          <p:cNvPr id="11" name="TextBox 10"/>
+          <p:cNvPr id="14" name="TextBox 13"/>
           <p:cNvSpPr txBox="1"/>
           <p:nvPr/>
         </p:nvSpPr>
@@ -3645,7 +3753,7 @@
       </p:sp>
       <p:sp>
         <p:nvSpPr>
-          <p:cNvPr id="12" name="TextBox 11"/>
+          <p:cNvPr id="15" name="TextBox 14"/>
           <p:cNvSpPr txBox="1"/>
           <p:nvPr/>
         </p:nvSpPr>
@@ -3680,7 +3788,7 @@
       </p:sp>
       <p:sp>
         <p:nvSpPr>
-          <p:cNvPr id="13" name="Down Arrow 12"/>
+          <p:cNvPr id="16" name="Down Arrow 15"/>
           <p:cNvSpPr/>
           <p:nvPr/>
         </p:nvSpPr>
@@ -3726,6 +3834,66 @@
   <p:clrMapOvr>
     <a:masterClrMapping/>
   </p:clrMapOvr>
+  <p:timing>
+    <p:tnLst>
+      <p:par>
+        <p:cTn id="1" dur="indefinite" restart="never" nodeType="tmRoot">
+          <p:childTnLst>
+            <p:seq concurrent="1" nextAc="seek">
+              <p:cTn id="2" dur="indefinite" nodeType="mainSeq">
+                <p:childTnLst>
+                  <p:par>
+                    <p:cTn id="3" fill="hold">
+                      <p:stCondLst>
+                        <p:cond delay="0"/>
+                      </p:stCondLst>
+                      <p:childTnLst>
+                        <p:par>
+                          <p:cTn id="4" fill="hold">
+                            <p:stCondLst>
+                              <p:cond delay="0"/>
+                            </p:stCondLst>
+                            <p:childTnLst>
+                              <p:animMotion origin="layout" path="M 0 0 L 0.03 0.03" pathEditMode="relative" ptsTypes="AA" rAng="0">
+                                <p:cBhvr>
+                                  <p:cTn id="5" dur="8000" repeatCount="indefinite" autoRev="1" fill="hold">
+                                    <p:stCondLst>
+                                      <p:cond delay="0"/>
+                                    </p:stCondLst>
+                                  </p:cTn>
+                                  <p:tgtEl>
+                                    <p:spTgt spid="3"/>
+                                  </p:tgtEl>
+                                </p:cBhvr>
+                              </p:animMotion>
+                            </p:childTnLst>
+                          </p:cTn>
+                        </p:par>
+                      </p:childTnLst>
+                    </p:cTn>
+                  </p:par>
+                </p:childTnLst>
+              </p:cTn>
+              <p:prevCondLst>
+                <p:cond evt="onPrev" delay="0">
+                  <p:tgtEl>
+                    <p:sldTgt/>
+                  </p:tgtEl>
+                </p:cond>
+              </p:prevCondLst>
+              <p:nextCondLst>
+                <p:cond evt="onNext" delay="0">
+                  <p:tgtEl>
+                    <p:sldTgt/>
+                  </p:tgtEl>
+                </p:cond>
+              </p:nextCondLst>
+            </p:seq>
+          </p:childTnLst>
+        </p:cTn>
+      </p:par>
+    </p:tnLst>
+  </p:timing>
 </p:sld>
 </file>
 
@@ -3771,9 +3939,33 @@
           </a:prstGeom>
         </p:spPr>
       </p:pic>
-      <p:sp>
-        <p:nvSpPr>
-          <p:cNvPr id="3" name="Rounded Rectangle 2"/>
+      <p:pic>
+        <p:nvPicPr>
+          <p:cNvPr id="3" name="Picture 2" descr="_slide_grid.png"/>
+          <p:cNvPicPr>
+            <a:picLocks noChangeAspect="1"/>
+          </p:cNvPicPr>
+          <p:nvPr/>
+        </p:nvPicPr>
+        <p:blipFill>
+          <a:blip r:embed="rId3"/>
+          <a:stretch>
+            <a:fillRect/>
+          </a:stretch>
+        </p:blipFill>
+        <p:spPr>
+          <a:xfrm>
+            <a:off x="-685800" y="-685800"/>
+            <a:ext cx="13563295" cy="8229600"/>
+          </a:xfrm>
+          <a:prstGeom prst="rect">
+            <a:avLst/>
+          </a:prstGeom>
+        </p:spPr>
+      </p:pic>
+      <p:sp>
+        <p:nvSpPr>
+          <p:cNvPr id="6" name="Rounded Rectangle 5"/>
           <p:cNvSpPr/>
           <p:nvPr/>
         </p:nvSpPr>
@@ -3820,7 +4012,7 @@
       </p:sp>
       <p:sp>
         <p:nvSpPr>
-          <p:cNvPr id="4" name="Oval 3"/>
+          <p:cNvPr id="7" name="Oval 6"/>
           <p:cNvSpPr/>
           <p:nvPr/>
         </p:nvSpPr>
@@ -3863,7 +4055,7 @@
       </p:sp>
       <p:sp>
         <p:nvSpPr>
-          <p:cNvPr id="5" name="Oval 4"/>
+          <p:cNvPr id="8" name="Oval 7"/>
           <p:cNvSpPr/>
           <p:nvPr/>
         </p:nvSpPr>
@@ -3906,7 +4098,7 @@
       </p:sp>
       <p:sp>
         <p:nvSpPr>
-          <p:cNvPr id="6" name="Oval 5"/>
+          <p:cNvPr id="9" name="Oval 8"/>
           <p:cNvSpPr/>
           <p:nvPr/>
         </p:nvSpPr>
@@ -3949,7 +4141,7 @@
       </p:sp>
       <p:sp>
         <p:nvSpPr>
-          <p:cNvPr id="7" name="TextBox 6"/>
+          <p:cNvPr id="10" name="TextBox 9"/>
           <p:cNvSpPr txBox="1"/>
           <p:nvPr/>
         </p:nvSpPr>
@@ -3984,7 +4176,7 @@
       </p:sp>
       <p:sp>
         <p:nvSpPr>
-          <p:cNvPr id="8" name="TextBox 7"/>
+          <p:cNvPr id="11" name="TextBox 10"/>
           <p:cNvSpPr txBox="1"/>
           <p:nvPr/>
         </p:nvSpPr>
@@ -4028,7 +4220,7 @@
       </p:sp>
       <p:sp>
         <p:nvSpPr>
-          <p:cNvPr id="9" name="Right Arrow 8"/>
+          <p:cNvPr id="12" name="Right Arrow 11"/>
           <p:cNvSpPr/>
           <p:nvPr/>
         </p:nvSpPr>
@@ -4071,7 +4263,7 @@
       </p:sp>
       <p:sp>
         <p:nvSpPr>
-          <p:cNvPr id="10" name="Rounded Rectangle 9"/>
+          <p:cNvPr id="13" name="Rounded Rectangle 12"/>
           <p:cNvSpPr/>
           <p:nvPr/>
         </p:nvSpPr>
@@ -4118,7 +4310,7 @@
       </p:sp>
       <p:sp>
         <p:nvSpPr>
-          <p:cNvPr id="11" name="Oval 10"/>
+          <p:cNvPr id="14" name="Oval 13"/>
           <p:cNvSpPr/>
           <p:nvPr/>
         </p:nvSpPr>
@@ -4161,7 +4353,7 @@
       </p:sp>
       <p:sp>
         <p:nvSpPr>
-          <p:cNvPr id="12" name="Oval 11"/>
+          <p:cNvPr id="15" name="Oval 14"/>
           <p:cNvSpPr/>
           <p:nvPr/>
         </p:nvSpPr>
@@ -4204,7 +4396,7 @@
       </p:sp>
       <p:sp>
         <p:nvSpPr>
-          <p:cNvPr id="13" name="Oval 12"/>
+          <p:cNvPr id="16" name="Oval 15"/>
           <p:cNvSpPr/>
           <p:nvPr/>
         </p:nvSpPr>
@@ -4247,7 +4439,7 @@
       </p:sp>
       <p:sp>
         <p:nvSpPr>
-          <p:cNvPr id="14" name="Rounded Rectangle 13"/>
+          <p:cNvPr id="17" name="Rounded Rectangle 16"/>
           <p:cNvSpPr/>
           <p:nvPr/>
         </p:nvSpPr>
@@ -4292,7 +4484,7 @@
       </p:sp>
       <p:sp>
         <p:nvSpPr>
-          <p:cNvPr id="15" name="Rounded Rectangle 14"/>
+          <p:cNvPr id="18" name="Rounded Rectangle 17"/>
           <p:cNvSpPr/>
           <p:nvPr/>
         </p:nvSpPr>
@@ -4337,7 +4529,7 @@
       </p:sp>
       <p:sp>
         <p:nvSpPr>
-          <p:cNvPr id="16" name="Rounded Rectangle 15"/>
+          <p:cNvPr id="19" name="Rounded Rectangle 18"/>
           <p:cNvSpPr/>
           <p:nvPr/>
         </p:nvSpPr>
@@ -4382,7 +4574,7 @@
       </p:sp>
       <p:sp>
         <p:nvSpPr>
-          <p:cNvPr id="17" name="Rounded Rectangle 16"/>
+          <p:cNvPr id="20" name="Rounded Rectangle 19"/>
           <p:cNvSpPr/>
           <p:nvPr/>
         </p:nvSpPr>
@@ -4427,7 +4619,7 @@
       </p:sp>
       <p:sp>
         <p:nvSpPr>
-          <p:cNvPr id="18" name="Rounded Rectangle 17"/>
+          <p:cNvPr id="21" name="Rounded Rectangle 20"/>
           <p:cNvSpPr/>
           <p:nvPr/>
         </p:nvSpPr>
@@ -4472,7 +4664,7 @@
       </p:sp>
       <p:sp>
         <p:nvSpPr>
-          <p:cNvPr id="19" name="Rounded Rectangle 18"/>
+          <p:cNvPr id="22" name="Rounded Rectangle 21"/>
           <p:cNvSpPr/>
           <p:nvPr/>
         </p:nvSpPr>
@@ -4517,7 +4709,7 @@
       </p:sp>
       <p:sp>
         <p:nvSpPr>
-          <p:cNvPr id="20" name="Rounded Rectangle 19"/>
+          <p:cNvPr id="23" name="Rounded Rectangle 22"/>
           <p:cNvSpPr/>
           <p:nvPr/>
         </p:nvSpPr>
@@ -4562,7 +4754,7 @@
       </p:sp>
       <p:sp>
         <p:nvSpPr>
-          <p:cNvPr id="21" name="Rounded Rectangle 20"/>
+          <p:cNvPr id="24" name="Rounded Rectangle 23"/>
           <p:cNvSpPr/>
           <p:nvPr/>
         </p:nvSpPr>
@@ -4610,6 +4802,66 @@
   <p:clrMapOvr>
     <a:masterClrMapping/>
   </p:clrMapOvr>
+  <p:timing>
+    <p:tnLst>
+      <p:par>
+        <p:cTn id="1" dur="indefinite" restart="never" nodeType="tmRoot">
+          <p:childTnLst>
+            <p:seq concurrent="1" nextAc="seek">
+              <p:cTn id="2" dur="indefinite" nodeType="mainSeq">
+                <p:childTnLst>
+                  <p:par>
+                    <p:cTn id="3" fill="hold">
+                      <p:stCondLst>
+                        <p:cond delay="0"/>
+                      </p:stCondLst>
+                      <p:childTnLst>
+                        <p:par>
+                          <p:cTn id="4" fill="hold">
+                            <p:stCondLst>
+                              <p:cond delay="0"/>
+                            </p:stCondLst>
+                            <p:childTnLst>
+                              <p:animMotion origin="layout" path="M 0 0 L 0.03 0.03" pathEditMode="relative" ptsTypes="AA" rAng="0">
+                                <p:cBhvr>
+                                  <p:cTn id="5" dur="8000" repeatCount="indefinite" autoRev="1" fill="hold">
+                                    <p:stCondLst>
+                                      <p:cond delay="0"/>
+                                    </p:stCondLst>
+                                  </p:cTn>
+                                  <p:tgtEl>
+                                    <p:spTgt spid="3"/>
+                                  </p:tgtEl>
+                                </p:cBhvr>
+                              </p:animMotion>
+                            </p:childTnLst>
+                          </p:cTn>
+                        </p:par>
+                      </p:childTnLst>
+                    </p:cTn>
+                  </p:par>
+                </p:childTnLst>
+              </p:cTn>
+              <p:prevCondLst>
+                <p:cond evt="onPrev" delay="0">
+                  <p:tgtEl>
+                    <p:sldTgt/>
+                  </p:tgtEl>
+                </p:cond>
+              </p:prevCondLst>
+              <p:nextCondLst>
+                <p:cond evt="onNext" delay="0">
+                  <p:tgtEl>
+                    <p:sldTgt/>
+                  </p:tgtEl>
+                </p:cond>
+              </p:nextCondLst>
+            </p:seq>
+          </p:childTnLst>
+        </p:cTn>
+      </p:par>
+    </p:tnLst>
+  </p:timing>
 </p:sld>
 </file>
 
@@ -4655,9 +4907,33 @@
           </a:prstGeom>
         </p:spPr>
       </p:pic>
-      <p:sp>
-        <p:nvSpPr>
-          <p:cNvPr id="3" name="TextBox 2"/>
+      <p:pic>
+        <p:nvPicPr>
+          <p:cNvPr id="3" name="Picture 2" descr="_slide_grid.png"/>
+          <p:cNvPicPr>
+            <a:picLocks noChangeAspect="1"/>
+          </p:cNvPicPr>
+          <p:nvPr/>
+        </p:nvPicPr>
+        <p:blipFill>
+          <a:blip r:embed="rId3"/>
+          <a:stretch>
+            <a:fillRect/>
+          </a:stretch>
+        </p:blipFill>
+        <p:spPr>
+          <a:xfrm>
+            <a:off x="-685800" y="-685800"/>
+            <a:ext cx="13563295" cy="8229600"/>
+          </a:xfrm>
+          <a:prstGeom prst="rect">
+            <a:avLst/>
+          </a:prstGeom>
+        </p:spPr>
+      </p:pic>
+      <p:sp>
+        <p:nvSpPr>
+          <p:cNvPr id="6" name="TextBox 5"/>
           <p:cNvSpPr txBox="1"/>
           <p:nvPr/>
         </p:nvSpPr>
@@ -4692,7 +4968,7 @@
       </p:sp>
       <p:sp>
         <p:nvSpPr>
-          <p:cNvPr id="4" name="TextBox 3"/>
+          <p:cNvPr id="7" name="TextBox 6"/>
           <p:cNvSpPr txBox="1"/>
           <p:nvPr/>
         </p:nvSpPr>
@@ -4727,7 +5003,7 @@
       </p:sp>
       <p:sp>
         <p:nvSpPr>
-          <p:cNvPr id="5" name="TextBox 4"/>
+          <p:cNvPr id="8" name="TextBox 7"/>
           <p:cNvSpPr txBox="1"/>
           <p:nvPr/>
         </p:nvSpPr>
@@ -4762,7 +5038,7 @@
       </p:sp>
       <p:sp>
         <p:nvSpPr>
-          <p:cNvPr id="6" name="TextBox 5"/>
+          <p:cNvPr id="9" name="TextBox 8"/>
           <p:cNvSpPr txBox="1"/>
           <p:nvPr/>
         </p:nvSpPr>
@@ -4797,7 +5073,7 @@
       </p:sp>
       <p:sp>
         <p:nvSpPr>
-          <p:cNvPr id="7" name="TextBox 6"/>
+          <p:cNvPr id="10" name="TextBox 9"/>
           <p:cNvSpPr txBox="1"/>
           <p:nvPr/>
         </p:nvSpPr>
@@ -4832,7 +5108,7 @@
       </p:sp>
       <p:sp>
         <p:nvSpPr>
-          <p:cNvPr id="8" name="TextBox 7"/>
+          <p:cNvPr id="11" name="TextBox 10"/>
           <p:cNvSpPr txBox="1"/>
           <p:nvPr/>
         </p:nvSpPr>
@@ -4867,7 +5143,7 @@
       </p:sp>
       <p:sp>
         <p:nvSpPr>
-          <p:cNvPr id="9" name="TextBox 8"/>
+          <p:cNvPr id="12" name="TextBox 11"/>
           <p:cNvSpPr txBox="1"/>
           <p:nvPr/>
         </p:nvSpPr>
@@ -4902,7 +5178,7 @@
       </p:sp>
       <p:sp>
         <p:nvSpPr>
-          <p:cNvPr id="10" name="TextBox 9"/>
+          <p:cNvPr id="13" name="TextBox 12"/>
           <p:cNvSpPr txBox="1"/>
           <p:nvPr/>
         </p:nvSpPr>
@@ -4937,7 +5213,7 @@
       </p:sp>
       <p:sp>
         <p:nvSpPr>
-          <p:cNvPr id="11" name="TextBox 10"/>
+          <p:cNvPr id="14" name="TextBox 13"/>
           <p:cNvSpPr txBox="1"/>
           <p:nvPr/>
         </p:nvSpPr>
@@ -4972,7 +5248,7 @@
       </p:sp>
       <p:sp>
         <p:nvSpPr>
-          <p:cNvPr id="12" name="TextBox 11"/>
+          <p:cNvPr id="15" name="TextBox 14"/>
           <p:cNvSpPr txBox="1"/>
           <p:nvPr/>
         </p:nvSpPr>
@@ -5007,7 +5283,7 @@
       </p:sp>
       <p:sp>
         <p:nvSpPr>
-          <p:cNvPr id="13" name="TextBox 12"/>
+          <p:cNvPr id="16" name="TextBox 15"/>
           <p:cNvSpPr txBox="1"/>
           <p:nvPr/>
         </p:nvSpPr>
@@ -5042,7 +5318,7 @@
       </p:sp>
       <p:sp>
         <p:nvSpPr>
-          <p:cNvPr id="14" name="TextBox 13"/>
+          <p:cNvPr id="17" name="TextBox 16"/>
           <p:cNvSpPr txBox="1"/>
           <p:nvPr/>
         </p:nvSpPr>
@@ -5077,7 +5353,7 @@
       </p:sp>
       <p:sp>
         <p:nvSpPr>
-          <p:cNvPr id="15" name="Rounded Rectangle 14"/>
+          <p:cNvPr id="18" name="Rounded Rectangle 17"/>
           <p:cNvSpPr/>
           <p:nvPr/>
         </p:nvSpPr>
@@ -5124,7 +5400,7 @@
       </p:sp>
       <p:sp>
         <p:nvSpPr>
-          <p:cNvPr id="16" name="Rounded Rectangle 15"/>
+          <p:cNvPr id="19" name="Rounded Rectangle 18"/>
           <p:cNvSpPr/>
           <p:nvPr/>
         </p:nvSpPr>
@@ -5171,7 +5447,7 @@
       </p:sp>
       <p:sp>
         <p:nvSpPr>
-          <p:cNvPr id="17" name="Rounded Rectangle 16"/>
+          <p:cNvPr id="20" name="Rounded Rectangle 19"/>
           <p:cNvSpPr/>
           <p:nvPr/>
         </p:nvSpPr>
@@ -5218,7 +5494,7 @@
       </p:sp>
       <p:sp>
         <p:nvSpPr>
-          <p:cNvPr id="18" name="Rounded Rectangle 17"/>
+          <p:cNvPr id="21" name="Rounded Rectangle 20"/>
           <p:cNvSpPr/>
           <p:nvPr/>
         </p:nvSpPr>
@@ -5265,7 +5541,7 @@
       </p:sp>
       <p:sp>
         <p:nvSpPr>
-          <p:cNvPr id="19" name="TextBox 18"/>
+          <p:cNvPr id="22" name="TextBox 21"/>
           <p:cNvSpPr txBox="1"/>
           <p:nvPr/>
         </p:nvSpPr>
@@ -5300,7 +5576,7 @@
       </p:sp>
       <p:sp>
         <p:nvSpPr>
-          <p:cNvPr id="20" name="Rounded Rectangle 19"/>
+          <p:cNvPr id="23" name="Rounded Rectangle 22"/>
           <p:cNvSpPr/>
           <p:nvPr/>
         </p:nvSpPr>
@@ -5347,7 +5623,7 @@
       </p:sp>
       <p:sp>
         <p:nvSpPr>
-          <p:cNvPr id="21" name="TextBox 20"/>
+          <p:cNvPr id="24" name="TextBox 23"/>
           <p:cNvSpPr txBox="1"/>
           <p:nvPr/>
         </p:nvSpPr>
@@ -5382,7 +5658,7 @@
       </p:sp>
       <p:sp>
         <p:nvSpPr>
-          <p:cNvPr id="22" name="Rounded Rectangle 21"/>
+          <p:cNvPr id="25" name="Rounded Rectangle 24"/>
           <p:cNvSpPr/>
           <p:nvPr/>
         </p:nvSpPr>
@@ -5429,7 +5705,7 @@
       </p:sp>
       <p:sp>
         <p:nvSpPr>
-          <p:cNvPr id="23" name="Rounded Rectangle 22"/>
+          <p:cNvPr id="26" name="Rounded Rectangle 25"/>
           <p:cNvSpPr/>
           <p:nvPr/>
         </p:nvSpPr>
@@ -5476,7 +5752,7 @@
       </p:sp>
       <p:sp>
         <p:nvSpPr>
-          <p:cNvPr id="24" name="Rounded Rectangle 23"/>
+          <p:cNvPr id="27" name="Rounded Rectangle 26"/>
           <p:cNvSpPr/>
           <p:nvPr/>
         </p:nvSpPr>
@@ -5523,7 +5799,7 @@
       </p:sp>
       <p:sp>
         <p:nvSpPr>
-          <p:cNvPr id="25" name="TextBox 24"/>
+          <p:cNvPr id="28" name="TextBox 27"/>
           <p:cNvSpPr txBox="1"/>
           <p:nvPr/>
         </p:nvSpPr>
@@ -5558,7 +5834,7 @@
       </p:sp>
       <p:sp>
         <p:nvSpPr>
-          <p:cNvPr id="26" name="Rounded Rectangle 25"/>
+          <p:cNvPr id="29" name="Rounded Rectangle 28"/>
           <p:cNvSpPr/>
           <p:nvPr/>
         </p:nvSpPr>
@@ -5605,7 +5881,7 @@
       </p:sp>
       <p:sp>
         <p:nvSpPr>
-          <p:cNvPr id="27" name="Rounded Rectangle 26"/>
+          <p:cNvPr id="30" name="Rounded Rectangle 29"/>
           <p:cNvSpPr/>
           <p:nvPr/>
         </p:nvSpPr>
@@ -5652,7 +5928,7 @@
       </p:sp>
       <p:sp>
         <p:nvSpPr>
-          <p:cNvPr id="28" name="Rounded Rectangle 27"/>
+          <p:cNvPr id="31" name="Rounded Rectangle 30"/>
           <p:cNvSpPr/>
           <p:nvPr/>
         </p:nvSpPr>
@@ -5699,7 +5975,7 @@
       </p:sp>
       <p:sp>
         <p:nvSpPr>
-          <p:cNvPr id="29" name="Rounded Rectangle 28"/>
+          <p:cNvPr id="32" name="Rounded Rectangle 31"/>
           <p:cNvSpPr/>
           <p:nvPr/>
         </p:nvSpPr>
@@ -5746,7 +6022,7 @@
       </p:sp>
       <p:sp>
         <p:nvSpPr>
-          <p:cNvPr id="30" name="TextBox 29"/>
+          <p:cNvPr id="33" name="TextBox 32"/>
           <p:cNvSpPr txBox="1"/>
           <p:nvPr/>
         </p:nvSpPr>
@@ -5781,7 +6057,7 @@
       </p:sp>
       <p:sp>
         <p:nvSpPr>
-          <p:cNvPr id="31" name="Rounded Rectangle 30"/>
+          <p:cNvPr id="34" name="Rounded Rectangle 33"/>
           <p:cNvSpPr/>
           <p:nvPr/>
         </p:nvSpPr>
@@ -5828,7 +6104,7 @@
       </p:sp>
       <p:sp>
         <p:nvSpPr>
-          <p:cNvPr id="32" name="Rounded Rectangle 31"/>
+          <p:cNvPr id="35" name="Rounded Rectangle 34"/>
           <p:cNvSpPr/>
           <p:nvPr/>
         </p:nvSpPr>
@@ -5875,7 +6151,7 @@
       </p:sp>
       <p:sp>
         <p:nvSpPr>
-          <p:cNvPr id="33" name="TextBox 32"/>
+          <p:cNvPr id="36" name="TextBox 35"/>
           <p:cNvSpPr txBox="1"/>
           <p:nvPr/>
         </p:nvSpPr>
@@ -5910,7 +6186,7 @@
       </p:sp>
       <p:sp>
         <p:nvSpPr>
-          <p:cNvPr id="34" name="Rounded Rectangle 33"/>
+          <p:cNvPr id="37" name="Rounded Rectangle 36"/>
           <p:cNvSpPr/>
           <p:nvPr/>
         </p:nvSpPr>
@@ -5957,7 +6233,7 @@
       </p:sp>
       <p:sp>
         <p:nvSpPr>
-          <p:cNvPr id="35" name="Rounded Rectangle 34"/>
+          <p:cNvPr id="38" name="Rounded Rectangle 37"/>
           <p:cNvSpPr/>
           <p:nvPr/>
         </p:nvSpPr>
@@ -6004,7 +6280,7 @@
       </p:sp>
       <p:sp>
         <p:nvSpPr>
-          <p:cNvPr id="36" name="Rounded Rectangle 35"/>
+          <p:cNvPr id="39" name="Rounded Rectangle 38"/>
           <p:cNvSpPr/>
           <p:nvPr/>
         </p:nvSpPr>
@@ -6051,7 +6327,7 @@
       </p:sp>
       <p:sp>
         <p:nvSpPr>
-          <p:cNvPr id="37" name="Rectangle 36"/>
+          <p:cNvPr id="40" name="Rectangle 39"/>
           <p:cNvSpPr/>
           <p:nvPr/>
         </p:nvSpPr>
@@ -6097,6 +6373,66 @@
   <p:clrMapOvr>
     <a:masterClrMapping/>
   </p:clrMapOvr>
+  <p:timing>
+    <p:tnLst>
+      <p:par>
+        <p:cTn id="1" dur="indefinite" restart="never" nodeType="tmRoot">
+          <p:childTnLst>
+            <p:seq concurrent="1" nextAc="seek">
+              <p:cTn id="2" dur="indefinite" nodeType="mainSeq">
+                <p:childTnLst>
+                  <p:par>
+                    <p:cTn id="3" fill="hold">
+                      <p:stCondLst>
+                        <p:cond delay="0"/>
+                      </p:stCondLst>
+                      <p:childTnLst>
+                        <p:par>
+                          <p:cTn id="4" fill="hold">
+                            <p:stCondLst>
+                              <p:cond delay="0"/>
+                            </p:stCondLst>
+                            <p:childTnLst>
+                              <p:animMotion origin="layout" path="M 0 0 L 0.03 0.03" pathEditMode="relative" ptsTypes="AA" rAng="0">
+                                <p:cBhvr>
+                                  <p:cTn id="5" dur="8000" repeatCount="indefinite" autoRev="1" fill="hold">
+                                    <p:stCondLst>
+                                      <p:cond delay="0"/>
+                                    </p:stCondLst>
+                                  </p:cTn>
+                                  <p:tgtEl>
+                                    <p:spTgt spid="3"/>
+                                  </p:tgtEl>
+                                </p:cBhvr>
+                              </p:animMotion>
+                            </p:childTnLst>
+                          </p:cTn>
+                        </p:par>
+                      </p:childTnLst>
+                    </p:cTn>
+                  </p:par>
+                </p:childTnLst>
+              </p:cTn>
+              <p:prevCondLst>
+                <p:cond evt="onPrev" delay="0">
+                  <p:tgtEl>
+                    <p:sldTgt/>
+                  </p:tgtEl>
+                </p:cond>
+              </p:prevCondLst>
+              <p:nextCondLst>
+                <p:cond evt="onNext" delay="0">
+                  <p:tgtEl>
+                    <p:sldTgt/>
+                  </p:tgtEl>
+                </p:cond>
+              </p:nextCondLst>
+            </p:seq>
+          </p:childTnLst>
+        </p:cTn>
+      </p:par>
+    </p:tnLst>
+  </p:timing>
 </p:sld>
 </file>
 
@@ -6142,9 +6478,33 @@
           </a:prstGeom>
         </p:spPr>
       </p:pic>
-      <p:sp>
-        <p:nvSpPr>
-          <p:cNvPr id="3" name="TextBox 2"/>
+      <p:pic>
+        <p:nvPicPr>
+          <p:cNvPr id="3" name="Picture 2" descr="_slide_grid.png"/>
+          <p:cNvPicPr>
+            <a:picLocks noChangeAspect="1"/>
+          </p:cNvPicPr>
+          <p:nvPr/>
+        </p:nvPicPr>
+        <p:blipFill>
+          <a:blip r:embed="rId3"/>
+          <a:stretch>
+            <a:fillRect/>
+          </a:stretch>
+        </p:blipFill>
+        <p:spPr>
+          <a:xfrm>
+            <a:off x="-685800" y="-685800"/>
+            <a:ext cx="13563295" cy="8229600"/>
+          </a:xfrm>
+          <a:prstGeom prst="rect">
+            <a:avLst/>
+          </a:prstGeom>
+        </p:spPr>
+      </p:pic>
+      <p:sp>
+        <p:nvSpPr>
+          <p:cNvPr id="6" name="TextBox 5"/>
           <p:cNvSpPr txBox="1"/>
           <p:nvPr/>
         </p:nvSpPr>
@@ -6179,7 +6539,7 @@
       </p:sp>
       <p:sp>
         <p:nvSpPr>
-          <p:cNvPr id="4" name="TextBox 3"/>
+          <p:cNvPr id="7" name="TextBox 6"/>
           <p:cNvSpPr txBox="1"/>
           <p:nvPr/>
         </p:nvSpPr>
@@ -6214,7 +6574,7 @@
       </p:sp>
       <p:sp>
         <p:nvSpPr>
-          <p:cNvPr id="5" name="TextBox 4"/>
+          <p:cNvPr id="8" name="TextBox 7"/>
           <p:cNvSpPr txBox="1"/>
           <p:nvPr/>
         </p:nvSpPr>
@@ -6249,7 +6609,7 @@
       </p:sp>
       <p:sp>
         <p:nvSpPr>
-          <p:cNvPr id="6" name="TextBox 5"/>
+          <p:cNvPr id="9" name="TextBox 8"/>
           <p:cNvSpPr txBox="1"/>
           <p:nvPr/>
         </p:nvSpPr>
@@ -6284,7 +6644,7 @@
       </p:sp>
       <p:sp>
         <p:nvSpPr>
-          <p:cNvPr id="7" name="Rounded Rectangle 6"/>
+          <p:cNvPr id="10" name="Rounded Rectangle 9"/>
           <p:cNvSpPr/>
           <p:nvPr/>
         </p:nvSpPr>
@@ -6331,7 +6691,7 @@
       </p:sp>
       <p:sp>
         <p:nvSpPr>
-          <p:cNvPr id="8" name="Oval 7"/>
+          <p:cNvPr id="11" name="Oval 10"/>
           <p:cNvSpPr/>
           <p:nvPr/>
         </p:nvSpPr>
@@ -6374,7 +6734,7 @@
       </p:sp>
       <p:sp>
         <p:nvSpPr>
-          <p:cNvPr id="9" name="Oval 8"/>
+          <p:cNvPr id="12" name="Oval 11"/>
           <p:cNvSpPr/>
           <p:nvPr/>
         </p:nvSpPr>
@@ -6417,7 +6777,7 @@
       </p:sp>
       <p:sp>
         <p:nvSpPr>
-          <p:cNvPr id="10" name="Oval 9"/>
+          <p:cNvPr id="13" name="Oval 12"/>
           <p:cNvSpPr/>
           <p:nvPr/>
         </p:nvSpPr>
@@ -6460,7 +6820,7 @@
       </p:sp>
       <p:sp>
         <p:nvSpPr>
-          <p:cNvPr id="11" name="TextBox 10"/>
+          <p:cNvPr id="14" name="TextBox 13"/>
           <p:cNvSpPr txBox="1"/>
           <p:nvPr/>
         </p:nvSpPr>
@@ -6495,7 +6855,7 @@
       </p:sp>
       <p:sp>
         <p:nvSpPr>
-          <p:cNvPr id="12" name="TextBox 11"/>
+          <p:cNvPr id="15" name="TextBox 14"/>
           <p:cNvSpPr txBox="1"/>
           <p:nvPr/>
         </p:nvSpPr>
@@ -6544,7 +6904,7 @@
       </p:sp>
       <p:sp>
         <p:nvSpPr>
-          <p:cNvPr id="13" name="Rounded Rectangle 12"/>
+          <p:cNvPr id="16" name="Rounded Rectangle 15"/>
           <p:cNvSpPr/>
           <p:nvPr/>
         </p:nvSpPr>
@@ -6591,7 +6951,7 @@
       </p:sp>
       <p:sp>
         <p:nvSpPr>
-          <p:cNvPr id="14" name="Oval 13"/>
+          <p:cNvPr id="17" name="Oval 16"/>
           <p:cNvSpPr/>
           <p:nvPr/>
         </p:nvSpPr>
@@ -6634,7 +6994,7 @@
       </p:sp>
       <p:sp>
         <p:nvSpPr>
-          <p:cNvPr id="15" name="Oval 14"/>
+          <p:cNvPr id="18" name="Oval 17"/>
           <p:cNvSpPr/>
           <p:nvPr/>
         </p:nvSpPr>
@@ -6677,7 +7037,7 @@
       </p:sp>
       <p:sp>
         <p:nvSpPr>
-          <p:cNvPr id="16" name="Oval 15"/>
+          <p:cNvPr id="19" name="Oval 18"/>
           <p:cNvSpPr/>
           <p:nvPr/>
         </p:nvSpPr>
@@ -6720,7 +7080,7 @@
       </p:sp>
       <p:sp>
         <p:nvSpPr>
-          <p:cNvPr id="17" name="TextBox 16"/>
+          <p:cNvPr id="20" name="TextBox 19"/>
           <p:cNvSpPr txBox="1"/>
           <p:nvPr/>
         </p:nvSpPr>
@@ -6755,7 +7115,7 @@
       </p:sp>
       <p:sp>
         <p:nvSpPr>
-          <p:cNvPr id="18" name="Rectangle 17"/>
+          <p:cNvPr id="21" name="Rectangle 20"/>
           <p:cNvSpPr/>
           <p:nvPr/>
         </p:nvSpPr>
@@ -6798,7 +7158,7 @@
       </p:sp>
       <p:sp>
         <p:nvSpPr>
-          <p:cNvPr id="19" name="TextBox 18"/>
+          <p:cNvPr id="22" name="TextBox 21"/>
           <p:cNvSpPr txBox="1"/>
           <p:nvPr/>
         </p:nvSpPr>
@@ -6833,7 +7193,7 @@
       </p:sp>
       <p:sp>
         <p:nvSpPr>
-          <p:cNvPr id="20" name="Oval 19"/>
+          <p:cNvPr id="23" name="Oval 22"/>
           <p:cNvSpPr/>
           <p:nvPr/>
         </p:nvSpPr>
@@ -6879,6 +7239,66 @@
   <p:clrMapOvr>
     <a:masterClrMapping/>
   </p:clrMapOvr>
+  <p:timing>
+    <p:tnLst>
+      <p:par>
+        <p:cTn id="1" dur="indefinite" restart="never" nodeType="tmRoot">
+          <p:childTnLst>
+            <p:seq concurrent="1" nextAc="seek">
+              <p:cTn id="2" dur="indefinite" nodeType="mainSeq">
+                <p:childTnLst>
+                  <p:par>
+                    <p:cTn id="3" fill="hold">
+                      <p:stCondLst>
+                        <p:cond delay="0"/>
+                      </p:stCondLst>
+                      <p:childTnLst>
+                        <p:par>
+                          <p:cTn id="4" fill="hold">
+                            <p:stCondLst>
+                              <p:cond delay="0"/>
+                            </p:stCondLst>
+                            <p:childTnLst>
+                              <p:animMotion origin="layout" path="M 0 0 L 0.03 0.03" pathEditMode="relative" ptsTypes="AA" rAng="0">
+                                <p:cBhvr>
+                                  <p:cTn id="5" dur="8000" repeatCount="indefinite" autoRev="1" fill="hold">
+                                    <p:stCondLst>
+                                      <p:cond delay="0"/>
+                                    </p:stCondLst>
+                                  </p:cTn>
+                                  <p:tgtEl>
+                                    <p:spTgt spid="3"/>
+                                  </p:tgtEl>
+                                </p:cBhvr>
+                              </p:animMotion>
+                            </p:childTnLst>
+                          </p:cTn>
+                        </p:par>
+                      </p:childTnLst>
+                    </p:cTn>
+                  </p:par>
+                </p:childTnLst>
+              </p:cTn>
+              <p:prevCondLst>
+                <p:cond evt="onPrev" delay="0">
+                  <p:tgtEl>
+                    <p:sldTgt/>
+                  </p:tgtEl>
+                </p:cond>
+              </p:prevCondLst>
+              <p:nextCondLst>
+                <p:cond evt="onNext" delay="0">
+                  <p:tgtEl>
+                    <p:sldTgt/>
+                  </p:tgtEl>
+                </p:cond>
+              </p:nextCondLst>
+            </p:seq>
+          </p:childTnLst>
+        </p:cTn>
+      </p:par>
+    </p:tnLst>
+  </p:timing>
 </p:sld>
 </file>
 
@@ -6924,9 +7344,33 @@
           </a:prstGeom>
         </p:spPr>
       </p:pic>
-      <p:sp>
-        <p:nvSpPr>
-          <p:cNvPr id="3" name="TextBox 2"/>
+      <p:pic>
+        <p:nvPicPr>
+          <p:cNvPr id="3" name="Picture 2" descr="_slide_grid.png"/>
+          <p:cNvPicPr>
+            <a:picLocks noChangeAspect="1"/>
+          </p:cNvPicPr>
+          <p:nvPr/>
+        </p:nvPicPr>
+        <p:blipFill>
+          <a:blip r:embed="rId3"/>
+          <a:stretch>
+            <a:fillRect/>
+          </a:stretch>
+        </p:blipFill>
+        <p:spPr>
+          <a:xfrm>
+            <a:off x="-685800" y="-685800"/>
+            <a:ext cx="13563295" cy="8229600"/>
+          </a:xfrm>
+          <a:prstGeom prst="rect">
+            <a:avLst/>
+          </a:prstGeom>
+        </p:spPr>
+      </p:pic>
+      <p:sp>
+        <p:nvSpPr>
+          <p:cNvPr id="6" name="TextBox 5"/>
           <p:cNvSpPr txBox="1"/>
           <p:nvPr/>
         </p:nvSpPr>
@@ -6961,7 +7405,7 @@
       </p:sp>
       <p:sp>
         <p:nvSpPr>
-          <p:cNvPr id="4" name="TextBox 3"/>
+          <p:cNvPr id="7" name="TextBox 6"/>
           <p:cNvSpPr txBox="1"/>
           <p:nvPr/>
         </p:nvSpPr>
@@ -6996,7 +7440,7 @@
       </p:sp>
       <p:sp>
         <p:nvSpPr>
-          <p:cNvPr id="5" name="Rounded Rectangle 4"/>
+          <p:cNvPr id="8" name="Rounded Rectangle 7"/>
           <p:cNvSpPr/>
           <p:nvPr/>
         </p:nvSpPr>
@@ -7043,7 +7487,7 @@
       </p:sp>
       <p:sp>
         <p:nvSpPr>
-          <p:cNvPr id="6" name="TextBox 5"/>
+          <p:cNvPr id="9" name="TextBox 8"/>
           <p:cNvSpPr txBox="1"/>
           <p:nvPr/>
         </p:nvSpPr>
@@ -7078,7 +7522,7 @@
       </p:sp>
       <p:sp>
         <p:nvSpPr>
-          <p:cNvPr id="7" name="TextBox 6"/>
+          <p:cNvPr id="10" name="TextBox 9"/>
           <p:cNvSpPr txBox="1"/>
           <p:nvPr/>
         </p:nvSpPr>
@@ -7133,7 +7577,7 @@
       </p:sp>
       <p:sp>
         <p:nvSpPr>
-          <p:cNvPr id="8" name="Rounded Rectangle 7"/>
+          <p:cNvPr id="11" name="Rounded Rectangle 10"/>
           <p:cNvSpPr/>
           <p:nvPr/>
         </p:nvSpPr>
@@ -7180,7 +7624,7 @@
       </p:sp>
       <p:sp>
         <p:nvSpPr>
-          <p:cNvPr id="9" name="TextBox 8"/>
+          <p:cNvPr id="12" name="TextBox 11"/>
           <p:cNvSpPr txBox="1"/>
           <p:nvPr/>
         </p:nvSpPr>
@@ -7215,7 +7659,7 @@
       </p:sp>
       <p:sp>
         <p:nvSpPr>
-          <p:cNvPr id="10" name="TextBox 9"/>
+          <p:cNvPr id="13" name="TextBox 12"/>
           <p:cNvSpPr txBox="1"/>
           <p:nvPr/>
         </p:nvSpPr>
@@ -7270,7 +7714,7 @@
       </p:sp>
       <p:sp>
         <p:nvSpPr>
-          <p:cNvPr id="11" name="Rounded Rectangle 10"/>
+          <p:cNvPr id="14" name="Rounded Rectangle 13"/>
           <p:cNvSpPr/>
           <p:nvPr/>
         </p:nvSpPr>
@@ -7317,7 +7761,7 @@
       </p:sp>
       <p:sp>
         <p:nvSpPr>
-          <p:cNvPr id="12" name="TextBox 11"/>
+          <p:cNvPr id="15" name="TextBox 14"/>
           <p:cNvSpPr txBox="1"/>
           <p:nvPr/>
         </p:nvSpPr>
@@ -7352,7 +7796,7 @@
       </p:sp>
       <p:sp>
         <p:nvSpPr>
-          <p:cNvPr id="13" name="TextBox 12"/>
+          <p:cNvPr id="16" name="TextBox 15"/>
           <p:cNvSpPr txBox="1"/>
           <p:nvPr/>
         </p:nvSpPr>
@@ -7407,7 +7851,7 @@
       </p:sp>
       <p:sp>
         <p:nvSpPr>
-          <p:cNvPr id="14" name="Rounded Rectangle 13"/>
+          <p:cNvPr id="17" name="Rounded Rectangle 16"/>
           <p:cNvSpPr/>
           <p:nvPr/>
         </p:nvSpPr>
@@ -7454,7 +7898,7 @@
       </p:sp>
       <p:sp>
         <p:nvSpPr>
-          <p:cNvPr id="15" name="TextBox 14"/>
+          <p:cNvPr id="18" name="TextBox 17"/>
           <p:cNvSpPr txBox="1"/>
           <p:nvPr/>
         </p:nvSpPr>
@@ -7489,7 +7933,7 @@
       </p:sp>
       <p:sp>
         <p:nvSpPr>
-          <p:cNvPr id="16" name="TextBox 15"/>
+          <p:cNvPr id="19" name="TextBox 18"/>
           <p:cNvSpPr txBox="1"/>
           <p:nvPr/>
         </p:nvSpPr>
@@ -7544,7 +7988,7 @@
       </p:sp>
       <p:sp>
         <p:nvSpPr>
-          <p:cNvPr id="17" name="Rounded Rectangle 16"/>
+          <p:cNvPr id="20" name="Rounded Rectangle 19"/>
           <p:cNvSpPr/>
           <p:nvPr/>
         </p:nvSpPr>
@@ -7591,7 +8035,7 @@
       </p:sp>
       <p:sp>
         <p:nvSpPr>
-          <p:cNvPr id="18" name="TextBox 17"/>
+          <p:cNvPr id="21" name="TextBox 20"/>
           <p:cNvSpPr txBox="1"/>
           <p:nvPr/>
         </p:nvSpPr>
@@ -7626,7 +8070,7 @@
       </p:sp>
       <p:sp>
         <p:nvSpPr>
-          <p:cNvPr id="19" name="TextBox 18"/>
+          <p:cNvPr id="22" name="TextBox 21"/>
           <p:cNvSpPr txBox="1"/>
           <p:nvPr/>
         </p:nvSpPr>
@@ -7681,7 +8125,7 @@
       </p:sp>
       <p:sp>
         <p:nvSpPr>
-          <p:cNvPr id="20" name="TextBox 19"/>
+          <p:cNvPr id="23" name="TextBox 22"/>
           <p:cNvSpPr txBox="1"/>
           <p:nvPr/>
         </p:nvSpPr>
@@ -7719,6 +8163,66 @@
   <p:clrMapOvr>
     <a:masterClrMapping/>
   </p:clrMapOvr>
+  <p:timing>
+    <p:tnLst>
+      <p:par>
+        <p:cTn id="1" dur="indefinite" restart="never" nodeType="tmRoot">
+          <p:childTnLst>
+            <p:seq concurrent="1" nextAc="seek">
+              <p:cTn id="2" dur="indefinite" nodeType="mainSeq">
+                <p:childTnLst>
+                  <p:par>
+                    <p:cTn id="3" fill="hold">
+                      <p:stCondLst>
+                        <p:cond delay="0"/>
+                      </p:stCondLst>
+                      <p:childTnLst>
+                        <p:par>
+                          <p:cTn id="4" fill="hold">
+                            <p:stCondLst>
+                              <p:cond delay="0"/>
+                            </p:stCondLst>
+                            <p:childTnLst>
+                              <p:animMotion origin="layout" path="M 0 0 L 0.03 0.03" pathEditMode="relative" ptsTypes="AA" rAng="0">
+                                <p:cBhvr>
+                                  <p:cTn id="5" dur="8000" repeatCount="indefinite" autoRev="1" fill="hold">
+                                    <p:stCondLst>
+                                      <p:cond delay="0"/>
+                                    </p:stCondLst>
+                                  </p:cTn>
+                                  <p:tgtEl>
+                                    <p:spTgt spid="3"/>
+                                  </p:tgtEl>
+                                </p:cBhvr>
+                              </p:animMotion>
+                            </p:childTnLst>
+                          </p:cTn>
+                        </p:par>
+                      </p:childTnLst>
+                    </p:cTn>
+                  </p:par>
+                </p:childTnLst>
+              </p:cTn>
+              <p:prevCondLst>
+                <p:cond evt="onPrev" delay="0">
+                  <p:tgtEl>
+                    <p:sldTgt/>
+                  </p:tgtEl>
+                </p:cond>
+              </p:prevCondLst>
+              <p:nextCondLst>
+                <p:cond evt="onNext" delay="0">
+                  <p:tgtEl>
+                    <p:sldTgt/>
+                  </p:tgtEl>
+                </p:cond>
+              </p:nextCondLst>
+            </p:seq>
+          </p:childTnLst>
+        </p:cTn>
+      </p:par>
+    </p:tnLst>
+  </p:timing>
 </p:sld>
 </file>
 
@@ -7764,9 +8268,33 @@
           </a:prstGeom>
         </p:spPr>
       </p:pic>
-      <p:sp>
-        <p:nvSpPr>
-          <p:cNvPr id="3" name="TextBox 2"/>
+      <p:pic>
+        <p:nvPicPr>
+          <p:cNvPr id="3" name="Picture 2" descr="_slide_grid.png"/>
+          <p:cNvPicPr>
+            <a:picLocks noChangeAspect="1"/>
+          </p:cNvPicPr>
+          <p:nvPr/>
+        </p:nvPicPr>
+        <p:blipFill>
+          <a:blip r:embed="rId3"/>
+          <a:stretch>
+            <a:fillRect/>
+          </a:stretch>
+        </p:blipFill>
+        <p:spPr>
+          <a:xfrm>
+            <a:off x="-685800" y="-685800"/>
+            <a:ext cx="13563295" cy="8229600"/>
+          </a:xfrm>
+          <a:prstGeom prst="rect">
+            <a:avLst/>
+          </a:prstGeom>
+        </p:spPr>
+      </p:pic>
+      <p:sp>
+        <p:nvSpPr>
+          <p:cNvPr id="6" name="TextBox 5"/>
           <p:cNvSpPr txBox="1"/>
           <p:nvPr/>
         </p:nvSpPr>
@@ -7801,7 +8329,7 @@
       </p:sp>
       <p:sp>
         <p:nvSpPr>
-          <p:cNvPr id="4" name="TextBox 3"/>
+          <p:cNvPr id="7" name="TextBox 6"/>
           <p:cNvSpPr txBox="1"/>
           <p:nvPr/>
         </p:nvSpPr>
@@ -7836,7 +8364,7 @@
       </p:sp>
       <p:sp>
         <p:nvSpPr>
-          <p:cNvPr id="5" name="Rounded Rectangle 4"/>
+          <p:cNvPr id="8" name="Rounded Rectangle 7"/>
           <p:cNvSpPr/>
           <p:nvPr/>
         </p:nvSpPr>
@@ -7883,7 +8411,7 @@
       </p:sp>
       <p:sp>
         <p:nvSpPr>
-          <p:cNvPr id="6" name="TextBox 5"/>
+          <p:cNvPr id="9" name="TextBox 8"/>
           <p:cNvSpPr txBox="1"/>
           <p:nvPr/>
         </p:nvSpPr>
@@ -7918,7 +8446,7 @@
       </p:sp>
       <p:sp>
         <p:nvSpPr>
-          <p:cNvPr id="7" name="TextBox 6"/>
+          <p:cNvPr id="10" name="TextBox 9"/>
           <p:cNvSpPr txBox="1"/>
           <p:nvPr/>
         </p:nvSpPr>
@@ -7953,7 +8481,7 @@
       </p:sp>
       <p:sp>
         <p:nvSpPr>
-          <p:cNvPr id="8" name="Right Arrow 7"/>
+          <p:cNvPr id="11" name="Right Arrow 10"/>
           <p:cNvSpPr/>
           <p:nvPr/>
         </p:nvSpPr>
@@ -7996,7 +8524,7 @@
       </p:sp>
       <p:sp>
         <p:nvSpPr>
-          <p:cNvPr id="9" name="Rounded Rectangle 8"/>
+          <p:cNvPr id="12" name="Rounded Rectangle 11"/>
           <p:cNvSpPr/>
           <p:nvPr/>
         </p:nvSpPr>
@@ -8043,7 +8571,7 @@
       </p:sp>
       <p:sp>
         <p:nvSpPr>
-          <p:cNvPr id="10" name="TextBox 9"/>
+          <p:cNvPr id="13" name="TextBox 12"/>
           <p:cNvSpPr txBox="1"/>
           <p:nvPr/>
         </p:nvSpPr>
@@ -8078,7 +8606,7 @@
       </p:sp>
       <p:sp>
         <p:nvSpPr>
-          <p:cNvPr id="11" name="TextBox 10"/>
+          <p:cNvPr id="14" name="TextBox 13"/>
           <p:cNvSpPr txBox="1"/>
           <p:nvPr/>
         </p:nvSpPr>
@@ -8113,7 +8641,7 @@
       </p:sp>
       <p:sp>
         <p:nvSpPr>
-          <p:cNvPr id="12" name="Right Arrow 11"/>
+          <p:cNvPr id="15" name="Right Arrow 14"/>
           <p:cNvSpPr/>
           <p:nvPr/>
         </p:nvSpPr>
@@ -8156,7 +8684,7 @@
       </p:sp>
       <p:sp>
         <p:nvSpPr>
-          <p:cNvPr id="13" name="Rounded Rectangle 12"/>
+          <p:cNvPr id="16" name="Rounded Rectangle 15"/>
           <p:cNvSpPr/>
           <p:nvPr/>
         </p:nvSpPr>
@@ -8203,7 +8731,7 @@
       </p:sp>
       <p:sp>
         <p:nvSpPr>
-          <p:cNvPr id="14" name="TextBox 13"/>
+          <p:cNvPr id="17" name="TextBox 16"/>
           <p:cNvSpPr txBox="1"/>
           <p:nvPr/>
         </p:nvSpPr>
@@ -8238,7 +8766,7 @@
       </p:sp>
       <p:sp>
         <p:nvSpPr>
-          <p:cNvPr id="15" name="TextBox 14"/>
+          <p:cNvPr id="18" name="TextBox 17"/>
           <p:cNvSpPr txBox="1"/>
           <p:nvPr/>
         </p:nvSpPr>
@@ -8273,7 +8801,7 @@
       </p:sp>
       <p:sp>
         <p:nvSpPr>
-          <p:cNvPr id="16" name="Right Arrow 15"/>
+          <p:cNvPr id="19" name="Right Arrow 18"/>
           <p:cNvSpPr/>
           <p:nvPr/>
         </p:nvSpPr>
@@ -8316,7 +8844,7 @@
       </p:sp>
       <p:sp>
         <p:nvSpPr>
-          <p:cNvPr id="17" name="Rounded Rectangle 16"/>
+          <p:cNvPr id="20" name="Rounded Rectangle 19"/>
           <p:cNvSpPr/>
           <p:nvPr/>
         </p:nvSpPr>
@@ -8363,7 +8891,7 @@
       </p:sp>
       <p:sp>
         <p:nvSpPr>
-          <p:cNvPr id="18" name="TextBox 17"/>
+          <p:cNvPr id="21" name="TextBox 20"/>
           <p:cNvSpPr txBox="1"/>
           <p:nvPr/>
         </p:nvSpPr>
@@ -8398,7 +8926,7 @@
       </p:sp>
       <p:sp>
         <p:nvSpPr>
-          <p:cNvPr id="19" name="TextBox 18"/>
+          <p:cNvPr id="22" name="TextBox 21"/>
           <p:cNvSpPr txBox="1"/>
           <p:nvPr/>
         </p:nvSpPr>
@@ -8433,7 +8961,7 @@
       </p:sp>
       <p:sp>
         <p:nvSpPr>
-          <p:cNvPr id="20" name="TextBox 19"/>
+          <p:cNvPr id="23" name="TextBox 22"/>
           <p:cNvSpPr txBox="1"/>
           <p:nvPr/>
         </p:nvSpPr>
@@ -8471,6 +8999,66 @@
   <p:clrMapOvr>
     <a:masterClrMapping/>
   </p:clrMapOvr>
+  <p:timing>
+    <p:tnLst>
+      <p:par>
+        <p:cTn id="1" dur="indefinite" restart="never" nodeType="tmRoot">
+          <p:childTnLst>
+            <p:seq concurrent="1" nextAc="seek">
+              <p:cTn id="2" dur="indefinite" nodeType="mainSeq">
+                <p:childTnLst>
+                  <p:par>
+                    <p:cTn id="3" fill="hold">
+                      <p:stCondLst>
+                        <p:cond delay="0"/>
+                      </p:stCondLst>
+                      <p:childTnLst>
+                        <p:par>
+                          <p:cTn id="4" fill="hold">
+                            <p:stCondLst>
+                              <p:cond delay="0"/>
+                            </p:stCondLst>
+                            <p:childTnLst>
+                              <p:animMotion origin="layout" path="M 0 0 L 0.03 0.03" pathEditMode="relative" ptsTypes="AA" rAng="0">
+                                <p:cBhvr>
+                                  <p:cTn id="5" dur="8000" repeatCount="indefinite" autoRev="1" fill="hold">
+                                    <p:stCondLst>
+                                      <p:cond delay="0"/>
+                                    </p:stCondLst>
+                                  </p:cTn>
+                                  <p:tgtEl>
+                                    <p:spTgt spid="3"/>
+                                  </p:tgtEl>
+                                </p:cBhvr>
+                              </p:animMotion>
+                            </p:childTnLst>
+                          </p:cTn>
+                        </p:par>
+                      </p:childTnLst>
+                    </p:cTn>
+                  </p:par>
+                </p:childTnLst>
+              </p:cTn>
+              <p:prevCondLst>
+                <p:cond evt="onPrev" delay="0">
+                  <p:tgtEl>
+                    <p:sldTgt/>
+                  </p:tgtEl>
+                </p:cond>
+              </p:prevCondLst>
+              <p:nextCondLst>
+                <p:cond evt="onNext" delay="0">
+                  <p:tgtEl>
+                    <p:sldTgt/>
+                  </p:tgtEl>
+                </p:cond>
+              </p:nextCondLst>
+            </p:seq>
+          </p:childTnLst>
+        </p:cTn>
+      </p:par>
+    </p:tnLst>
+  </p:timing>
 </p:sld>
 </file>
 
@@ -8516,9 +9104,33 @@
           </a:prstGeom>
         </p:spPr>
       </p:pic>
-      <p:sp>
-        <p:nvSpPr>
-          <p:cNvPr id="3" name="TextBox 2"/>
+      <p:pic>
+        <p:nvPicPr>
+          <p:cNvPr id="3" name="Picture 2" descr="_slide_grid.png"/>
+          <p:cNvPicPr>
+            <a:picLocks noChangeAspect="1"/>
+          </p:cNvPicPr>
+          <p:nvPr/>
+        </p:nvPicPr>
+        <p:blipFill>
+          <a:blip r:embed="rId3"/>
+          <a:stretch>
+            <a:fillRect/>
+          </a:stretch>
+        </p:blipFill>
+        <p:spPr>
+          <a:xfrm>
+            <a:off x="-685800" y="-685800"/>
+            <a:ext cx="13563295" cy="8229600"/>
+          </a:xfrm>
+          <a:prstGeom prst="rect">
+            <a:avLst/>
+          </a:prstGeom>
+        </p:spPr>
+      </p:pic>
+      <p:sp>
+        <p:nvSpPr>
+          <p:cNvPr id="6" name="TextBox 5"/>
           <p:cNvSpPr txBox="1"/>
           <p:nvPr/>
         </p:nvSpPr>
@@ -8553,7 +9165,7 @@
       </p:sp>
       <p:sp>
         <p:nvSpPr>
-          <p:cNvPr id="4" name="TextBox 3"/>
+          <p:cNvPr id="7" name="TextBox 6"/>
           <p:cNvSpPr txBox="1"/>
           <p:nvPr/>
         </p:nvSpPr>
@@ -8588,7 +9200,7 @@
       </p:sp>
       <p:sp>
         <p:nvSpPr>
-          <p:cNvPr id="5" name="Rounded Rectangle 4"/>
+          <p:cNvPr id="8" name="Rounded Rectangle 7"/>
           <p:cNvSpPr/>
           <p:nvPr/>
         </p:nvSpPr>
@@ -8635,7 +9247,7 @@
       </p:sp>
       <p:sp>
         <p:nvSpPr>
-          <p:cNvPr id="6" name="Oval 5"/>
+          <p:cNvPr id="9" name="Oval 8"/>
           <p:cNvSpPr/>
           <p:nvPr/>
         </p:nvSpPr>
@@ -8678,7 +9290,7 @@
       </p:sp>
       <p:sp>
         <p:nvSpPr>
-          <p:cNvPr id="7" name="Oval 6"/>
+          <p:cNvPr id="10" name="Oval 9"/>
           <p:cNvSpPr/>
           <p:nvPr/>
         </p:nvSpPr>
@@ -8721,7 +9333,7 @@
       </p:sp>
       <p:sp>
         <p:nvSpPr>
-          <p:cNvPr id="8" name="Oval 7"/>
+          <p:cNvPr id="11" name="Oval 10"/>
           <p:cNvSpPr/>
           <p:nvPr/>
         </p:nvSpPr>
@@ -8764,7 +9376,7 @@
       </p:sp>
       <p:sp>
         <p:nvSpPr>
-          <p:cNvPr id="9" name="TextBox 8"/>
+          <p:cNvPr id="12" name="TextBox 11"/>
           <p:cNvSpPr txBox="1"/>
           <p:nvPr/>
         </p:nvSpPr>
@@ -8799,7 +9411,7 @@
       </p:sp>
       <p:sp>
         <p:nvSpPr>
-          <p:cNvPr id="10" name="TextBox 9"/>
+          <p:cNvPr id="13" name="TextBox 12"/>
           <p:cNvSpPr txBox="1"/>
           <p:nvPr/>
         </p:nvSpPr>
@@ -8841,7 +9453,7 @@
       </p:sp>
       <p:sp>
         <p:nvSpPr>
-          <p:cNvPr id="11" name="Rounded Rectangle 10"/>
+          <p:cNvPr id="14" name="Rounded Rectangle 13"/>
           <p:cNvSpPr/>
           <p:nvPr/>
         </p:nvSpPr>
@@ -8888,7 +9500,7 @@
       </p:sp>
       <p:sp>
         <p:nvSpPr>
-          <p:cNvPr id="12" name="TextBox 11"/>
+          <p:cNvPr id="15" name="TextBox 14"/>
           <p:cNvSpPr txBox="1"/>
           <p:nvPr/>
         </p:nvSpPr>
@@ -8923,7 +9535,7 @@
       </p:sp>
       <p:sp>
         <p:nvSpPr>
-          <p:cNvPr id="13" name="Oval 12"/>
+          <p:cNvPr id="16" name="Oval 15"/>
           <p:cNvSpPr/>
           <p:nvPr/>
         </p:nvSpPr>
@@ -8966,7 +9578,7 @@
       </p:sp>
       <p:sp>
         <p:nvSpPr>
-          <p:cNvPr id="14" name="TextBox 13"/>
+          <p:cNvPr id="17" name="TextBox 16"/>
           <p:cNvSpPr txBox="1"/>
           <p:nvPr/>
         </p:nvSpPr>
@@ -9001,7 +9613,7 @@
       </p:sp>
       <p:sp>
         <p:nvSpPr>
-          <p:cNvPr id="15" name="TextBox 14"/>
+          <p:cNvPr id="18" name="TextBox 17"/>
           <p:cNvSpPr txBox="1"/>
           <p:nvPr/>
         </p:nvSpPr>
@@ -9036,7 +9648,7 @@
       </p:sp>
       <p:sp>
         <p:nvSpPr>
-          <p:cNvPr id="16" name="Oval 15"/>
+          <p:cNvPr id="19" name="Oval 18"/>
           <p:cNvSpPr/>
           <p:nvPr/>
         </p:nvSpPr>
@@ -9079,7 +9691,7 @@
       </p:sp>
       <p:sp>
         <p:nvSpPr>
-          <p:cNvPr id="17" name="TextBox 16"/>
+          <p:cNvPr id="20" name="TextBox 19"/>
           <p:cNvSpPr txBox="1"/>
           <p:nvPr/>
         </p:nvSpPr>
@@ -9114,7 +9726,7 @@
       </p:sp>
       <p:sp>
         <p:nvSpPr>
-          <p:cNvPr id="18" name="TextBox 17"/>
+          <p:cNvPr id="21" name="TextBox 20"/>
           <p:cNvSpPr txBox="1"/>
           <p:nvPr/>
         </p:nvSpPr>
@@ -9149,7 +9761,7 @@
       </p:sp>
       <p:sp>
         <p:nvSpPr>
-          <p:cNvPr id="19" name="Oval 18"/>
+          <p:cNvPr id="22" name="Oval 21"/>
           <p:cNvSpPr/>
           <p:nvPr/>
         </p:nvSpPr>
@@ -9192,7 +9804,7 @@
       </p:sp>
       <p:sp>
         <p:nvSpPr>
-          <p:cNvPr id="20" name="TextBox 19"/>
+          <p:cNvPr id="23" name="TextBox 22"/>
           <p:cNvSpPr txBox="1"/>
           <p:nvPr/>
         </p:nvSpPr>
@@ -9227,7 +9839,7 @@
       </p:sp>
       <p:sp>
         <p:nvSpPr>
-          <p:cNvPr id="21" name="TextBox 20"/>
+          <p:cNvPr id="24" name="TextBox 23"/>
           <p:cNvSpPr txBox="1"/>
           <p:nvPr/>
         </p:nvSpPr>
@@ -9262,7 +9874,7 @@
       </p:sp>
       <p:sp>
         <p:nvSpPr>
-          <p:cNvPr id="22" name="Oval 21"/>
+          <p:cNvPr id="25" name="Oval 24"/>
           <p:cNvSpPr/>
           <p:nvPr/>
         </p:nvSpPr>
@@ -9305,7 +9917,7 @@
       </p:sp>
       <p:sp>
         <p:nvSpPr>
-          <p:cNvPr id="23" name="TextBox 22"/>
+          <p:cNvPr id="26" name="TextBox 25"/>
           <p:cNvSpPr txBox="1"/>
           <p:nvPr/>
         </p:nvSpPr>
@@ -9340,7 +9952,7 @@
       </p:sp>
       <p:sp>
         <p:nvSpPr>
-          <p:cNvPr id="24" name="TextBox 23"/>
+          <p:cNvPr id="27" name="TextBox 26"/>
           <p:cNvSpPr txBox="1"/>
           <p:nvPr/>
         </p:nvSpPr>
@@ -9378,6 +9990,66 @@
   <p:clrMapOvr>
     <a:masterClrMapping/>
   </p:clrMapOvr>
+  <p:timing>
+    <p:tnLst>
+      <p:par>
+        <p:cTn id="1" dur="indefinite" restart="never" nodeType="tmRoot">
+          <p:childTnLst>
+            <p:seq concurrent="1" nextAc="seek">
+              <p:cTn id="2" dur="indefinite" nodeType="mainSeq">
+                <p:childTnLst>
+                  <p:par>
+                    <p:cTn id="3" fill="hold">
+                      <p:stCondLst>
+                        <p:cond delay="0"/>
+                      </p:stCondLst>
+                      <p:childTnLst>
+                        <p:par>
+                          <p:cTn id="4" fill="hold">
+                            <p:stCondLst>
+                              <p:cond delay="0"/>
+                            </p:stCondLst>
+                            <p:childTnLst>
+                              <p:animMotion origin="layout" path="M 0 0 L 0.03 0.03" pathEditMode="relative" ptsTypes="AA" rAng="0">
+                                <p:cBhvr>
+                                  <p:cTn id="5" dur="8000" repeatCount="indefinite" autoRev="1" fill="hold">
+                                    <p:stCondLst>
+                                      <p:cond delay="0"/>
+                                    </p:stCondLst>
+                                  </p:cTn>
+                                  <p:tgtEl>
+                                    <p:spTgt spid="3"/>
+                                  </p:tgtEl>
+                                </p:cBhvr>
+                              </p:animMotion>
+                            </p:childTnLst>
+                          </p:cTn>
+                        </p:par>
+                      </p:childTnLst>
+                    </p:cTn>
+                  </p:par>
+                </p:childTnLst>
+              </p:cTn>
+              <p:prevCondLst>
+                <p:cond evt="onPrev" delay="0">
+                  <p:tgtEl>
+                    <p:sldTgt/>
+                  </p:tgtEl>
+                </p:cond>
+              </p:prevCondLst>
+              <p:nextCondLst>
+                <p:cond evt="onNext" delay="0">
+                  <p:tgtEl>
+                    <p:sldTgt/>
+                  </p:tgtEl>
+                </p:cond>
+              </p:nextCondLst>
+            </p:seq>
+          </p:childTnLst>
+        </p:cTn>
+      </p:par>
+    </p:tnLst>
+  </p:timing>
 </p:sld>
 </file>
 
@@ -9423,9 +10095,33 @@
           </a:prstGeom>
         </p:spPr>
       </p:pic>
-      <p:sp>
-        <p:nvSpPr>
-          <p:cNvPr id="3" name="TextBox 2"/>
+      <p:pic>
+        <p:nvPicPr>
+          <p:cNvPr id="3" name="Picture 2" descr="_slide_grid.png"/>
+          <p:cNvPicPr>
+            <a:picLocks noChangeAspect="1"/>
+          </p:cNvPicPr>
+          <p:nvPr/>
+        </p:nvPicPr>
+        <p:blipFill>
+          <a:blip r:embed="rId3"/>
+          <a:stretch>
+            <a:fillRect/>
+          </a:stretch>
+        </p:blipFill>
+        <p:spPr>
+          <a:xfrm>
+            <a:off x="-685800" y="-685800"/>
+            <a:ext cx="13563295" cy="8229600"/>
+          </a:xfrm>
+          <a:prstGeom prst="rect">
+            <a:avLst/>
+          </a:prstGeom>
+        </p:spPr>
+      </p:pic>
+      <p:sp>
+        <p:nvSpPr>
+          <p:cNvPr id="6" name="TextBox 5"/>
           <p:cNvSpPr txBox="1"/>
           <p:nvPr/>
         </p:nvSpPr>
@@ -9460,7 +10156,7 @@
       </p:sp>
       <p:sp>
         <p:nvSpPr>
-          <p:cNvPr id="4" name="TextBox 3"/>
+          <p:cNvPr id="7" name="TextBox 6"/>
           <p:cNvSpPr txBox="1"/>
           <p:nvPr/>
         </p:nvSpPr>
@@ -9495,7 +10191,7 @@
       </p:sp>
       <p:sp>
         <p:nvSpPr>
-          <p:cNvPr id="5" name="TextBox 4"/>
+          <p:cNvPr id="8" name="TextBox 7"/>
           <p:cNvSpPr txBox="1"/>
           <p:nvPr/>
         </p:nvSpPr>
@@ -9530,7 +10226,7 @@
       </p:sp>
       <p:sp>
         <p:nvSpPr>
-          <p:cNvPr id="6" name="TextBox 5"/>
+          <p:cNvPr id="9" name="TextBox 8"/>
           <p:cNvSpPr txBox="1"/>
           <p:nvPr/>
         </p:nvSpPr>
@@ -9565,7 +10261,7 @@
       </p:sp>
       <p:sp>
         <p:nvSpPr>
-          <p:cNvPr id="7" name="Rounded Rectangle 6"/>
+          <p:cNvPr id="10" name="Rounded Rectangle 9"/>
           <p:cNvSpPr/>
           <p:nvPr/>
         </p:nvSpPr>
@@ -9610,7 +10306,7 @@
       </p:sp>
       <p:sp>
         <p:nvSpPr>
-          <p:cNvPr id="8" name="Rounded Rectangle 7"/>
+          <p:cNvPr id="11" name="Rounded Rectangle 10"/>
           <p:cNvSpPr/>
           <p:nvPr/>
         </p:nvSpPr>
@@ -9655,7 +10351,7 @@
       </p:sp>
       <p:sp>
         <p:nvSpPr>
-          <p:cNvPr id="9" name="TextBox 8"/>
+          <p:cNvPr id="12" name="TextBox 11"/>
           <p:cNvSpPr txBox="1"/>
           <p:nvPr/>
         </p:nvSpPr>
@@ -9690,7 +10386,7 @@
       </p:sp>
       <p:sp>
         <p:nvSpPr>
-          <p:cNvPr id="10" name="Rounded Rectangle 9"/>
+          <p:cNvPr id="13" name="Rounded Rectangle 12"/>
           <p:cNvSpPr/>
           <p:nvPr/>
         </p:nvSpPr>
@@ -9744,7 +10440,7 @@
       </p:sp>
       <p:sp>
         <p:nvSpPr>
-          <p:cNvPr id="11" name="Rounded Rectangle 10"/>
+          <p:cNvPr id="14" name="Rounded Rectangle 13"/>
           <p:cNvSpPr/>
           <p:nvPr/>
         </p:nvSpPr>
@@ -9798,7 +10494,7 @@
       </p:sp>
       <p:sp>
         <p:nvSpPr>
-          <p:cNvPr id="12" name="Rounded Rectangle 11"/>
+          <p:cNvPr id="15" name="Rounded Rectangle 14"/>
           <p:cNvSpPr/>
           <p:nvPr/>
         </p:nvSpPr>
@@ -9852,7 +10548,7 @@
       </p:sp>
       <p:sp>
         <p:nvSpPr>
-          <p:cNvPr id="13" name="Rounded Rectangle 12"/>
+          <p:cNvPr id="16" name="Rounded Rectangle 15"/>
           <p:cNvSpPr/>
           <p:nvPr/>
         </p:nvSpPr>
@@ -9906,7 +10602,7 @@
       </p:sp>
       <p:sp>
         <p:nvSpPr>
-          <p:cNvPr id="14" name="TextBox 13"/>
+          <p:cNvPr id="17" name="TextBox 16"/>
           <p:cNvSpPr txBox="1"/>
           <p:nvPr/>
         </p:nvSpPr>
@@ -9941,7 +10637,7 @@
       </p:sp>
       <p:sp>
         <p:nvSpPr>
-          <p:cNvPr id="15" name="TextBox 14"/>
+          <p:cNvPr id="18" name="TextBox 17"/>
           <p:cNvSpPr txBox="1"/>
           <p:nvPr/>
         </p:nvSpPr>
@@ -9979,6 +10675,66 @@
   <p:clrMapOvr>
     <a:masterClrMapping/>
   </p:clrMapOvr>
+  <p:timing>
+    <p:tnLst>
+      <p:par>
+        <p:cTn id="1" dur="indefinite" restart="never" nodeType="tmRoot">
+          <p:childTnLst>
+            <p:seq concurrent="1" nextAc="seek">
+              <p:cTn id="2" dur="indefinite" nodeType="mainSeq">
+                <p:childTnLst>
+                  <p:par>
+                    <p:cTn id="3" fill="hold">
+                      <p:stCondLst>
+                        <p:cond delay="0"/>
+                      </p:stCondLst>
+                      <p:childTnLst>
+                        <p:par>
+                          <p:cTn id="4" fill="hold">
+                            <p:stCondLst>
+                              <p:cond delay="0"/>
+                            </p:stCondLst>
+                            <p:childTnLst>
+                              <p:animMotion origin="layout" path="M 0 0 L 0.03 0.03" pathEditMode="relative" ptsTypes="AA" rAng="0">
+                                <p:cBhvr>
+                                  <p:cTn id="5" dur="8000" repeatCount="indefinite" autoRev="1" fill="hold">
+                                    <p:stCondLst>
+                                      <p:cond delay="0"/>
+                                    </p:stCondLst>
+                                  </p:cTn>
+                                  <p:tgtEl>
+                                    <p:spTgt spid="3"/>
+                                  </p:tgtEl>
+                                </p:cBhvr>
+                              </p:animMotion>
+                            </p:childTnLst>
+                          </p:cTn>
+                        </p:par>
+                      </p:childTnLst>
+                    </p:cTn>
+                  </p:par>
+                </p:childTnLst>
+              </p:cTn>
+              <p:prevCondLst>
+                <p:cond evt="onPrev" delay="0">
+                  <p:tgtEl>
+                    <p:sldTgt/>
+                  </p:tgtEl>
+                </p:cond>
+              </p:prevCondLst>
+              <p:nextCondLst>
+                <p:cond evt="onNext" delay="0">
+                  <p:tgtEl>
+                    <p:sldTgt/>
+                  </p:tgtEl>
+                </p:cond>
+              </p:nextCondLst>
+            </p:seq>
+          </p:childTnLst>
+        </p:cTn>
+      </p:par>
+    </p:tnLst>
+  </p:timing>
 </p:sld>
 </file>
 
@@ -10024,9 +10780,33 @@
           </a:prstGeom>
         </p:spPr>
       </p:pic>
-      <p:sp>
-        <p:nvSpPr>
-          <p:cNvPr id="3" name="TextBox 2"/>
+      <p:pic>
+        <p:nvPicPr>
+          <p:cNvPr id="3" name="Picture 2" descr="_slide_grid.png"/>
+          <p:cNvPicPr>
+            <a:picLocks noChangeAspect="1"/>
+          </p:cNvPicPr>
+          <p:nvPr/>
+        </p:nvPicPr>
+        <p:blipFill>
+          <a:blip r:embed="rId3"/>
+          <a:stretch>
+            <a:fillRect/>
+          </a:stretch>
+        </p:blipFill>
+        <p:spPr>
+          <a:xfrm>
+            <a:off x="-685800" y="-685800"/>
+            <a:ext cx="13563295" cy="8229600"/>
+          </a:xfrm>
+          <a:prstGeom prst="rect">
+            <a:avLst/>
+          </a:prstGeom>
+        </p:spPr>
+      </p:pic>
+      <p:sp>
+        <p:nvSpPr>
+          <p:cNvPr id="6" name="TextBox 5"/>
           <p:cNvSpPr txBox="1"/>
           <p:nvPr/>
         </p:nvSpPr>
@@ -10061,7 +10841,7 @@
       </p:sp>
       <p:sp>
         <p:nvSpPr>
-          <p:cNvPr id="4" name="TextBox 3"/>
+          <p:cNvPr id="7" name="TextBox 6"/>
           <p:cNvSpPr txBox="1"/>
           <p:nvPr/>
         </p:nvSpPr>
@@ -10096,7 +10876,7 @@
       </p:sp>
       <p:sp>
         <p:nvSpPr>
-          <p:cNvPr id="5" name="TextBox 4"/>
+          <p:cNvPr id="8" name="TextBox 7"/>
           <p:cNvSpPr txBox="1"/>
           <p:nvPr/>
         </p:nvSpPr>
@@ -10131,7 +10911,7 @@
       </p:sp>
       <p:sp>
         <p:nvSpPr>
-          <p:cNvPr id="6" name="TextBox 5"/>
+          <p:cNvPr id="9" name="TextBox 8"/>
           <p:cNvSpPr txBox="1"/>
           <p:nvPr/>
         </p:nvSpPr>
@@ -10166,7 +10946,7 @@
       </p:sp>
       <p:sp>
         <p:nvSpPr>
-          <p:cNvPr id="7" name="TextBox 6"/>
+          <p:cNvPr id="10" name="TextBox 9"/>
           <p:cNvSpPr txBox="1"/>
           <p:nvPr/>
         </p:nvSpPr>
@@ -10201,7 +10981,7 @@
       </p:sp>
       <p:sp>
         <p:nvSpPr>
-          <p:cNvPr id="8" name="TextBox 7"/>
+          <p:cNvPr id="11" name="TextBox 10"/>
           <p:cNvSpPr txBox="1"/>
           <p:nvPr/>
         </p:nvSpPr>
@@ -10236,7 +11016,7 @@
       </p:sp>
       <p:sp>
         <p:nvSpPr>
-          <p:cNvPr id="9" name="TextBox 8"/>
+          <p:cNvPr id="12" name="TextBox 11"/>
           <p:cNvSpPr txBox="1"/>
           <p:nvPr/>
         </p:nvSpPr>
@@ -10271,7 +11051,7 @@
       </p:sp>
       <p:sp>
         <p:nvSpPr>
-          <p:cNvPr id="10" name="TextBox 9"/>
+          <p:cNvPr id="13" name="TextBox 12"/>
           <p:cNvSpPr txBox="1"/>
           <p:nvPr/>
         </p:nvSpPr>
@@ -10306,7 +11086,7 @@
       </p:sp>
       <p:sp>
         <p:nvSpPr>
-          <p:cNvPr id="11" name="TextBox 10"/>
+          <p:cNvPr id="14" name="TextBox 13"/>
           <p:cNvSpPr txBox="1"/>
           <p:nvPr/>
         </p:nvSpPr>
@@ -10341,7 +11121,7 @@
       </p:sp>
       <p:sp>
         <p:nvSpPr>
-          <p:cNvPr id="12" name="TextBox 11"/>
+          <p:cNvPr id="15" name="TextBox 14"/>
           <p:cNvSpPr txBox="1"/>
           <p:nvPr/>
         </p:nvSpPr>
@@ -10376,7 +11156,7 @@
       </p:sp>
       <p:sp>
         <p:nvSpPr>
-          <p:cNvPr id="13" name="TextBox 12"/>
+          <p:cNvPr id="16" name="TextBox 15"/>
           <p:cNvSpPr txBox="1"/>
           <p:nvPr/>
         </p:nvSpPr>
@@ -10411,7 +11191,7 @@
       </p:sp>
       <p:sp>
         <p:nvSpPr>
-          <p:cNvPr id="14" name="TextBox 13"/>
+          <p:cNvPr id="17" name="TextBox 16"/>
           <p:cNvSpPr txBox="1"/>
           <p:nvPr/>
         </p:nvSpPr>
@@ -10446,7 +11226,7 @@
       </p:sp>
       <p:sp>
         <p:nvSpPr>
-          <p:cNvPr id="15" name="TextBox 14"/>
+          <p:cNvPr id="18" name="TextBox 17"/>
           <p:cNvSpPr txBox="1"/>
           <p:nvPr/>
         </p:nvSpPr>
@@ -10484,6 +11264,66 @@
   <p:clrMapOvr>
     <a:masterClrMapping/>
   </p:clrMapOvr>
+  <p:timing>
+    <p:tnLst>
+      <p:par>
+        <p:cTn id="1" dur="indefinite" restart="never" nodeType="tmRoot">
+          <p:childTnLst>
+            <p:seq concurrent="1" nextAc="seek">
+              <p:cTn id="2" dur="indefinite" nodeType="mainSeq">
+                <p:childTnLst>
+                  <p:par>
+                    <p:cTn id="3" fill="hold">
+                      <p:stCondLst>
+                        <p:cond delay="0"/>
+                      </p:stCondLst>
+                      <p:childTnLst>
+                        <p:par>
+                          <p:cTn id="4" fill="hold">
+                            <p:stCondLst>
+                              <p:cond delay="0"/>
+                            </p:stCondLst>
+                            <p:childTnLst>
+                              <p:animMotion origin="layout" path="M 0 0 L 0.03 0.03" pathEditMode="relative" ptsTypes="AA" rAng="0">
+                                <p:cBhvr>
+                                  <p:cTn id="5" dur="8000" repeatCount="indefinite" autoRev="1" fill="hold">
+                                    <p:stCondLst>
+                                      <p:cond delay="0"/>
+                                    </p:stCondLst>
+                                  </p:cTn>
+                                  <p:tgtEl>
+                                    <p:spTgt spid="3"/>
+                                  </p:tgtEl>
+                                </p:cBhvr>
+                              </p:animMotion>
+                            </p:childTnLst>
+                          </p:cTn>
+                        </p:par>
+                      </p:childTnLst>
+                    </p:cTn>
+                  </p:par>
+                </p:childTnLst>
+              </p:cTn>
+              <p:prevCondLst>
+                <p:cond evt="onPrev" delay="0">
+                  <p:tgtEl>
+                    <p:sldTgt/>
+                  </p:tgtEl>
+                </p:cond>
+              </p:prevCondLst>
+              <p:nextCondLst>
+                <p:cond evt="onNext" delay="0">
+                  <p:tgtEl>
+                    <p:sldTgt/>
+                  </p:tgtEl>
+                </p:cond>
+              </p:nextCondLst>
+            </p:seq>
+          </p:childTnLst>
+        </p:cTn>
+      </p:par>
+    </p:tnLst>
+  </p:timing>
 </p:sld>
 </file>
 
